--- a/usmeta/PROJECT_SLIDES.pptx
+++ b/usmeta/PROJECT_SLIDES.pptx
@@ -12,9 +12,11 @@
     <p:sldId id="260" r:id="rId6"/>
     <p:sldId id="261" r:id="rId7"/>
     <p:sldId id="262" r:id="rId8"/>
+    <p:sldId id="263" r:id="rId9"/>
+    <p:sldId id="264" r:id="rId10"/>
   </p:sldIdLst>
   <p:notesMasterIdLst>
-    <p:notesMasterId r:id="rId9"/>
+    <p:notesMasterId r:id="rId11"/>
   </p:notesMasterIdLst>
   <p:sldSz cx="9144000" cy="5143500"/>
   <p:notesSz cx="5143500" cy="9144000"/>
@@ -1338,6 +1340,182 @@
             <a:fld id="{F7021451-1387-4CA6-816F-3879F97B5CBC}" type="slidenum">
               <a:rPr lang="en-US"/>
               <a:t>7</a:t>
+            </a:fld>
+            <a:endParaRPr lang="en-US"/>
+          </a:p>
+        </p:txBody>
+      </p:sp>
+    </p:spTree>
+    <p:extLst>
+      <p:ext uri="{BB962C8B-B14F-4D97-AF65-F5344CB8AC3E}">
+        <p14:creationId xmlns:p14="http://schemas.microsoft.com/office/powerpoint/2010/main" val="1024086991"/>
+      </p:ext>
+    </p:extLst>
+  </p:cSld>
+  <p:clrMapOvr>
+    <a:masterClrMapping/>
+  </p:clrMapOvr>
+</p:notes>
+</file>
+
+<file path=ppt/notesSlides/notesSlide8.xml><?xml version="1.0" encoding="utf-8"?>
+<p:notes xmlns:a="http://schemas.openxmlformats.org/drawingml/2006/main" xmlns:r="http://schemas.openxmlformats.org/officeDocument/2006/relationships" xmlns:p="http://schemas.openxmlformats.org/presentationml/2006/main">
+  <p:cSld>
+    <p:spTree>
+      <p:nvGrpSpPr>
+        <p:cNvPr id="1" name=""/>
+        <p:cNvGrpSpPr/>
+        <p:nvPr/>
+      </p:nvGrpSpPr>
+      <p:grpSpPr>
+        <a:xfrm>
+          <a:off x="0" y="0"/>
+          <a:ext cx="0" cy="0"/>
+          <a:chOff x="0" y="0"/>
+          <a:chExt cx="0" cy="0"/>
+        </a:xfrm>
+      </p:grpSpPr>
+      <p:sp>
+        <p:nvSpPr>
+          <p:cNvPr id="2" name="Slide Image Placeholder 1"/>
+          <p:cNvSpPr>
+            <a:spLocks noGrp="1" noRot="1" noChangeAspect="1"/>
+          </p:cNvSpPr>
+          <p:nvPr>
+            <p:ph type="sldImg"/>
+          </p:nvPr>
+        </p:nvSpPr>
+        <p:spPr/>
+      </p:sp>
+      <p:sp>
+        <p:nvSpPr>
+          <p:cNvPr id="3" name="Notes Placeholder 2"/>
+          <p:cNvSpPr>
+            <a:spLocks noGrp="1"/>
+          </p:cNvSpPr>
+          <p:nvPr>
+            <p:ph type="body" idx="1"/>
+          </p:nvPr>
+        </p:nvSpPr>
+        <p:spPr/>
+        <p:txBody>
+          <a:bodyPr/>
+          <a:lstStyle/>
+          <a:p>
+            <a:r>
+              <a:rPr lang="en-US" dirty="0"/>
+              <a:t/>
+            </a:r>
+            <a:endParaRPr lang="en-US" dirty="0"/>
+          </a:p>
+        </p:txBody>
+      </p:sp>
+      <p:sp>
+        <p:nvSpPr>
+          <p:cNvPr id="4" name="Slide Number Placeholder 3"/>
+          <p:cNvSpPr>
+            <a:spLocks noGrp="1"/>
+          </p:cNvSpPr>
+          <p:nvPr>
+            <p:ph type="sldNum" sz="quarter" idx="10"/>
+          </p:nvPr>
+        </p:nvSpPr>
+        <p:spPr/>
+        <p:txBody>
+          <a:bodyPr/>
+          <a:lstStyle/>
+          <a:p>
+            <a:fld id="{F7021451-1387-4CA6-816F-3879F97B5CBC}" type="slidenum">
+              <a:rPr lang="en-US"/>
+              <a:t>8</a:t>
+            </a:fld>
+            <a:endParaRPr lang="en-US"/>
+          </a:p>
+        </p:txBody>
+      </p:sp>
+    </p:spTree>
+    <p:extLst>
+      <p:ext uri="{BB962C8B-B14F-4D97-AF65-F5344CB8AC3E}">
+        <p14:creationId xmlns:p14="http://schemas.microsoft.com/office/powerpoint/2010/main" val="1024086991"/>
+      </p:ext>
+    </p:extLst>
+  </p:cSld>
+  <p:clrMapOvr>
+    <a:masterClrMapping/>
+  </p:clrMapOvr>
+</p:notes>
+</file>
+
+<file path=ppt/notesSlides/notesSlide9.xml><?xml version="1.0" encoding="utf-8"?>
+<p:notes xmlns:a="http://schemas.openxmlformats.org/drawingml/2006/main" xmlns:r="http://schemas.openxmlformats.org/officeDocument/2006/relationships" xmlns:p="http://schemas.openxmlformats.org/presentationml/2006/main">
+  <p:cSld>
+    <p:spTree>
+      <p:nvGrpSpPr>
+        <p:cNvPr id="1" name=""/>
+        <p:cNvGrpSpPr/>
+        <p:nvPr/>
+      </p:nvGrpSpPr>
+      <p:grpSpPr>
+        <a:xfrm>
+          <a:off x="0" y="0"/>
+          <a:ext cx="0" cy="0"/>
+          <a:chOff x="0" y="0"/>
+          <a:chExt cx="0" cy="0"/>
+        </a:xfrm>
+      </p:grpSpPr>
+      <p:sp>
+        <p:nvSpPr>
+          <p:cNvPr id="2" name="Slide Image Placeholder 1"/>
+          <p:cNvSpPr>
+            <a:spLocks noGrp="1" noRot="1" noChangeAspect="1"/>
+          </p:cNvSpPr>
+          <p:nvPr>
+            <p:ph type="sldImg"/>
+          </p:nvPr>
+        </p:nvSpPr>
+        <p:spPr/>
+      </p:sp>
+      <p:sp>
+        <p:nvSpPr>
+          <p:cNvPr id="3" name="Notes Placeholder 2"/>
+          <p:cNvSpPr>
+            <a:spLocks noGrp="1"/>
+          </p:cNvSpPr>
+          <p:nvPr>
+            <p:ph type="body" idx="1"/>
+          </p:nvPr>
+        </p:nvSpPr>
+        <p:spPr/>
+        <p:txBody>
+          <a:bodyPr/>
+          <a:lstStyle/>
+          <a:p>
+            <a:r>
+              <a:rPr lang="en-US" dirty="0"/>
+              <a:t/>
+            </a:r>
+            <a:endParaRPr lang="en-US" dirty="0"/>
+          </a:p>
+        </p:txBody>
+      </p:sp>
+      <p:sp>
+        <p:nvSpPr>
+          <p:cNvPr id="4" name="Slide Number Placeholder 3"/>
+          <p:cNvSpPr>
+            <a:spLocks noGrp="1"/>
+          </p:cNvSpPr>
+          <p:nvPr>
+            <p:ph type="sldNum" sz="quarter" idx="10"/>
+          </p:nvPr>
+        </p:nvSpPr>
+        <p:spPr/>
+        <p:txBody>
+          <a:bodyPr/>
+          <a:lstStyle/>
+          <a:p>
+            <a:fld id="{F7021451-1387-4CA6-816F-3879F97B5CBC}" type="slidenum">
+              <a:rPr lang="en-US"/>
+              <a:t>9</a:t>
             </a:fld>
             <a:endParaRPr lang="en-US"/>
           </a:p>
@@ -2792,7 +2970,7 @@
                 <a:ea typeface="Calibri" pitchFamily="34" charset="-122"/>
                 <a:cs typeface="Calibri" pitchFamily="34" charset="-120"/>
               </a:rPr>
-              <a:t>Ultrasound report scorers · plain-language summary · 2/7</a:t>
+              <a:t>Ultrasound report scorers · plain-language summary · 2/9</a:t>
             </a:r>
             <a:endParaRPr lang="en-US" sz="1000" dirty="0"/>
           </a:p>
@@ -2863,49 +3041,2012 @@
                 <a:ea typeface="Cambria" pitchFamily="34" charset="-122"/>
                 <a:cs typeface="Cambria" pitchFamily="34" charset="-120"/>
               </a:rPr>
-              <a:t>What we built</a:t>
+              <a:t>The 10 datasets we used</a:t>
             </a:r>
             <a:endParaRPr lang="en-US" sz="3000" dirty="0"/>
           </a:p>
         </p:txBody>
       </p:sp>
-      <p:sp>
-        <p:nvSpPr>
-          <p:cNvPr id="3" name="Shape 1"/>
-          <p:cNvSpPr/>
-          <p:nvPr/>
-        </p:nvSpPr>
-        <p:spPr>
-          <a:xfrm>
-            <a:off x="548640" y="1188720"/>
-            <a:ext cx="1828800" cy="1554480"/>
-          </a:xfrm>
-          <a:prstGeom prst="roundRect">
-            <a:avLst>
-              <a:gd name="adj" fmla="val 4706"/>
-            </a:avLst>
-          </a:prstGeom>
-          <a:solidFill>
-            <a:srgbClr val="E6F1F6"/>
-          </a:solidFill>
-          <a:ln w="12700">
-            <a:solidFill>
-              <a:srgbClr val="E6F1F6"/>
-            </a:solidFill>
-            <a:prstDash val="solid"/>
-          </a:ln>
-        </p:spPr>
-      </p:sp>
-      <p:sp>
-        <p:nvSpPr>
-          <p:cNvPr id="4" name="Text 2"/>
+      <p:graphicFrame>
+        <p:nvGraphicFramePr>
+          <p:cNvPr id="4" name="Table 0"/>
+          <p:cNvGraphicFramePr>
+            <a:graphicFrameLocks noGrp="1"/>
+          </p:cNvGraphicFramePr>
+          <p:nvPr>
+            <p:extLst>
+              <p:ext uri="{D42A27DB-BD31-4B8C-83A1-F6EECF244321}">
+                <p14:modId xmlns:p14="http://schemas.microsoft.com/office/powerpoint/2010/main" val="1579011935"/>
+              </p:ext>
+            </p:extLst>
+          </p:nvPr>
+        </p:nvGraphicFramePr>
+        <p:xfrm>
+          <a:off x="457200" y="1005840"/>
+          <a:ext cx="8229600" cy="914400"/>
+        </p:xfrm>
+        <a:graphic>
+          <a:graphicData uri="http://schemas.openxmlformats.org/drawingml/2006/table">
+            <a:tbl>
+              <a:tblPr/>
+              <a:tblGrid>
+                <a:gridCol w="1371600"/>
+                <a:gridCol w="914400"/>
+                <a:gridCol w="731520"/>
+                <a:gridCol w="5212080"/>
+              </a:tblGrid>
+              <a:tr h="301752">
+                <a:tc>
+                  <a:txBody>
+                    <a:bodyPr/>
+                    <a:lstStyle/>
+                    <a:p>
+                      <a:pPr indent="0" marL="0">
+                        <a:buNone/>
+                      </a:pPr>
+                      <a:r>
+                        <a:rPr lang="en-US" sz="1100" b="1" dirty="0">
+                          <a:solidFill>
+                            <a:srgbClr val="FFFFFF"/>
+                          </a:solidFill>
+                          <a:latin typeface="Calibri" pitchFamily="34" charset="0"/>
+                          <a:ea typeface="Calibri" pitchFamily="34" charset="-122"/>
+                          <a:cs typeface="Calibri" pitchFamily="34" charset="-120"/>
+                        </a:rPr>
+                        <a:t>Dataset</a:t>
+                      </a:r>
+                      <a:endParaRPr lang="en-US" sz="1100" dirty="0">
+                        <a:latin typeface="Calibri" charset="0"/>
+                        <a:ea typeface="Calibri" charset="0"/>
+                        <a:cs typeface="Calibri" charset="0"/>
+                      </a:endParaRPr>
+                    </a:p>
+                  </a:txBody>
+                  <a:tcPr marL="5486400" marR="5486400" marT="0" marB="0" anchor="ctr">
+                    <a:lnL w="0" cap="flat" cmpd="sng" algn="ctr">
+                      <a:noFill/>
+                    </a:lnL>
+                    <a:lnR w="0" cap="flat" cmpd="sng" algn="ctr">
+                      <a:noFill/>
+                    </a:lnR>
+                    <a:lnT w="0" cap="flat" cmpd="sng" algn="ctr">
+                      <a:noFill/>
+                    </a:lnT>
+                    <a:lnB w="0" cap="flat" cmpd="sng" algn="ctr">
+                      <a:noFill/>
+                    </a:lnB>
+                    <a:solidFill>
+                      <a:srgbClr val="065A82"/>
+                    </a:solidFill>
+                  </a:tcPr>
+                </a:tc>
+                <a:tc>
+                  <a:txBody>
+                    <a:bodyPr/>
+                    <a:lstStyle/>
+                    <a:p>
+                      <a:pPr indent="0" marL="0">
+                        <a:buNone/>
+                      </a:pPr>
+                      <a:r>
+                        <a:rPr lang="en-US" sz="1100" b="1" dirty="0">
+                          <a:solidFill>
+                            <a:srgbClr val="FFFFFF"/>
+                          </a:solidFill>
+                          <a:latin typeface="Calibri" pitchFamily="34" charset="0"/>
+                          <a:ea typeface="Calibri" pitchFamily="34" charset="-122"/>
+                          <a:cs typeface="Calibri" pitchFamily="34" charset="-120"/>
+                        </a:rPr>
+                        <a:t>Organ</a:t>
+                      </a:r>
+                      <a:endParaRPr lang="en-US" sz="1100" dirty="0">
+                        <a:latin typeface="Calibri" charset="0"/>
+                        <a:ea typeface="Calibri" charset="0"/>
+                        <a:cs typeface="Calibri" charset="0"/>
+                      </a:endParaRPr>
+                    </a:p>
+                  </a:txBody>
+                  <a:tcPr marL="5486400" marR="5486400" marT="0" marB="0" anchor="ctr">
+                    <a:lnL w="0" cap="flat" cmpd="sng" algn="ctr">
+                      <a:noFill/>
+                    </a:lnL>
+                    <a:lnR w="0" cap="flat" cmpd="sng" algn="ctr">
+                      <a:noFill/>
+                    </a:lnR>
+                    <a:lnT w="0" cap="flat" cmpd="sng" algn="ctr">
+                      <a:noFill/>
+                    </a:lnT>
+                    <a:lnB w="0" cap="flat" cmpd="sng" algn="ctr">
+                      <a:noFill/>
+                    </a:lnB>
+                    <a:solidFill>
+                      <a:srgbClr val="065A82"/>
+                    </a:solidFill>
+                  </a:tcPr>
+                </a:tc>
+                <a:tc>
+                  <a:txBody>
+                    <a:bodyPr/>
+                    <a:lstStyle/>
+                    <a:p>
+                      <a:pPr indent="0" marL="0">
+                        <a:buNone/>
+                      </a:pPr>
+                      <a:r>
+                        <a:rPr lang="en-US" sz="1100" b="1" dirty="0">
+                          <a:solidFill>
+                            <a:srgbClr val="FFFFFF"/>
+                          </a:solidFill>
+                          <a:latin typeface="Calibri" pitchFamily="34" charset="0"/>
+                          <a:ea typeface="Calibri" pitchFamily="34" charset="-122"/>
+                          <a:cs typeface="Calibri" pitchFamily="34" charset="-120"/>
+                        </a:rPr>
+                        <a:t>Scans</a:t>
+                      </a:r>
+                      <a:endParaRPr lang="en-US" sz="1100" dirty="0">
+                        <a:latin typeface="Calibri" charset="0"/>
+                        <a:ea typeface="Calibri" charset="0"/>
+                        <a:cs typeface="Calibri" charset="0"/>
+                      </a:endParaRPr>
+                    </a:p>
+                  </a:txBody>
+                  <a:tcPr marL="5486400" marR="5486400" marT="0" marB="0" anchor="ctr">
+                    <a:lnL w="0" cap="flat" cmpd="sng" algn="ctr">
+                      <a:noFill/>
+                    </a:lnL>
+                    <a:lnR w="0" cap="flat" cmpd="sng" algn="ctr">
+                      <a:noFill/>
+                    </a:lnR>
+                    <a:lnT w="0" cap="flat" cmpd="sng" algn="ctr">
+                      <a:noFill/>
+                    </a:lnT>
+                    <a:lnB w="0" cap="flat" cmpd="sng" algn="ctr">
+                      <a:noFill/>
+                    </a:lnB>
+                    <a:solidFill>
+                      <a:srgbClr val="065A82"/>
+                    </a:solidFill>
+                  </a:tcPr>
+                </a:tc>
+                <a:tc>
+                  <a:txBody>
+                    <a:bodyPr/>
+                    <a:lstStyle/>
+                    <a:p>
+                      <a:pPr indent="0" marL="0">
+                        <a:buNone/>
+                      </a:pPr>
+                      <a:r>
+                        <a:rPr lang="en-US" sz="1100" b="1" dirty="0">
+                          <a:solidFill>
+                            <a:srgbClr val="FFFFFF"/>
+                          </a:solidFill>
+                          <a:latin typeface="Calibri" pitchFamily="34" charset="0"/>
+                          <a:ea typeface="Calibri" pitchFamily="34" charset="-122"/>
+                          <a:cs typeface="Calibri" pitchFamily="34" charset="-120"/>
+                        </a:rPr>
+                        <a:t>What the labels give us</a:t>
+                      </a:r>
+                      <a:endParaRPr lang="en-US" sz="1100" dirty="0">
+                        <a:latin typeface="Calibri" charset="0"/>
+                        <a:ea typeface="Calibri" charset="0"/>
+                        <a:cs typeface="Calibri" charset="0"/>
+                      </a:endParaRPr>
+                    </a:p>
+                  </a:txBody>
+                  <a:tcPr marL="5486400" marR="5486400" marT="0" marB="0" anchor="ctr">
+                    <a:lnL w="0" cap="flat" cmpd="sng" algn="ctr">
+                      <a:noFill/>
+                    </a:lnL>
+                    <a:lnR w="0" cap="flat" cmpd="sng" algn="ctr">
+                      <a:noFill/>
+                    </a:lnR>
+                    <a:lnT w="0" cap="flat" cmpd="sng" algn="ctr">
+                      <a:noFill/>
+                    </a:lnT>
+                    <a:lnB w="0" cap="flat" cmpd="sng" algn="ctr">
+                      <a:noFill/>
+                    </a:lnB>
+                    <a:solidFill>
+                      <a:srgbClr val="065A82"/>
+                    </a:solidFill>
+                  </a:tcPr>
+                </a:tc>
+              </a:tr>
+              <a:tr h="301752">
+                <a:tc>
+                  <a:txBody>
+                    <a:bodyPr/>
+                    <a:lstStyle/>
+                    <a:p>
+                      <a:pPr indent="0" marL="0">
+                        <a:buNone/>
+                      </a:pPr>
+                      <a:r>
+                        <a:rPr lang="en-US" sz="1050" b="1" dirty="0">
+                          <a:solidFill>
+                            <a:srgbClr val="1F2937"/>
+                          </a:solidFill>
+                          <a:latin typeface="Calibri" pitchFamily="34" charset="0"/>
+                          <a:ea typeface="Calibri" pitchFamily="34" charset="-122"/>
+                          <a:cs typeface="Calibri" pitchFamily="34" charset="-120"/>
+                        </a:rPr>
+                        <a:t>BrEaST</a:t>
+                      </a:r>
+                      <a:endParaRPr lang="en-US" sz="1050" dirty="0">
+                        <a:latin typeface="Calibri" charset="0"/>
+                        <a:ea typeface="Calibri" charset="0"/>
+                        <a:cs typeface="Calibri" charset="0"/>
+                      </a:endParaRPr>
+                    </a:p>
+                  </a:txBody>
+                  <a:tcPr marL="5486400" marR="5486400" marT="0" marB="0" anchor="ctr">
+                    <a:lnL w="0" cap="flat" cmpd="sng" algn="ctr">
+                      <a:noFill/>
+                    </a:lnL>
+                    <a:lnR w="0" cap="flat" cmpd="sng" algn="ctr">
+                      <a:noFill/>
+                    </a:lnR>
+                    <a:lnT w="0" cap="flat" cmpd="sng" algn="ctr">
+                      <a:noFill/>
+                    </a:lnT>
+                    <a:lnB w="0" cap="flat" cmpd="sng" algn="ctr">
+                      <a:noFill/>
+                    </a:lnB>
+                    <a:solidFill>
+                      <a:srgbClr val="E6F1F6"/>
+                    </a:solidFill>
+                  </a:tcPr>
+                </a:tc>
+                <a:tc>
+                  <a:txBody>
+                    <a:bodyPr/>
+                    <a:lstStyle/>
+                    <a:p>
+                      <a:pPr indent="0" marL="0">
+                        <a:buNone/>
+                      </a:pPr>
+                      <a:r>
+                        <a:rPr lang="en-US" sz="1050" dirty="0">
+                          <a:solidFill>
+                            <a:srgbClr val="1F2937"/>
+                          </a:solidFill>
+                          <a:latin typeface="Calibri" pitchFamily="34" charset="0"/>
+                          <a:ea typeface="Calibri" pitchFamily="34" charset="-122"/>
+                          <a:cs typeface="Calibri" pitchFamily="34" charset="-120"/>
+                        </a:rPr>
+                        <a:t>breast</a:t>
+                      </a:r>
+                      <a:endParaRPr lang="en-US" sz="1050" dirty="0">
+                        <a:latin typeface="Calibri" charset="0"/>
+                        <a:ea typeface="Calibri" charset="0"/>
+                        <a:cs typeface="Calibri" charset="0"/>
+                      </a:endParaRPr>
+                    </a:p>
+                  </a:txBody>
+                  <a:tcPr marL="5486400" marR="5486400" marT="0" marB="0" anchor="ctr">
+                    <a:lnL w="0" cap="flat" cmpd="sng" algn="ctr">
+                      <a:noFill/>
+                    </a:lnL>
+                    <a:lnR w="0" cap="flat" cmpd="sng" algn="ctr">
+                      <a:noFill/>
+                    </a:lnR>
+                    <a:lnT w="0" cap="flat" cmpd="sng" algn="ctr">
+                      <a:noFill/>
+                    </a:lnT>
+                    <a:lnB w="0" cap="flat" cmpd="sng" algn="ctr">
+                      <a:noFill/>
+                    </a:lnB>
+                    <a:solidFill>
+                      <a:srgbClr val="E6F1F6"/>
+                    </a:solidFill>
+                  </a:tcPr>
+                </a:tc>
+                <a:tc>
+                  <a:txBody>
+                    <a:bodyPr/>
+                    <a:lstStyle/>
+                    <a:p>
+                      <a:pPr indent="0" marL="0">
+                        <a:buNone/>
+                      </a:pPr>
+                      <a:r>
+                        <a:rPr lang="en-US" sz="1050" dirty="0">
+                          <a:solidFill>
+                            <a:srgbClr val="1F2937"/>
+                          </a:solidFill>
+                          <a:latin typeface="Calibri" pitchFamily="34" charset="0"/>
+                          <a:ea typeface="Calibri" pitchFamily="34" charset="-122"/>
+                          <a:cs typeface="Calibri" pitchFamily="34" charset="-120"/>
+                        </a:rPr>
+                        <a:t>256</a:t>
+                      </a:r>
+                      <a:endParaRPr lang="en-US" sz="1050" dirty="0">
+                        <a:latin typeface="Calibri" charset="0"/>
+                        <a:ea typeface="Calibri" charset="0"/>
+                        <a:cs typeface="Calibri" charset="0"/>
+                      </a:endParaRPr>
+                    </a:p>
+                  </a:txBody>
+                  <a:tcPr marL="5486400" marR="5486400" marT="0" marB="0" anchor="ctr">
+                    <a:lnL w="0" cap="flat" cmpd="sng" algn="ctr">
+                      <a:noFill/>
+                    </a:lnL>
+                    <a:lnR w="0" cap="flat" cmpd="sng" algn="ctr">
+                      <a:noFill/>
+                    </a:lnR>
+                    <a:lnT w="0" cap="flat" cmpd="sng" algn="ctr">
+                      <a:noFill/>
+                    </a:lnT>
+                    <a:lnB w="0" cap="flat" cmpd="sng" algn="ctr">
+                      <a:noFill/>
+                    </a:lnB>
+                    <a:solidFill>
+                      <a:srgbClr val="E6F1F6"/>
+                    </a:solidFill>
+                  </a:tcPr>
+                </a:tc>
+                <a:tc>
+                  <a:txBody>
+                    <a:bodyPr/>
+                    <a:lstStyle/>
+                    <a:p>
+                      <a:pPr indent="0" marL="0">
+                        <a:buNone/>
+                      </a:pPr>
+                      <a:r>
+                        <a:rPr lang="en-US" sz="1050" dirty="0">
+                          <a:solidFill>
+                            <a:srgbClr val="1F2937"/>
+                          </a:solidFill>
+                          <a:latin typeface="Calibri" pitchFamily="34" charset="0"/>
+                          <a:ea typeface="Calibri" pitchFamily="34" charset="-122"/>
+                          <a:cs typeface="Calibri" pitchFamily="34" charset="-120"/>
+                        </a:rPr>
+                        <a:t>BI-RADS, shape/margin/echo descriptors, pixel size (mm), mask</a:t>
+                      </a:r>
+                      <a:endParaRPr lang="en-US" sz="1050" dirty="0">
+                        <a:latin typeface="Calibri" charset="0"/>
+                        <a:ea typeface="Calibri" charset="0"/>
+                        <a:cs typeface="Calibri" charset="0"/>
+                      </a:endParaRPr>
+                    </a:p>
+                  </a:txBody>
+                  <a:tcPr marL="5486400" marR="5486400" marT="0" marB="0" anchor="ctr">
+                    <a:lnL w="0" cap="flat" cmpd="sng" algn="ctr">
+                      <a:noFill/>
+                    </a:lnL>
+                    <a:lnR w="0" cap="flat" cmpd="sng" algn="ctr">
+                      <a:noFill/>
+                    </a:lnR>
+                    <a:lnT w="0" cap="flat" cmpd="sng" algn="ctr">
+                      <a:noFill/>
+                    </a:lnT>
+                    <a:lnB w="0" cap="flat" cmpd="sng" algn="ctr">
+                      <a:noFill/>
+                    </a:lnB>
+                    <a:solidFill>
+                      <a:srgbClr val="E6F1F6"/>
+                    </a:solidFill>
+                  </a:tcPr>
+                </a:tc>
+              </a:tr>
+              <a:tr h="301752">
+                <a:tc>
+                  <a:txBody>
+                    <a:bodyPr/>
+                    <a:lstStyle/>
+                    <a:p>
+                      <a:pPr indent="0" marL="0">
+                        <a:buNone/>
+                      </a:pPr>
+                      <a:r>
+                        <a:rPr lang="en-US" sz="1050" b="1" dirty="0">
+                          <a:solidFill>
+                            <a:srgbClr val="1F2937"/>
+                          </a:solidFill>
+                          <a:latin typeface="Calibri" pitchFamily="34" charset="0"/>
+                          <a:ea typeface="Calibri" pitchFamily="34" charset="-122"/>
+                          <a:cs typeface="Calibri" pitchFamily="34" charset="-120"/>
+                        </a:rPr>
+                        <a:t>BUS-BRA</a:t>
+                      </a:r>
+                      <a:endParaRPr lang="en-US" sz="1050" dirty="0">
+                        <a:latin typeface="Calibri" charset="0"/>
+                        <a:ea typeface="Calibri" charset="0"/>
+                        <a:cs typeface="Calibri" charset="0"/>
+                      </a:endParaRPr>
+                    </a:p>
+                  </a:txBody>
+                  <a:tcPr marL="5486400" marR="5486400" marT="0" marB="0" anchor="ctr">
+                    <a:lnL w="0" cap="flat" cmpd="sng" algn="ctr">
+                      <a:noFill/>
+                    </a:lnL>
+                    <a:lnR w="0" cap="flat" cmpd="sng" algn="ctr">
+                      <a:noFill/>
+                    </a:lnR>
+                    <a:lnT w="0" cap="flat" cmpd="sng" algn="ctr">
+                      <a:noFill/>
+                    </a:lnT>
+                    <a:lnB w="0" cap="flat" cmpd="sng" algn="ctr">
+                      <a:noFill/>
+                    </a:lnB>
+                    <a:solidFill>
+                      <a:srgbClr val="FFFFFF"/>
+                    </a:solidFill>
+                  </a:tcPr>
+                </a:tc>
+                <a:tc>
+                  <a:txBody>
+                    <a:bodyPr/>
+                    <a:lstStyle/>
+                    <a:p>
+                      <a:pPr indent="0" marL="0">
+                        <a:buNone/>
+                      </a:pPr>
+                      <a:r>
+                        <a:rPr lang="en-US" sz="1050" dirty="0">
+                          <a:solidFill>
+                            <a:srgbClr val="1F2937"/>
+                          </a:solidFill>
+                          <a:latin typeface="Calibri" pitchFamily="34" charset="0"/>
+                          <a:ea typeface="Calibri" pitchFamily="34" charset="-122"/>
+                          <a:cs typeface="Calibri" pitchFamily="34" charset="-120"/>
+                        </a:rPr>
+                        <a:t>breast</a:t>
+                      </a:r>
+                      <a:endParaRPr lang="en-US" sz="1050" dirty="0">
+                        <a:latin typeface="Calibri" charset="0"/>
+                        <a:ea typeface="Calibri" charset="0"/>
+                        <a:cs typeface="Calibri" charset="0"/>
+                      </a:endParaRPr>
+                    </a:p>
+                  </a:txBody>
+                  <a:tcPr marL="5486400" marR="5486400" marT="0" marB="0" anchor="ctr">
+                    <a:lnL w="0" cap="flat" cmpd="sng" algn="ctr">
+                      <a:noFill/>
+                    </a:lnL>
+                    <a:lnR w="0" cap="flat" cmpd="sng" algn="ctr">
+                      <a:noFill/>
+                    </a:lnR>
+                    <a:lnT w="0" cap="flat" cmpd="sng" algn="ctr">
+                      <a:noFill/>
+                    </a:lnT>
+                    <a:lnB w="0" cap="flat" cmpd="sng" algn="ctr">
+                      <a:noFill/>
+                    </a:lnB>
+                    <a:solidFill>
+                      <a:srgbClr val="FFFFFF"/>
+                    </a:solidFill>
+                  </a:tcPr>
+                </a:tc>
+                <a:tc>
+                  <a:txBody>
+                    <a:bodyPr/>
+                    <a:lstStyle/>
+                    <a:p>
+                      <a:pPr indent="0" marL="0">
+                        <a:buNone/>
+                      </a:pPr>
+                      <a:r>
+                        <a:rPr lang="en-US" sz="1050" dirty="0">
+                          <a:solidFill>
+                            <a:srgbClr val="1F2937"/>
+                          </a:solidFill>
+                          <a:latin typeface="Calibri" pitchFamily="34" charset="0"/>
+                          <a:ea typeface="Calibri" pitchFamily="34" charset="-122"/>
+                          <a:cs typeface="Calibri" pitchFamily="34" charset="-120"/>
+                        </a:rPr>
+                        <a:t>1,875</a:t>
+                      </a:r>
+                      <a:endParaRPr lang="en-US" sz="1050" dirty="0">
+                        <a:latin typeface="Calibri" charset="0"/>
+                        <a:ea typeface="Calibri" charset="0"/>
+                        <a:cs typeface="Calibri" charset="0"/>
+                      </a:endParaRPr>
+                    </a:p>
+                  </a:txBody>
+                  <a:tcPr marL="5486400" marR="5486400" marT="0" marB="0" anchor="ctr">
+                    <a:lnL w="0" cap="flat" cmpd="sng" algn="ctr">
+                      <a:noFill/>
+                    </a:lnL>
+                    <a:lnR w="0" cap="flat" cmpd="sng" algn="ctr">
+                      <a:noFill/>
+                    </a:lnR>
+                    <a:lnT w="0" cap="flat" cmpd="sng" algn="ctr">
+                      <a:noFill/>
+                    </a:lnT>
+                    <a:lnB w="0" cap="flat" cmpd="sng" algn="ctr">
+                      <a:noFill/>
+                    </a:lnB>
+                    <a:solidFill>
+                      <a:srgbClr val="FFFFFF"/>
+                    </a:solidFill>
+                  </a:tcPr>
+                </a:tc>
+                <a:tc>
+                  <a:txBody>
+                    <a:bodyPr/>
+                    <a:lstStyle/>
+                    <a:p>
+                      <a:pPr indent="0" marL="0">
+                        <a:buNone/>
+                      </a:pPr>
+                      <a:r>
+                        <a:rPr lang="en-US" sz="1050" dirty="0">
+                          <a:solidFill>
+                            <a:srgbClr val="1F2937"/>
+                          </a:solidFill>
+                          <a:latin typeface="Calibri" pitchFamily="34" charset="0"/>
+                          <a:ea typeface="Calibri" pitchFamily="34" charset="-122"/>
+                          <a:cs typeface="Calibri" pitchFamily="34" charset="-120"/>
+                        </a:rPr>
+                        <a:t>BI-RADS, side, histology, benign/malignant, mask</a:t>
+                      </a:r>
+                      <a:endParaRPr lang="en-US" sz="1050" dirty="0">
+                        <a:latin typeface="Calibri" charset="0"/>
+                        <a:ea typeface="Calibri" charset="0"/>
+                        <a:cs typeface="Calibri" charset="0"/>
+                      </a:endParaRPr>
+                    </a:p>
+                  </a:txBody>
+                  <a:tcPr marL="5486400" marR="5486400" marT="0" marB="0" anchor="ctr">
+                    <a:lnL w="0" cap="flat" cmpd="sng" algn="ctr">
+                      <a:noFill/>
+                    </a:lnL>
+                    <a:lnR w="0" cap="flat" cmpd="sng" algn="ctr">
+                      <a:noFill/>
+                    </a:lnR>
+                    <a:lnT w="0" cap="flat" cmpd="sng" algn="ctr">
+                      <a:noFill/>
+                    </a:lnT>
+                    <a:lnB w="0" cap="flat" cmpd="sng" algn="ctr">
+                      <a:noFill/>
+                    </a:lnB>
+                    <a:solidFill>
+                      <a:srgbClr val="FFFFFF"/>
+                    </a:solidFill>
+                  </a:tcPr>
+                </a:tc>
+              </a:tr>
+              <a:tr h="301752">
+                <a:tc>
+                  <a:txBody>
+                    <a:bodyPr/>
+                    <a:lstStyle/>
+                    <a:p>
+                      <a:pPr indent="0" marL="0">
+                        <a:buNone/>
+                      </a:pPr>
+                      <a:r>
+                        <a:rPr lang="en-US" sz="1050" b="1" dirty="0">
+                          <a:solidFill>
+                            <a:srgbClr val="1F2937"/>
+                          </a:solidFill>
+                          <a:latin typeface="Calibri" pitchFamily="34" charset="0"/>
+                          <a:ea typeface="Calibri" pitchFamily="34" charset="-122"/>
+                          <a:cs typeface="Calibri" pitchFamily="34" charset="-120"/>
+                        </a:rPr>
+                        <a:t>BUSI</a:t>
+                      </a:r>
+                      <a:endParaRPr lang="en-US" sz="1050" dirty="0">
+                        <a:latin typeface="Calibri" charset="0"/>
+                        <a:ea typeface="Calibri" charset="0"/>
+                        <a:cs typeface="Calibri" charset="0"/>
+                      </a:endParaRPr>
+                    </a:p>
+                  </a:txBody>
+                  <a:tcPr marL="5486400" marR="5486400" marT="0" marB="0" anchor="ctr">
+                    <a:lnL w="0" cap="flat" cmpd="sng" algn="ctr">
+                      <a:noFill/>
+                    </a:lnL>
+                    <a:lnR w="0" cap="flat" cmpd="sng" algn="ctr">
+                      <a:noFill/>
+                    </a:lnR>
+                    <a:lnT w="0" cap="flat" cmpd="sng" algn="ctr">
+                      <a:noFill/>
+                    </a:lnT>
+                    <a:lnB w="0" cap="flat" cmpd="sng" algn="ctr">
+                      <a:noFill/>
+                    </a:lnB>
+                    <a:solidFill>
+                      <a:srgbClr val="E6F1F6"/>
+                    </a:solidFill>
+                  </a:tcPr>
+                </a:tc>
+                <a:tc>
+                  <a:txBody>
+                    <a:bodyPr/>
+                    <a:lstStyle/>
+                    <a:p>
+                      <a:pPr indent="0" marL="0">
+                        <a:buNone/>
+                      </a:pPr>
+                      <a:r>
+                        <a:rPr lang="en-US" sz="1050" dirty="0">
+                          <a:solidFill>
+                            <a:srgbClr val="1F2937"/>
+                          </a:solidFill>
+                          <a:latin typeface="Calibri" pitchFamily="34" charset="0"/>
+                          <a:ea typeface="Calibri" pitchFamily="34" charset="-122"/>
+                          <a:cs typeface="Calibri" pitchFamily="34" charset="-120"/>
+                        </a:rPr>
+                        <a:t>breast</a:t>
+                      </a:r>
+                      <a:endParaRPr lang="en-US" sz="1050" dirty="0">
+                        <a:latin typeface="Calibri" charset="0"/>
+                        <a:ea typeface="Calibri" charset="0"/>
+                        <a:cs typeface="Calibri" charset="0"/>
+                      </a:endParaRPr>
+                    </a:p>
+                  </a:txBody>
+                  <a:tcPr marL="5486400" marR="5486400" marT="0" marB="0" anchor="ctr">
+                    <a:lnL w="0" cap="flat" cmpd="sng" algn="ctr">
+                      <a:noFill/>
+                    </a:lnL>
+                    <a:lnR w="0" cap="flat" cmpd="sng" algn="ctr">
+                      <a:noFill/>
+                    </a:lnR>
+                    <a:lnT w="0" cap="flat" cmpd="sng" algn="ctr">
+                      <a:noFill/>
+                    </a:lnT>
+                    <a:lnB w="0" cap="flat" cmpd="sng" algn="ctr">
+                      <a:noFill/>
+                    </a:lnB>
+                    <a:solidFill>
+                      <a:srgbClr val="E6F1F6"/>
+                    </a:solidFill>
+                  </a:tcPr>
+                </a:tc>
+                <a:tc>
+                  <a:txBody>
+                    <a:bodyPr/>
+                    <a:lstStyle/>
+                    <a:p>
+                      <a:pPr indent="0" marL="0">
+                        <a:buNone/>
+                      </a:pPr>
+                      <a:r>
+                        <a:rPr lang="en-US" sz="1050" dirty="0">
+                          <a:solidFill>
+                            <a:srgbClr val="1F2937"/>
+                          </a:solidFill>
+                          <a:latin typeface="Calibri" pitchFamily="34" charset="0"/>
+                          <a:ea typeface="Calibri" pitchFamily="34" charset="-122"/>
+                          <a:cs typeface="Calibri" pitchFamily="34" charset="-120"/>
+                        </a:rPr>
+                        <a:t>780</a:t>
+                      </a:r>
+                      <a:endParaRPr lang="en-US" sz="1050" dirty="0">
+                        <a:latin typeface="Calibri" charset="0"/>
+                        <a:ea typeface="Calibri" charset="0"/>
+                        <a:cs typeface="Calibri" charset="0"/>
+                      </a:endParaRPr>
+                    </a:p>
+                  </a:txBody>
+                  <a:tcPr marL="5486400" marR="5486400" marT="0" marB="0" anchor="ctr">
+                    <a:lnL w="0" cap="flat" cmpd="sng" algn="ctr">
+                      <a:noFill/>
+                    </a:lnL>
+                    <a:lnR w="0" cap="flat" cmpd="sng" algn="ctr">
+                      <a:noFill/>
+                    </a:lnR>
+                    <a:lnT w="0" cap="flat" cmpd="sng" algn="ctr">
+                      <a:noFill/>
+                    </a:lnT>
+                    <a:lnB w="0" cap="flat" cmpd="sng" algn="ctr">
+                      <a:noFill/>
+                    </a:lnB>
+                    <a:solidFill>
+                      <a:srgbClr val="E6F1F6"/>
+                    </a:solidFill>
+                  </a:tcPr>
+                </a:tc>
+                <a:tc>
+                  <a:txBody>
+                    <a:bodyPr/>
+                    <a:lstStyle/>
+                    <a:p>
+                      <a:pPr indent="0" marL="0">
+                        <a:buNone/>
+                      </a:pPr>
+                      <a:r>
+                        <a:rPr lang="en-US" sz="1050" dirty="0">
+                          <a:solidFill>
+                            <a:srgbClr val="1F2937"/>
+                          </a:solidFill>
+                          <a:latin typeface="Calibri" pitchFamily="34" charset="0"/>
+                          <a:ea typeface="Calibri" pitchFamily="34" charset="-122"/>
+                          <a:cs typeface="Calibri" pitchFamily="34" charset="-120"/>
+                        </a:rPr>
+                        <a:t>benign / malignant / normal, mask</a:t>
+                      </a:r>
+                      <a:endParaRPr lang="en-US" sz="1050" dirty="0">
+                        <a:latin typeface="Calibri" charset="0"/>
+                        <a:ea typeface="Calibri" charset="0"/>
+                        <a:cs typeface="Calibri" charset="0"/>
+                      </a:endParaRPr>
+                    </a:p>
+                  </a:txBody>
+                  <a:tcPr marL="5486400" marR="5486400" marT="0" marB="0" anchor="ctr">
+                    <a:lnL w="0" cap="flat" cmpd="sng" algn="ctr">
+                      <a:noFill/>
+                    </a:lnL>
+                    <a:lnR w="0" cap="flat" cmpd="sng" algn="ctr">
+                      <a:noFill/>
+                    </a:lnR>
+                    <a:lnT w="0" cap="flat" cmpd="sng" algn="ctr">
+                      <a:noFill/>
+                    </a:lnT>
+                    <a:lnB w="0" cap="flat" cmpd="sng" algn="ctr">
+                      <a:noFill/>
+                    </a:lnB>
+                    <a:solidFill>
+                      <a:srgbClr val="E6F1F6"/>
+                    </a:solidFill>
+                  </a:tcPr>
+                </a:tc>
+              </a:tr>
+              <a:tr h="301752">
+                <a:tc>
+                  <a:txBody>
+                    <a:bodyPr/>
+                    <a:lstStyle/>
+                    <a:p>
+                      <a:pPr indent="0" marL="0">
+                        <a:buNone/>
+                      </a:pPr>
+                      <a:r>
+                        <a:rPr lang="en-US" sz="1050" b="1" dirty="0">
+                          <a:solidFill>
+                            <a:srgbClr val="1F2937"/>
+                          </a:solidFill>
+                          <a:latin typeface="Calibri" pitchFamily="34" charset="0"/>
+                          <a:ea typeface="Calibri" pitchFamily="34" charset="-122"/>
+                          <a:cs typeface="Calibri" pitchFamily="34" charset="-120"/>
+                        </a:rPr>
+                        <a:t>UDIAT</a:t>
+                      </a:r>
+                      <a:endParaRPr lang="en-US" sz="1050" dirty="0">
+                        <a:latin typeface="Calibri" charset="0"/>
+                        <a:ea typeface="Calibri" charset="0"/>
+                        <a:cs typeface="Calibri" charset="0"/>
+                      </a:endParaRPr>
+                    </a:p>
+                  </a:txBody>
+                  <a:tcPr marL="5486400" marR="5486400" marT="0" marB="0" anchor="ctr">
+                    <a:lnL w="0" cap="flat" cmpd="sng" algn="ctr">
+                      <a:noFill/>
+                    </a:lnL>
+                    <a:lnR w="0" cap="flat" cmpd="sng" algn="ctr">
+                      <a:noFill/>
+                    </a:lnR>
+                    <a:lnT w="0" cap="flat" cmpd="sng" algn="ctr">
+                      <a:noFill/>
+                    </a:lnT>
+                    <a:lnB w="0" cap="flat" cmpd="sng" algn="ctr">
+                      <a:noFill/>
+                    </a:lnB>
+                    <a:solidFill>
+                      <a:srgbClr val="FFFFFF"/>
+                    </a:solidFill>
+                  </a:tcPr>
+                </a:tc>
+                <a:tc>
+                  <a:txBody>
+                    <a:bodyPr/>
+                    <a:lstStyle/>
+                    <a:p>
+                      <a:pPr indent="0" marL="0">
+                        <a:buNone/>
+                      </a:pPr>
+                      <a:r>
+                        <a:rPr lang="en-US" sz="1050" dirty="0">
+                          <a:solidFill>
+                            <a:srgbClr val="1F2937"/>
+                          </a:solidFill>
+                          <a:latin typeface="Calibri" pitchFamily="34" charset="0"/>
+                          <a:ea typeface="Calibri" pitchFamily="34" charset="-122"/>
+                          <a:cs typeface="Calibri" pitchFamily="34" charset="-120"/>
+                        </a:rPr>
+                        <a:t>breast</a:t>
+                      </a:r>
+                      <a:endParaRPr lang="en-US" sz="1050" dirty="0">
+                        <a:latin typeface="Calibri" charset="0"/>
+                        <a:ea typeface="Calibri" charset="0"/>
+                        <a:cs typeface="Calibri" charset="0"/>
+                      </a:endParaRPr>
+                    </a:p>
+                  </a:txBody>
+                  <a:tcPr marL="5486400" marR="5486400" marT="0" marB="0" anchor="ctr">
+                    <a:lnL w="0" cap="flat" cmpd="sng" algn="ctr">
+                      <a:noFill/>
+                    </a:lnL>
+                    <a:lnR w="0" cap="flat" cmpd="sng" algn="ctr">
+                      <a:noFill/>
+                    </a:lnR>
+                    <a:lnT w="0" cap="flat" cmpd="sng" algn="ctr">
+                      <a:noFill/>
+                    </a:lnT>
+                    <a:lnB w="0" cap="flat" cmpd="sng" algn="ctr">
+                      <a:noFill/>
+                    </a:lnB>
+                    <a:solidFill>
+                      <a:srgbClr val="FFFFFF"/>
+                    </a:solidFill>
+                  </a:tcPr>
+                </a:tc>
+                <a:tc>
+                  <a:txBody>
+                    <a:bodyPr/>
+                    <a:lstStyle/>
+                    <a:p>
+                      <a:pPr indent="0" marL="0">
+                        <a:buNone/>
+                      </a:pPr>
+                      <a:r>
+                        <a:rPr lang="en-US" sz="1050" dirty="0">
+                          <a:solidFill>
+                            <a:srgbClr val="1F2937"/>
+                          </a:solidFill>
+                          <a:latin typeface="Calibri" pitchFamily="34" charset="0"/>
+                          <a:ea typeface="Calibri" pitchFamily="34" charset="-122"/>
+                          <a:cs typeface="Calibri" pitchFamily="34" charset="-120"/>
+                        </a:rPr>
+                        <a:t>163</a:t>
+                      </a:r>
+                      <a:endParaRPr lang="en-US" sz="1050" dirty="0">
+                        <a:latin typeface="Calibri" charset="0"/>
+                        <a:ea typeface="Calibri" charset="0"/>
+                        <a:cs typeface="Calibri" charset="0"/>
+                      </a:endParaRPr>
+                    </a:p>
+                  </a:txBody>
+                  <a:tcPr marL="5486400" marR="5486400" marT="0" marB="0" anchor="ctr">
+                    <a:lnL w="0" cap="flat" cmpd="sng" algn="ctr">
+                      <a:noFill/>
+                    </a:lnL>
+                    <a:lnR w="0" cap="flat" cmpd="sng" algn="ctr">
+                      <a:noFill/>
+                    </a:lnR>
+                    <a:lnT w="0" cap="flat" cmpd="sng" algn="ctr">
+                      <a:noFill/>
+                    </a:lnT>
+                    <a:lnB w="0" cap="flat" cmpd="sng" algn="ctr">
+                      <a:noFill/>
+                    </a:lnB>
+                    <a:solidFill>
+                      <a:srgbClr val="FFFFFF"/>
+                    </a:solidFill>
+                  </a:tcPr>
+                </a:tc>
+                <a:tc>
+                  <a:txBody>
+                    <a:bodyPr/>
+                    <a:lstStyle/>
+                    <a:p>
+                      <a:pPr indent="0" marL="0">
+                        <a:buNone/>
+                      </a:pPr>
+                      <a:r>
+                        <a:rPr lang="en-US" sz="1050" dirty="0">
+                          <a:solidFill>
+                            <a:srgbClr val="1F2937"/>
+                          </a:solidFill>
+                          <a:latin typeface="Calibri" pitchFamily="34" charset="0"/>
+                          <a:ea typeface="Calibri" pitchFamily="34" charset="-122"/>
+                          <a:cs typeface="Calibri" pitchFamily="34" charset="-120"/>
+                        </a:rPr>
+                        <a:t>benign / malignant, histology, mask</a:t>
+                      </a:r>
+                      <a:endParaRPr lang="en-US" sz="1050" dirty="0">
+                        <a:latin typeface="Calibri" charset="0"/>
+                        <a:ea typeface="Calibri" charset="0"/>
+                        <a:cs typeface="Calibri" charset="0"/>
+                      </a:endParaRPr>
+                    </a:p>
+                  </a:txBody>
+                  <a:tcPr marL="5486400" marR="5486400" marT="0" marB="0" anchor="ctr">
+                    <a:lnL w="0" cap="flat" cmpd="sng" algn="ctr">
+                      <a:noFill/>
+                    </a:lnL>
+                    <a:lnR w="0" cap="flat" cmpd="sng" algn="ctr">
+                      <a:noFill/>
+                    </a:lnR>
+                    <a:lnT w="0" cap="flat" cmpd="sng" algn="ctr">
+                      <a:noFill/>
+                    </a:lnT>
+                    <a:lnB w="0" cap="flat" cmpd="sng" algn="ctr">
+                      <a:noFill/>
+                    </a:lnB>
+                    <a:solidFill>
+                      <a:srgbClr val="FFFFFF"/>
+                    </a:solidFill>
+                  </a:tcPr>
+                </a:tc>
+              </a:tr>
+              <a:tr h="301752">
+                <a:tc>
+                  <a:txBody>
+                    <a:bodyPr/>
+                    <a:lstStyle/>
+                    <a:p>
+                      <a:pPr indent="0" marL="0">
+                        <a:buNone/>
+                      </a:pPr>
+                      <a:r>
+                        <a:rPr lang="en-US" sz="1050" b="1" dirty="0">
+                          <a:solidFill>
+                            <a:srgbClr val="1F2937"/>
+                          </a:solidFill>
+                          <a:latin typeface="Calibri" pitchFamily="34" charset="0"/>
+                          <a:ea typeface="Calibri" pitchFamily="34" charset="-122"/>
+                          <a:cs typeface="Calibri" pitchFamily="34" charset="-120"/>
+                        </a:rPr>
+                        <a:t>BUS-UCLM</a:t>
+                      </a:r>
+                      <a:endParaRPr lang="en-US" sz="1050" dirty="0">
+                        <a:latin typeface="Calibri" charset="0"/>
+                        <a:ea typeface="Calibri" charset="0"/>
+                        <a:cs typeface="Calibri" charset="0"/>
+                      </a:endParaRPr>
+                    </a:p>
+                  </a:txBody>
+                  <a:tcPr marL="5486400" marR="5486400" marT="0" marB="0" anchor="ctr">
+                    <a:lnL w="0" cap="flat" cmpd="sng" algn="ctr">
+                      <a:noFill/>
+                    </a:lnL>
+                    <a:lnR w="0" cap="flat" cmpd="sng" algn="ctr">
+                      <a:noFill/>
+                    </a:lnR>
+                    <a:lnT w="0" cap="flat" cmpd="sng" algn="ctr">
+                      <a:noFill/>
+                    </a:lnT>
+                    <a:lnB w="0" cap="flat" cmpd="sng" algn="ctr">
+                      <a:noFill/>
+                    </a:lnB>
+                    <a:solidFill>
+                      <a:srgbClr val="E6F1F6"/>
+                    </a:solidFill>
+                  </a:tcPr>
+                </a:tc>
+                <a:tc>
+                  <a:txBody>
+                    <a:bodyPr/>
+                    <a:lstStyle/>
+                    <a:p>
+                      <a:pPr indent="0" marL="0">
+                        <a:buNone/>
+                      </a:pPr>
+                      <a:r>
+                        <a:rPr lang="en-US" sz="1050" dirty="0">
+                          <a:solidFill>
+                            <a:srgbClr val="1F2937"/>
+                          </a:solidFill>
+                          <a:latin typeface="Calibri" pitchFamily="34" charset="0"/>
+                          <a:ea typeface="Calibri" pitchFamily="34" charset="-122"/>
+                          <a:cs typeface="Calibri" pitchFamily="34" charset="-120"/>
+                        </a:rPr>
+                        <a:t>breast</a:t>
+                      </a:r>
+                      <a:endParaRPr lang="en-US" sz="1050" dirty="0">
+                        <a:latin typeface="Calibri" charset="0"/>
+                        <a:ea typeface="Calibri" charset="0"/>
+                        <a:cs typeface="Calibri" charset="0"/>
+                      </a:endParaRPr>
+                    </a:p>
+                  </a:txBody>
+                  <a:tcPr marL="5486400" marR="5486400" marT="0" marB="0" anchor="ctr">
+                    <a:lnL w="0" cap="flat" cmpd="sng" algn="ctr">
+                      <a:noFill/>
+                    </a:lnL>
+                    <a:lnR w="0" cap="flat" cmpd="sng" algn="ctr">
+                      <a:noFill/>
+                    </a:lnR>
+                    <a:lnT w="0" cap="flat" cmpd="sng" algn="ctr">
+                      <a:noFill/>
+                    </a:lnT>
+                    <a:lnB w="0" cap="flat" cmpd="sng" algn="ctr">
+                      <a:noFill/>
+                    </a:lnB>
+                    <a:solidFill>
+                      <a:srgbClr val="E6F1F6"/>
+                    </a:solidFill>
+                  </a:tcPr>
+                </a:tc>
+                <a:tc>
+                  <a:txBody>
+                    <a:bodyPr/>
+                    <a:lstStyle/>
+                    <a:p>
+                      <a:pPr indent="0" marL="0">
+                        <a:buNone/>
+                      </a:pPr>
+                      <a:r>
+                        <a:rPr lang="en-US" sz="1050" dirty="0">
+                          <a:solidFill>
+                            <a:srgbClr val="1F2937"/>
+                          </a:solidFill>
+                          <a:latin typeface="Calibri" pitchFamily="34" charset="0"/>
+                          <a:ea typeface="Calibri" pitchFamily="34" charset="-122"/>
+                          <a:cs typeface="Calibri" pitchFamily="34" charset="-120"/>
+                        </a:rPr>
+                        <a:t>683</a:t>
+                      </a:r>
+                      <a:endParaRPr lang="en-US" sz="1050" dirty="0">
+                        <a:latin typeface="Calibri" charset="0"/>
+                        <a:ea typeface="Calibri" charset="0"/>
+                        <a:cs typeface="Calibri" charset="0"/>
+                      </a:endParaRPr>
+                    </a:p>
+                  </a:txBody>
+                  <a:tcPr marL="5486400" marR="5486400" marT="0" marB="0" anchor="ctr">
+                    <a:lnL w="0" cap="flat" cmpd="sng" algn="ctr">
+                      <a:noFill/>
+                    </a:lnL>
+                    <a:lnR w="0" cap="flat" cmpd="sng" algn="ctr">
+                      <a:noFill/>
+                    </a:lnR>
+                    <a:lnT w="0" cap="flat" cmpd="sng" algn="ctr">
+                      <a:noFill/>
+                    </a:lnT>
+                    <a:lnB w="0" cap="flat" cmpd="sng" algn="ctr">
+                      <a:noFill/>
+                    </a:lnB>
+                    <a:solidFill>
+                      <a:srgbClr val="E6F1F6"/>
+                    </a:solidFill>
+                  </a:tcPr>
+                </a:tc>
+                <a:tc>
+                  <a:txBody>
+                    <a:bodyPr/>
+                    <a:lstStyle/>
+                    <a:p>
+                      <a:pPr indent="0" marL="0">
+                        <a:buNone/>
+                      </a:pPr>
+                      <a:r>
+                        <a:rPr lang="en-US" sz="1050" dirty="0">
+                          <a:solidFill>
+                            <a:srgbClr val="1F2937"/>
+                          </a:solidFill>
+                          <a:latin typeface="Calibri" pitchFamily="34" charset="0"/>
+                          <a:ea typeface="Calibri" pitchFamily="34" charset="-122"/>
+                          <a:cs typeface="Calibri" pitchFamily="34" charset="-120"/>
+                        </a:rPr>
+                        <a:t>benign / malignant, mask</a:t>
+                      </a:r>
+                      <a:endParaRPr lang="en-US" sz="1050" dirty="0">
+                        <a:latin typeface="Calibri" charset="0"/>
+                        <a:ea typeface="Calibri" charset="0"/>
+                        <a:cs typeface="Calibri" charset="0"/>
+                      </a:endParaRPr>
+                    </a:p>
+                  </a:txBody>
+                  <a:tcPr marL="5486400" marR="5486400" marT="0" marB="0" anchor="ctr">
+                    <a:lnL w="0" cap="flat" cmpd="sng" algn="ctr">
+                      <a:noFill/>
+                    </a:lnL>
+                    <a:lnR w="0" cap="flat" cmpd="sng" algn="ctr">
+                      <a:noFill/>
+                    </a:lnR>
+                    <a:lnT w="0" cap="flat" cmpd="sng" algn="ctr">
+                      <a:noFill/>
+                    </a:lnT>
+                    <a:lnB w="0" cap="flat" cmpd="sng" algn="ctr">
+                      <a:noFill/>
+                    </a:lnB>
+                    <a:solidFill>
+                      <a:srgbClr val="E6F1F6"/>
+                    </a:solidFill>
+                  </a:tcPr>
+                </a:tc>
+              </a:tr>
+              <a:tr h="301752">
+                <a:tc>
+                  <a:txBody>
+                    <a:bodyPr/>
+                    <a:lstStyle/>
+                    <a:p>
+                      <a:pPr indent="0" marL="0">
+                        <a:buNone/>
+                      </a:pPr>
+                      <a:r>
+                        <a:rPr lang="en-US" sz="1050" b="1" dirty="0">
+                          <a:solidFill>
+                            <a:srgbClr val="1F2937"/>
+                          </a:solidFill>
+                          <a:latin typeface="Calibri" pitchFamily="34" charset="0"/>
+                          <a:ea typeface="Calibri" pitchFamily="34" charset="-122"/>
+                          <a:cs typeface="Calibri" pitchFamily="34" charset="-120"/>
+                        </a:rPr>
+                        <a:t>DDTI</a:t>
+                      </a:r>
+                      <a:endParaRPr lang="en-US" sz="1050" dirty="0">
+                        <a:latin typeface="Calibri" charset="0"/>
+                        <a:ea typeface="Calibri" charset="0"/>
+                        <a:cs typeface="Calibri" charset="0"/>
+                      </a:endParaRPr>
+                    </a:p>
+                  </a:txBody>
+                  <a:tcPr marL="5486400" marR="5486400" marT="0" marB="0" anchor="ctr">
+                    <a:lnL w="0" cap="flat" cmpd="sng" algn="ctr">
+                      <a:noFill/>
+                    </a:lnL>
+                    <a:lnR w="0" cap="flat" cmpd="sng" algn="ctr">
+                      <a:noFill/>
+                    </a:lnR>
+                    <a:lnT w="0" cap="flat" cmpd="sng" algn="ctr">
+                      <a:noFill/>
+                    </a:lnT>
+                    <a:lnB w="0" cap="flat" cmpd="sng" algn="ctr">
+                      <a:noFill/>
+                    </a:lnB>
+                    <a:solidFill>
+                      <a:srgbClr val="FFFFFF"/>
+                    </a:solidFill>
+                  </a:tcPr>
+                </a:tc>
+                <a:tc>
+                  <a:txBody>
+                    <a:bodyPr/>
+                    <a:lstStyle/>
+                    <a:p>
+                      <a:pPr indent="0" marL="0">
+                        <a:buNone/>
+                      </a:pPr>
+                      <a:r>
+                        <a:rPr lang="en-US" sz="1050" dirty="0">
+                          <a:solidFill>
+                            <a:srgbClr val="1F2937"/>
+                          </a:solidFill>
+                          <a:latin typeface="Calibri" pitchFamily="34" charset="0"/>
+                          <a:ea typeface="Calibri" pitchFamily="34" charset="-122"/>
+                          <a:cs typeface="Calibri" pitchFamily="34" charset="-120"/>
+                        </a:rPr>
+                        <a:t>thyroid</a:t>
+                      </a:r>
+                      <a:endParaRPr lang="en-US" sz="1050" dirty="0">
+                        <a:latin typeface="Calibri" charset="0"/>
+                        <a:ea typeface="Calibri" charset="0"/>
+                        <a:cs typeface="Calibri" charset="0"/>
+                      </a:endParaRPr>
+                    </a:p>
+                  </a:txBody>
+                  <a:tcPr marL="5486400" marR="5486400" marT="0" marB="0" anchor="ctr">
+                    <a:lnL w="0" cap="flat" cmpd="sng" algn="ctr">
+                      <a:noFill/>
+                    </a:lnL>
+                    <a:lnR w="0" cap="flat" cmpd="sng" algn="ctr">
+                      <a:noFill/>
+                    </a:lnR>
+                    <a:lnT w="0" cap="flat" cmpd="sng" algn="ctr">
+                      <a:noFill/>
+                    </a:lnT>
+                    <a:lnB w="0" cap="flat" cmpd="sng" algn="ctr">
+                      <a:noFill/>
+                    </a:lnB>
+                    <a:solidFill>
+                      <a:srgbClr val="FFFFFF"/>
+                    </a:solidFill>
+                  </a:tcPr>
+                </a:tc>
+                <a:tc>
+                  <a:txBody>
+                    <a:bodyPr/>
+                    <a:lstStyle/>
+                    <a:p>
+                      <a:pPr indent="0" marL="0">
+                        <a:buNone/>
+                      </a:pPr>
+                      <a:r>
+                        <a:rPr lang="en-US" sz="1050" dirty="0">
+                          <a:solidFill>
+                            <a:srgbClr val="1F2937"/>
+                          </a:solidFill>
+                          <a:latin typeface="Calibri" pitchFamily="34" charset="0"/>
+                          <a:ea typeface="Calibri" pitchFamily="34" charset="-122"/>
+                          <a:cs typeface="Calibri" pitchFamily="34" charset="-120"/>
+                        </a:rPr>
+                        <a:t>480</a:t>
+                      </a:r>
+                      <a:endParaRPr lang="en-US" sz="1050" dirty="0">
+                        <a:latin typeface="Calibri" charset="0"/>
+                        <a:ea typeface="Calibri" charset="0"/>
+                        <a:cs typeface="Calibri" charset="0"/>
+                      </a:endParaRPr>
+                    </a:p>
+                  </a:txBody>
+                  <a:tcPr marL="5486400" marR="5486400" marT="0" marB="0" anchor="ctr">
+                    <a:lnL w="0" cap="flat" cmpd="sng" algn="ctr">
+                      <a:noFill/>
+                    </a:lnL>
+                    <a:lnR w="0" cap="flat" cmpd="sng" algn="ctr">
+                      <a:noFill/>
+                    </a:lnR>
+                    <a:lnT w="0" cap="flat" cmpd="sng" algn="ctr">
+                      <a:noFill/>
+                    </a:lnT>
+                    <a:lnB w="0" cap="flat" cmpd="sng" algn="ctr">
+                      <a:noFill/>
+                    </a:lnB>
+                    <a:solidFill>
+                      <a:srgbClr val="FFFFFF"/>
+                    </a:solidFill>
+                  </a:tcPr>
+                </a:tc>
+                <a:tc>
+                  <a:txBody>
+                    <a:bodyPr/>
+                    <a:lstStyle/>
+                    <a:p>
+                      <a:pPr indent="0" marL="0">
+                        <a:buNone/>
+                      </a:pPr>
+                      <a:r>
+                        <a:rPr lang="en-US" sz="1050" dirty="0">
+                          <a:solidFill>
+                            <a:srgbClr val="1F2937"/>
+                          </a:solidFill>
+                          <a:latin typeface="Calibri" pitchFamily="34" charset="0"/>
+                          <a:ea typeface="Calibri" pitchFamily="34" charset="-122"/>
+                          <a:cs typeface="Calibri" pitchFamily="34" charset="-120"/>
+                        </a:rPr>
+                        <a:t>TI-RADS level (349 labelled), composition, echo, margins, outline</a:t>
+                      </a:r>
+                      <a:endParaRPr lang="en-US" sz="1050" dirty="0">
+                        <a:latin typeface="Calibri" charset="0"/>
+                        <a:ea typeface="Calibri" charset="0"/>
+                        <a:cs typeface="Calibri" charset="0"/>
+                      </a:endParaRPr>
+                    </a:p>
+                  </a:txBody>
+                  <a:tcPr marL="5486400" marR="5486400" marT="0" marB="0" anchor="ctr">
+                    <a:lnL w="0" cap="flat" cmpd="sng" algn="ctr">
+                      <a:noFill/>
+                    </a:lnL>
+                    <a:lnR w="0" cap="flat" cmpd="sng" algn="ctr">
+                      <a:noFill/>
+                    </a:lnR>
+                    <a:lnT w="0" cap="flat" cmpd="sng" algn="ctr">
+                      <a:noFill/>
+                    </a:lnT>
+                    <a:lnB w="0" cap="flat" cmpd="sng" algn="ctr">
+                      <a:noFill/>
+                    </a:lnB>
+                    <a:solidFill>
+                      <a:srgbClr val="FFFFFF"/>
+                    </a:solidFill>
+                  </a:tcPr>
+                </a:tc>
+              </a:tr>
+              <a:tr h="301752">
+                <a:tc>
+                  <a:txBody>
+                    <a:bodyPr/>
+                    <a:lstStyle/>
+                    <a:p>
+                      <a:pPr indent="0" marL="0">
+                        <a:buNone/>
+                      </a:pPr>
+                      <a:r>
+                        <a:rPr lang="en-US" sz="1050" b="1" dirty="0">
+                          <a:solidFill>
+                            <a:srgbClr val="1F2937"/>
+                          </a:solidFill>
+                          <a:latin typeface="Calibri" pitchFamily="34" charset="0"/>
+                          <a:ea typeface="Calibri" pitchFamily="34" charset="-122"/>
+                          <a:cs typeface="Calibri" pitchFamily="34" charset="-120"/>
+                        </a:rPr>
+                        <a:t>TN3K</a:t>
+                      </a:r>
+                      <a:endParaRPr lang="en-US" sz="1050" dirty="0">
+                        <a:latin typeface="Calibri" charset="0"/>
+                        <a:ea typeface="Calibri" charset="0"/>
+                        <a:cs typeface="Calibri" charset="0"/>
+                      </a:endParaRPr>
+                    </a:p>
+                  </a:txBody>
+                  <a:tcPr marL="5486400" marR="5486400" marT="0" marB="0" anchor="ctr">
+                    <a:lnL w="0" cap="flat" cmpd="sng" algn="ctr">
+                      <a:noFill/>
+                    </a:lnL>
+                    <a:lnR w="0" cap="flat" cmpd="sng" algn="ctr">
+                      <a:noFill/>
+                    </a:lnR>
+                    <a:lnT w="0" cap="flat" cmpd="sng" algn="ctr">
+                      <a:noFill/>
+                    </a:lnT>
+                    <a:lnB w="0" cap="flat" cmpd="sng" algn="ctr">
+                      <a:noFill/>
+                    </a:lnB>
+                    <a:solidFill>
+                      <a:srgbClr val="E6F1F6"/>
+                    </a:solidFill>
+                  </a:tcPr>
+                </a:tc>
+                <a:tc>
+                  <a:txBody>
+                    <a:bodyPr/>
+                    <a:lstStyle/>
+                    <a:p>
+                      <a:pPr indent="0" marL="0">
+                        <a:buNone/>
+                      </a:pPr>
+                      <a:r>
+                        <a:rPr lang="en-US" sz="1050" dirty="0">
+                          <a:solidFill>
+                            <a:srgbClr val="1F2937"/>
+                          </a:solidFill>
+                          <a:latin typeface="Calibri" pitchFamily="34" charset="0"/>
+                          <a:ea typeface="Calibri" pitchFamily="34" charset="-122"/>
+                          <a:cs typeface="Calibri" pitchFamily="34" charset="-120"/>
+                        </a:rPr>
+                        <a:t>thyroid</a:t>
+                      </a:r>
+                      <a:endParaRPr lang="en-US" sz="1050" dirty="0">
+                        <a:latin typeface="Calibri" charset="0"/>
+                        <a:ea typeface="Calibri" charset="0"/>
+                        <a:cs typeface="Calibri" charset="0"/>
+                      </a:endParaRPr>
+                    </a:p>
+                  </a:txBody>
+                  <a:tcPr marL="5486400" marR="5486400" marT="0" marB="0" anchor="ctr">
+                    <a:lnL w="0" cap="flat" cmpd="sng" algn="ctr">
+                      <a:noFill/>
+                    </a:lnL>
+                    <a:lnR w="0" cap="flat" cmpd="sng" algn="ctr">
+                      <a:noFill/>
+                    </a:lnR>
+                    <a:lnT w="0" cap="flat" cmpd="sng" algn="ctr">
+                      <a:noFill/>
+                    </a:lnT>
+                    <a:lnB w="0" cap="flat" cmpd="sng" algn="ctr">
+                      <a:noFill/>
+                    </a:lnB>
+                    <a:solidFill>
+                      <a:srgbClr val="E6F1F6"/>
+                    </a:solidFill>
+                  </a:tcPr>
+                </a:tc>
+                <a:tc>
+                  <a:txBody>
+                    <a:bodyPr/>
+                    <a:lstStyle/>
+                    <a:p>
+                      <a:pPr indent="0" marL="0">
+                        <a:buNone/>
+                      </a:pPr>
+                      <a:r>
+                        <a:rPr lang="en-US" sz="1050" dirty="0">
+                          <a:solidFill>
+                            <a:srgbClr val="1F2937"/>
+                          </a:solidFill>
+                          <a:latin typeface="Calibri" pitchFamily="34" charset="0"/>
+                          <a:ea typeface="Calibri" pitchFamily="34" charset="-122"/>
+                          <a:cs typeface="Calibri" pitchFamily="34" charset="-120"/>
+                        </a:rPr>
+                        <a:t>3,493</a:t>
+                      </a:r>
+                      <a:endParaRPr lang="en-US" sz="1050" dirty="0">
+                        <a:latin typeface="Calibri" charset="0"/>
+                        <a:ea typeface="Calibri" charset="0"/>
+                        <a:cs typeface="Calibri" charset="0"/>
+                      </a:endParaRPr>
+                    </a:p>
+                  </a:txBody>
+                  <a:tcPr marL="5486400" marR="5486400" marT="0" marB="0" anchor="ctr">
+                    <a:lnL w="0" cap="flat" cmpd="sng" algn="ctr">
+                      <a:noFill/>
+                    </a:lnL>
+                    <a:lnR w="0" cap="flat" cmpd="sng" algn="ctr">
+                      <a:noFill/>
+                    </a:lnR>
+                    <a:lnT w="0" cap="flat" cmpd="sng" algn="ctr">
+                      <a:noFill/>
+                    </a:lnT>
+                    <a:lnB w="0" cap="flat" cmpd="sng" algn="ctr">
+                      <a:noFill/>
+                    </a:lnB>
+                    <a:solidFill>
+                      <a:srgbClr val="E6F1F6"/>
+                    </a:solidFill>
+                  </a:tcPr>
+                </a:tc>
+                <a:tc>
+                  <a:txBody>
+                    <a:bodyPr/>
+                    <a:lstStyle/>
+                    <a:p>
+                      <a:pPr indent="0" marL="0">
+                        <a:buNone/>
+                      </a:pPr>
+                      <a:r>
+                        <a:rPr lang="en-US" sz="1050" dirty="0">
+                          <a:solidFill>
+                            <a:srgbClr val="1F2937"/>
+                          </a:solidFill>
+                          <a:latin typeface="Calibri" pitchFamily="34" charset="0"/>
+                          <a:ea typeface="Calibri" pitchFamily="34" charset="-122"/>
+                          <a:cs typeface="Calibri" pitchFamily="34" charset="-120"/>
+                        </a:rPr>
+                        <a:t>nodule mask; class 0/1 (meaning unconfirmed)</a:t>
+                      </a:r>
+                      <a:endParaRPr lang="en-US" sz="1050" dirty="0">
+                        <a:latin typeface="Calibri" charset="0"/>
+                        <a:ea typeface="Calibri" charset="0"/>
+                        <a:cs typeface="Calibri" charset="0"/>
+                      </a:endParaRPr>
+                    </a:p>
+                  </a:txBody>
+                  <a:tcPr marL="5486400" marR="5486400" marT="0" marB="0" anchor="ctr">
+                    <a:lnL w="0" cap="flat" cmpd="sng" algn="ctr">
+                      <a:noFill/>
+                    </a:lnL>
+                    <a:lnR w="0" cap="flat" cmpd="sng" algn="ctr">
+                      <a:noFill/>
+                    </a:lnR>
+                    <a:lnT w="0" cap="flat" cmpd="sng" algn="ctr">
+                      <a:noFill/>
+                    </a:lnT>
+                    <a:lnB w="0" cap="flat" cmpd="sng" algn="ctr">
+                      <a:noFill/>
+                    </a:lnB>
+                    <a:solidFill>
+                      <a:srgbClr val="E6F1F6"/>
+                    </a:solidFill>
+                  </a:tcPr>
+                </a:tc>
+              </a:tr>
+              <a:tr h="301752">
+                <a:tc>
+                  <a:txBody>
+                    <a:bodyPr/>
+                    <a:lstStyle/>
+                    <a:p>
+                      <a:pPr indent="0" marL="0">
+                        <a:buNone/>
+                      </a:pPr>
+                      <a:r>
+                        <a:rPr lang="en-US" sz="1050" b="1" dirty="0">
+                          <a:solidFill>
+                            <a:srgbClr val="1F2937"/>
+                          </a:solidFill>
+                          <a:latin typeface="Calibri" pitchFamily="34" charset="0"/>
+                          <a:ea typeface="Calibri" pitchFamily="34" charset="-122"/>
+                          <a:cs typeface="Calibri" pitchFamily="34" charset="-120"/>
+                        </a:rPr>
+                        <a:t>TN5000</a:t>
+                      </a:r>
+                      <a:endParaRPr lang="en-US" sz="1050" dirty="0">
+                        <a:latin typeface="Calibri" charset="0"/>
+                        <a:ea typeface="Calibri" charset="0"/>
+                        <a:cs typeface="Calibri" charset="0"/>
+                      </a:endParaRPr>
+                    </a:p>
+                  </a:txBody>
+                  <a:tcPr marL="5486400" marR="5486400" marT="0" marB="0" anchor="ctr">
+                    <a:lnL w="0" cap="flat" cmpd="sng" algn="ctr">
+                      <a:noFill/>
+                    </a:lnL>
+                    <a:lnR w="0" cap="flat" cmpd="sng" algn="ctr">
+                      <a:noFill/>
+                    </a:lnR>
+                    <a:lnT w="0" cap="flat" cmpd="sng" algn="ctr">
+                      <a:noFill/>
+                    </a:lnT>
+                    <a:lnB w="0" cap="flat" cmpd="sng" algn="ctr">
+                      <a:noFill/>
+                    </a:lnB>
+                    <a:solidFill>
+                      <a:srgbClr val="FFFFFF"/>
+                    </a:solidFill>
+                  </a:tcPr>
+                </a:tc>
+                <a:tc>
+                  <a:txBody>
+                    <a:bodyPr/>
+                    <a:lstStyle/>
+                    <a:p>
+                      <a:pPr indent="0" marL="0">
+                        <a:buNone/>
+                      </a:pPr>
+                      <a:r>
+                        <a:rPr lang="en-US" sz="1050" dirty="0">
+                          <a:solidFill>
+                            <a:srgbClr val="1F2937"/>
+                          </a:solidFill>
+                          <a:latin typeface="Calibri" pitchFamily="34" charset="0"/>
+                          <a:ea typeface="Calibri" pitchFamily="34" charset="-122"/>
+                          <a:cs typeface="Calibri" pitchFamily="34" charset="-120"/>
+                        </a:rPr>
+                        <a:t>thyroid</a:t>
+                      </a:r>
+                      <a:endParaRPr lang="en-US" sz="1050" dirty="0">
+                        <a:latin typeface="Calibri" charset="0"/>
+                        <a:ea typeface="Calibri" charset="0"/>
+                        <a:cs typeface="Calibri" charset="0"/>
+                      </a:endParaRPr>
+                    </a:p>
+                  </a:txBody>
+                  <a:tcPr marL="5486400" marR="5486400" marT="0" marB="0" anchor="ctr">
+                    <a:lnL w="0" cap="flat" cmpd="sng" algn="ctr">
+                      <a:noFill/>
+                    </a:lnL>
+                    <a:lnR w="0" cap="flat" cmpd="sng" algn="ctr">
+                      <a:noFill/>
+                    </a:lnR>
+                    <a:lnT w="0" cap="flat" cmpd="sng" algn="ctr">
+                      <a:noFill/>
+                    </a:lnT>
+                    <a:lnB w="0" cap="flat" cmpd="sng" algn="ctr">
+                      <a:noFill/>
+                    </a:lnB>
+                    <a:solidFill>
+                      <a:srgbClr val="FFFFFF"/>
+                    </a:solidFill>
+                  </a:tcPr>
+                </a:tc>
+                <a:tc>
+                  <a:txBody>
+                    <a:bodyPr/>
+                    <a:lstStyle/>
+                    <a:p>
+                      <a:pPr indent="0" marL="0">
+                        <a:buNone/>
+                      </a:pPr>
+                      <a:r>
+                        <a:rPr lang="en-US" sz="1050" dirty="0">
+                          <a:solidFill>
+                            <a:srgbClr val="1F2937"/>
+                          </a:solidFill>
+                          <a:latin typeface="Calibri" pitchFamily="34" charset="0"/>
+                          <a:ea typeface="Calibri" pitchFamily="34" charset="-122"/>
+                          <a:cs typeface="Calibri" pitchFamily="34" charset="-120"/>
+                        </a:rPr>
+                        <a:t>5,000</a:t>
+                      </a:r>
+                      <a:endParaRPr lang="en-US" sz="1050" dirty="0">
+                        <a:latin typeface="Calibri" charset="0"/>
+                        <a:ea typeface="Calibri" charset="0"/>
+                        <a:cs typeface="Calibri" charset="0"/>
+                      </a:endParaRPr>
+                    </a:p>
+                  </a:txBody>
+                  <a:tcPr marL="5486400" marR="5486400" marT="0" marB="0" anchor="ctr">
+                    <a:lnL w="0" cap="flat" cmpd="sng" algn="ctr">
+                      <a:noFill/>
+                    </a:lnL>
+                    <a:lnR w="0" cap="flat" cmpd="sng" algn="ctr">
+                      <a:noFill/>
+                    </a:lnR>
+                    <a:lnT w="0" cap="flat" cmpd="sng" algn="ctr">
+                      <a:noFill/>
+                    </a:lnT>
+                    <a:lnB w="0" cap="flat" cmpd="sng" algn="ctr">
+                      <a:noFill/>
+                    </a:lnB>
+                    <a:solidFill>
+                      <a:srgbClr val="FFFFFF"/>
+                    </a:solidFill>
+                  </a:tcPr>
+                </a:tc>
+                <a:tc>
+                  <a:txBody>
+                    <a:bodyPr/>
+                    <a:lstStyle/>
+                    <a:p>
+                      <a:pPr indent="0" marL="0">
+                        <a:buNone/>
+                      </a:pPr>
+                      <a:r>
+                        <a:rPr lang="en-US" sz="1050" dirty="0">
+                          <a:solidFill>
+                            <a:srgbClr val="1F2937"/>
+                          </a:solidFill>
+                          <a:latin typeface="Calibri" pitchFamily="34" charset="0"/>
+                          <a:ea typeface="Calibri" pitchFamily="34" charset="-122"/>
+                          <a:cs typeface="Calibri" pitchFamily="34" charset="-120"/>
+                        </a:rPr>
+                        <a:t>nodule box only; class 0/1 (meaning unconfirmed)</a:t>
+                      </a:r>
+                      <a:endParaRPr lang="en-US" sz="1050" dirty="0">
+                        <a:latin typeface="Calibri" charset="0"/>
+                        <a:ea typeface="Calibri" charset="0"/>
+                        <a:cs typeface="Calibri" charset="0"/>
+                      </a:endParaRPr>
+                    </a:p>
+                  </a:txBody>
+                  <a:tcPr marL="5486400" marR="5486400" marT="0" marB="0" anchor="ctr">
+                    <a:lnL w="0" cap="flat" cmpd="sng" algn="ctr">
+                      <a:noFill/>
+                    </a:lnL>
+                    <a:lnR w="0" cap="flat" cmpd="sng" algn="ctr">
+                      <a:noFill/>
+                    </a:lnR>
+                    <a:lnT w="0" cap="flat" cmpd="sng" algn="ctr">
+                      <a:noFill/>
+                    </a:lnT>
+                    <a:lnB w="0" cap="flat" cmpd="sng" algn="ctr">
+                      <a:noFill/>
+                    </a:lnB>
+                    <a:solidFill>
+                      <a:srgbClr val="FFFFFF"/>
+                    </a:solidFill>
+                  </a:tcPr>
+                </a:tc>
+              </a:tr>
+              <a:tr h="301752">
+                <a:tc>
+                  <a:txBody>
+                    <a:bodyPr/>
+                    <a:lstStyle/>
+                    <a:p>
+                      <a:pPr indent="0" marL="0">
+                        <a:buNone/>
+                      </a:pPr>
+                      <a:r>
+                        <a:rPr lang="en-US" sz="1050" b="1" dirty="0">
+                          <a:solidFill>
+                            <a:srgbClr val="1F2937"/>
+                          </a:solidFill>
+                          <a:latin typeface="Calibri" pitchFamily="34" charset="0"/>
+                          <a:ea typeface="Calibri" pitchFamily="34" charset="-122"/>
+                          <a:cs typeface="Calibri" pitchFamily="34" charset="-120"/>
+                        </a:rPr>
+                        <a:t>HC18</a:t>
+                      </a:r>
+                      <a:endParaRPr lang="en-US" sz="1050" dirty="0">
+                        <a:latin typeface="Calibri" charset="0"/>
+                        <a:ea typeface="Calibri" charset="0"/>
+                        <a:cs typeface="Calibri" charset="0"/>
+                      </a:endParaRPr>
+                    </a:p>
+                  </a:txBody>
+                  <a:tcPr marL="5486400" marR="5486400" marT="0" marB="0" anchor="ctr">
+                    <a:lnL w="0" cap="flat" cmpd="sng" algn="ctr">
+                      <a:noFill/>
+                    </a:lnL>
+                    <a:lnR w="0" cap="flat" cmpd="sng" algn="ctr">
+                      <a:noFill/>
+                    </a:lnR>
+                    <a:lnT w="0" cap="flat" cmpd="sng" algn="ctr">
+                      <a:noFill/>
+                    </a:lnT>
+                    <a:lnB w="0" cap="flat" cmpd="sng" algn="ctr">
+                      <a:noFill/>
+                    </a:lnB>
+                    <a:solidFill>
+                      <a:srgbClr val="E6F1F6"/>
+                    </a:solidFill>
+                  </a:tcPr>
+                </a:tc>
+                <a:tc>
+                  <a:txBody>
+                    <a:bodyPr/>
+                    <a:lstStyle/>
+                    <a:p>
+                      <a:pPr indent="0" marL="0">
+                        <a:buNone/>
+                      </a:pPr>
+                      <a:r>
+                        <a:rPr lang="en-US" sz="1050" dirty="0">
+                          <a:solidFill>
+                            <a:srgbClr val="1F2937"/>
+                          </a:solidFill>
+                          <a:latin typeface="Calibri" pitchFamily="34" charset="0"/>
+                          <a:ea typeface="Calibri" pitchFamily="34" charset="-122"/>
+                          <a:cs typeface="Calibri" pitchFamily="34" charset="-120"/>
+                        </a:rPr>
+                        <a:t>fetal head</a:t>
+                      </a:r>
+                      <a:endParaRPr lang="en-US" sz="1050" dirty="0">
+                        <a:latin typeface="Calibri" charset="0"/>
+                        <a:ea typeface="Calibri" charset="0"/>
+                        <a:cs typeface="Calibri" charset="0"/>
+                      </a:endParaRPr>
+                    </a:p>
+                  </a:txBody>
+                  <a:tcPr marL="5486400" marR="5486400" marT="0" marB="0" anchor="ctr">
+                    <a:lnL w="0" cap="flat" cmpd="sng" algn="ctr">
+                      <a:noFill/>
+                    </a:lnL>
+                    <a:lnR w="0" cap="flat" cmpd="sng" algn="ctr">
+                      <a:noFill/>
+                    </a:lnR>
+                    <a:lnT w="0" cap="flat" cmpd="sng" algn="ctr">
+                      <a:noFill/>
+                    </a:lnT>
+                    <a:lnB w="0" cap="flat" cmpd="sng" algn="ctr">
+                      <a:noFill/>
+                    </a:lnB>
+                    <a:solidFill>
+                      <a:srgbClr val="E6F1F6"/>
+                    </a:solidFill>
+                  </a:tcPr>
+                </a:tc>
+                <a:tc>
+                  <a:txBody>
+                    <a:bodyPr/>
+                    <a:lstStyle/>
+                    <a:p>
+                      <a:pPr indent="0" marL="0">
+                        <a:buNone/>
+                      </a:pPr>
+                      <a:r>
+                        <a:rPr lang="en-US" sz="1050" dirty="0">
+                          <a:solidFill>
+                            <a:srgbClr val="1F2937"/>
+                          </a:solidFill>
+                          <a:latin typeface="Calibri" pitchFamily="34" charset="0"/>
+                          <a:ea typeface="Calibri" pitchFamily="34" charset="-122"/>
+                          <a:cs typeface="Calibri" pitchFamily="34" charset="-120"/>
+                        </a:rPr>
+                        <a:t>999</a:t>
+                      </a:r>
+                      <a:endParaRPr lang="en-US" sz="1050" dirty="0">
+                        <a:latin typeface="Calibri" charset="0"/>
+                        <a:ea typeface="Calibri" charset="0"/>
+                        <a:cs typeface="Calibri" charset="0"/>
+                      </a:endParaRPr>
+                    </a:p>
+                  </a:txBody>
+                  <a:tcPr marL="5486400" marR="5486400" marT="0" marB="0" anchor="ctr">
+                    <a:lnL w="0" cap="flat" cmpd="sng" algn="ctr">
+                      <a:noFill/>
+                    </a:lnL>
+                    <a:lnR w="0" cap="flat" cmpd="sng" algn="ctr">
+                      <a:noFill/>
+                    </a:lnR>
+                    <a:lnT w="0" cap="flat" cmpd="sng" algn="ctr">
+                      <a:noFill/>
+                    </a:lnT>
+                    <a:lnB w="0" cap="flat" cmpd="sng" algn="ctr">
+                      <a:noFill/>
+                    </a:lnB>
+                    <a:solidFill>
+                      <a:srgbClr val="E6F1F6"/>
+                    </a:solidFill>
+                  </a:tcPr>
+                </a:tc>
+                <a:tc>
+                  <a:txBody>
+                    <a:bodyPr/>
+                    <a:lstStyle/>
+                    <a:p>
+                      <a:pPr indent="0" marL="0">
+                        <a:buNone/>
+                      </a:pPr>
+                      <a:r>
+                        <a:rPr lang="en-US" sz="1050" dirty="0">
+                          <a:solidFill>
+                            <a:srgbClr val="1F2937"/>
+                          </a:solidFill>
+                          <a:latin typeface="Calibri" pitchFamily="34" charset="0"/>
+                          <a:ea typeface="Calibri" pitchFamily="34" charset="-122"/>
+                          <a:cs typeface="Calibri" pitchFamily="34" charset="-120"/>
+                        </a:rPr>
+                        <a:t>head circumference (mm), pixel size, head ellipse</a:t>
+                      </a:r>
+                      <a:endParaRPr lang="en-US" sz="1050" dirty="0">
+                        <a:latin typeface="Calibri" charset="0"/>
+                        <a:ea typeface="Calibri" charset="0"/>
+                        <a:cs typeface="Calibri" charset="0"/>
+                      </a:endParaRPr>
+                    </a:p>
+                  </a:txBody>
+                  <a:tcPr marL="5486400" marR="5486400" marT="0" marB="0" anchor="ctr">
+                    <a:lnL w="0" cap="flat" cmpd="sng" algn="ctr">
+                      <a:noFill/>
+                    </a:lnL>
+                    <a:lnR w="0" cap="flat" cmpd="sng" algn="ctr">
+                      <a:noFill/>
+                    </a:lnR>
+                    <a:lnT w="0" cap="flat" cmpd="sng" algn="ctr">
+                      <a:noFill/>
+                    </a:lnT>
+                    <a:lnB w="0" cap="flat" cmpd="sng" algn="ctr">
+                      <a:noFill/>
+                    </a:lnB>
+                    <a:solidFill>
+                      <a:srgbClr val="E6F1F6"/>
+                    </a:solidFill>
+                  </a:tcPr>
+                </a:tc>
+              </a:tr>
+              <a:tr h="301752">
+                <a:tc>
+                  <a:txBody>
+                    <a:bodyPr/>
+                    <a:lstStyle/>
+                    <a:p>
+                      <a:pPr indent="0" marL="0">
+                        <a:buNone/>
+                      </a:pPr>
+                      <a:r>
+                        <a:rPr lang="en-US" sz="1050" b="1" dirty="0">
+                          <a:solidFill>
+                            <a:srgbClr val="1F2937"/>
+                          </a:solidFill>
+                          <a:latin typeface="Calibri" pitchFamily="34" charset="0"/>
+                          <a:ea typeface="Calibri" pitchFamily="34" charset="-122"/>
+                          <a:cs typeface="Calibri" pitchFamily="34" charset="-120"/>
+                        </a:rPr>
+                        <a:t>Fetal head planes</a:t>
+                      </a:r>
+                      <a:endParaRPr lang="en-US" sz="1050" dirty="0">
+                        <a:latin typeface="Calibri" charset="0"/>
+                        <a:ea typeface="Calibri" charset="0"/>
+                        <a:cs typeface="Calibri" charset="0"/>
+                      </a:endParaRPr>
+                    </a:p>
+                  </a:txBody>
+                  <a:tcPr marL="5486400" marR="5486400" marT="0" marB="0" anchor="ctr">
+                    <a:lnL w="0" cap="flat" cmpd="sng" algn="ctr">
+                      <a:noFill/>
+                    </a:lnL>
+                    <a:lnR w="0" cap="flat" cmpd="sng" algn="ctr">
+                      <a:noFill/>
+                    </a:lnR>
+                    <a:lnT w="0" cap="flat" cmpd="sng" algn="ctr">
+                      <a:noFill/>
+                    </a:lnT>
+                    <a:lnB w="0" cap="flat" cmpd="sng" algn="ctr">
+                      <a:noFill/>
+                    </a:lnB>
+                    <a:solidFill>
+                      <a:srgbClr val="FFFFFF"/>
+                    </a:solidFill>
+                  </a:tcPr>
+                </a:tc>
+                <a:tc>
+                  <a:txBody>
+                    <a:bodyPr/>
+                    <a:lstStyle/>
+                    <a:p>
+                      <a:pPr indent="0" marL="0">
+                        <a:buNone/>
+                      </a:pPr>
+                      <a:r>
+                        <a:rPr lang="en-US" sz="1050" dirty="0">
+                          <a:solidFill>
+                            <a:srgbClr val="1F2937"/>
+                          </a:solidFill>
+                          <a:latin typeface="Calibri" pitchFamily="34" charset="0"/>
+                          <a:ea typeface="Calibri" pitchFamily="34" charset="-122"/>
+                          <a:cs typeface="Calibri" pitchFamily="34" charset="-120"/>
+                        </a:rPr>
+                        <a:t>fetal head</a:t>
+                      </a:r>
+                      <a:endParaRPr lang="en-US" sz="1050" dirty="0">
+                        <a:latin typeface="Calibri" charset="0"/>
+                        <a:ea typeface="Calibri" charset="0"/>
+                        <a:cs typeface="Calibri" charset="0"/>
+                      </a:endParaRPr>
+                    </a:p>
+                  </a:txBody>
+                  <a:tcPr marL="5486400" marR="5486400" marT="0" marB="0" anchor="ctr">
+                    <a:lnL w="0" cap="flat" cmpd="sng" algn="ctr">
+                      <a:noFill/>
+                    </a:lnL>
+                    <a:lnR w="0" cap="flat" cmpd="sng" algn="ctr">
+                      <a:noFill/>
+                    </a:lnR>
+                    <a:lnT w="0" cap="flat" cmpd="sng" algn="ctr">
+                      <a:noFill/>
+                    </a:lnT>
+                    <a:lnB w="0" cap="flat" cmpd="sng" algn="ctr">
+                      <a:noFill/>
+                    </a:lnB>
+                    <a:solidFill>
+                      <a:srgbClr val="FFFFFF"/>
+                    </a:solidFill>
+                  </a:tcPr>
+                </a:tc>
+                <a:tc>
+                  <a:txBody>
+                    <a:bodyPr/>
+                    <a:lstStyle/>
+                    <a:p>
+                      <a:pPr indent="0" marL="0">
+                        <a:buNone/>
+                      </a:pPr>
+                      <a:r>
+                        <a:rPr lang="en-US" sz="1050" dirty="0">
+                          <a:solidFill>
+                            <a:srgbClr val="1F2937"/>
+                          </a:solidFill>
+                          <a:latin typeface="Calibri" pitchFamily="34" charset="0"/>
+                          <a:ea typeface="Calibri" pitchFamily="34" charset="-122"/>
+                          <a:cs typeface="Calibri" pitchFamily="34" charset="-120"/>
+                        </a:rPr>
+                        <a:t>2,833</a:t>
+                      </a:r>
+                      <a:endParaRPr lang="en-US" sz="1050" dirty="0">
+                        <a:latin typeface="Calibri" charset="0"/>
+                        <a:ea typeface="Calibri" charset="0"/>
+                        <a:cs typeface="Calibri" charset="0"/>
+                      </a:endParaRPr>
+                    </a:p>
+                  </a:txBody>
+                  <a:tcPr marL="5486400" marR="5486400" marT="0" marB="0" anchor="ctr">
+                    <a:lnL w="0" cap="flat" cmpd="sng" algn="ctr">
+                      <a:noFill/>
+                    </a:lnL>
+                    <a:lnR w="0" cap="flat" cmpd="sng" algn="ctr">
+                      <a:noFill/>
+                    </a:lnR>
+                    <a:lnT w="0" cap="flat" cmpd="sng" algn="ctr">
+                      <a:noFill/>
+                    </a:lnT>
+                    <a:lnB w="0" cap="flat" cmpd="sng" algn="ctr">
+                      <a:noFill/>
+                    </a:lnB>
+                    <a:solidFill>
+                      <a:srgbClr val="FFFFFF"/>
+                    </a:solidFill>
+                  </a:tcPr>
+                </a:tc>
+                <a:tc>
+                  <a:txBody>
+                    <a:bodyPr/>
+                    <a:lstStyle/>
+                    <a:p>
+                      <a:pPr indent="0" marL="0">
+                        <a:buNone/>
+                      </a:pPr>
+                      <a:r>
+                        <a:rPr lang="en-US" sz="1050" dirty="0">
+                          <a:solidFill>
+                            <a:srgbClr val="1F2937"/>
+                          </a:solidFill>
+                          <a:latin typeface="Calibri" pitchFamily="34" charset="0"/>
+                          <a:ea typeface="Calibri" pitchFamily="34" charset="-122"/>
+                          <a:cs typeface="Calibri" pitchFamily="34" charset="-120"/>
+                        </a:rPr>
+                        <a:t>standard plane (e.g. trans-cerebellum), head mask, pixel size</a:t>
+                      </a:r>
+                      <a:endParaRPr lang="en-US" sz="1050" dirty="0">
+                        <a:latin typeface="Calibri" charset="0"/>
+                        <a:ea typeface="Calibri" charset="0"/>
+                        <a:cs typeface="Calibri" charset="0"/>
+                      </a:endParaRPr>
+                    </a:p>
+                  </a:txBody>
+                  <a:tcPr marL="5486400" marR="5486400" marT="0" marB="0" anchor="ctr">
+                    <a:lnL w="0" cap="flat" cmpd="sng" algn="ctr">
+                      <a:noFill/>
+                    </a:lnL>
+                    <a:lnR w="0" cap="flat" cmpd="sng" algn="ctr">
+                      <a:noFill/>
+                    </a:lnR>
+                    <a:lnT w="0" cap="flat" cmpd="sng" algn="ctr">
+                      <a:noFill/>
+                    </a:lnT>
+                    <a:lnB w="0" cap="flat" cmpd="sng" algn="ctr">
+                      <a:noFill/>
+                    </a:lnB>
+                    <a:solidFill>
+                      <a:srgbClr val="FFFFFF"/>
+                    </a:solidFill>
+                  </a:tcPr>
+                </a:tc>
+              </a:tr>
+            </a:tbl>
+          </a:graphicData>
+        </a:graphic>
+      </p:graphicFrame>
+      <p:sp>
+        <p:nvSpPr>
+          <p:cNvPr id="4" name="Text 1"/>
           <p:cNvSpPr txBox="1"/>
           <p:nvPr/>
         </p:nvSpPr>
         <p:spPr>
           <a:xfrm>
-            <a:off x="548640" y="1280160"/>
-            <a:ext cx="1828800" cy="731520"/>
+            <a:off x="457200" y="4434840"/>
+            <a:ext cx="8229600" cy="274320"/>
           </a:xfrm>
           <a:prstGeom prst="rect">
             <a:avLst/>
@@ -2917,34 +5058,34 @@
           <a:bodyPr wrap="square" lIns="0" tIns="0" rIns="0" bIns="0" rtlCol="0" anchor="ctr"/>
           <a:lstStyle/>
           <a:p>
-            <a:pPr algn="ctr" indent="0" marL="0">
+            <a:pPr indent="0" marL="0">
               <a:buNone/>
             </a:pPr>
             <a:r>
-              <a:rPr lang="en-US" sz="3400" b="1" dirty="0">
-                <a:solidFill>
-                  <a:srgbClr val="065A82"/>
-                </a:solidFill>
-                <a:latin typeface="Cambria" pitchFamily="34" charset="0"/>
-                <a:ea typeface="Cambria" pitchFamily="34" charset="-122"/>
-                <a:cs typeface="Cambria" pitchFamily="34" charset="-120"/>
-              </a:rPr>
-              <a:t>10</a:t>
-            </a:r>
-            <a:endParaRPr lang="en-US" sz="3400" dirty="0"/>
-          </a:p>
-        </p:txBody>
-      </p:sp>
-      <p:sp>
-        <p:nvSpPr>
-          <p:cNvPr id="5" name="Text 3"/>
+              <a:rPr lang="en-US" sz="1200" dirty="0">
+                <a:solidFill>
+                  <a:srgbClr val="5B6678"/>
+                </a:solidFill>
+                <a:latin typeface="Calibri" pitchFamily="34" charset="0"/>
+                <a:ea typeface="Calibri" pitchFamily="34" charset="-122"/>
+                <a:cs typeface="Calibri" pitchFamily="34" charset="-120"/>
+              </a:rPr>
+              <a:t>16,562 scans in all. Images are not in our repository; each dataset keeps its own licence (all still "to confirm").</a:t>
+            </a:r>
+            <a:endParaRPr lang="en-US" sz="1200" dirty="0"/>
+          </a:p>
+        </p:txBody>
+      </p:sp>
+      <p:sp>
+        <p:nvSpPr>
+          <p:cNvPr id="5" name="Text 2"/>
           <p:cNvSpPr txBox="1"/>
           <p:nvPr/>
         </p:nvSpPr>
         <p:spPr>
           <a:xfrm>
-            <a:off x="640080" y="2011680"/>
-            <a:ext cx="1645920" cy="640080"/>
+            <a:off x="548640" y="4754880"/>
+            <a:ext cx="8046720" cy="228600"/>
           </a:xfrm>
           <a:prstGeom prst="rect">
             <a:avLst/>
@@ -2956,445 +5097,6 @@
           <a:bodyPr wrap="square" lIns="0" tIns="0" rIns="0" bIns="0" rtlCol="0" anchor="ctr"/>
           <a:lstStyle/>
           <a:p>
-            <a:pPr algn="ctr" indent="0" marL="0">
-              <a:buNone/>
-            </a:pPr>
-            <a:r>
-              <a:rPr lang="en-US" sz="1300" dirty="0">
-                <a:solidFill>
-                  <a:srgbClr val="1F2937"/>
-                </a:solidFill>
-                <a:latin typeface="Calibri" pitchFamily="34" charset="0"/>
-                <a:ea typeface="Calibri" pitchFamily="34" charset="-122"/>
-                <a:cs typeface="Calibri" pitchFamily="34" charset="-120"/>
-              </a:rPr>
-              <a:t>datasets: breast, thyroid, fetal head</a:t>
-            </a:r>
-            <a:endParaRPr lang="en-US" sz="1300" dirty="0"/>
-          </a:p>
-        </p:txBody>
-      </p:sp>
-      <p:sp>
-        <p:nvSpPr>
-          <p:cNvPr id="6" name="Shape 4"/>
-          <p:cNvSpPr/>
-          <p:nvPr/>
-        </p:nvSpPr>
-        <p:spPr>
-          <a:xfrm>
-            <a:off x="2560320" y="1188720"/>
-            <a:ext cx="1828800" cy="1554480"/>
-          </a:xfrm>
-          <a:prstGeom prst="roundRect">
-            <a:avLst>
-              <a:gd name="adj" fmla="val 4706"/>
-            </a:avLst>
-          </a:prstGeom>
-          <a:solidFill>
-            <a:srgbClr val="E6F1F6"/>
-          </a:solidFill>
-          <a:ln w="12700">
-            <a:solidFill>
-              <a:srgbClr val="E6F1F6"/>
-            </a:solidFill>
-            <a:prstDash val="solid"/>
-          </a:ln>
-        </p:spPr>
-      </p:sp>
-      <p:sp>
-        <p:nvSpPr>
-          <p:cNvPr id="7" name="Text 5"/>
-          <p:cNvSpPr txBox="1"/>
-          <p:nvPr/>
-        </p:nvSpPr>
-        <p:spPr>
-          <a:xfrm>
-            <a:off x="2560320" y="1280160"/>
-            <a:ext cx="1828800" cy="731520"/>
-          </a:xfrm>
-          <a:prstGeom prst="rect">
-            <a:avLst/>
-          </a:prstGeom>
-          <a:noFill/>
-          <a:ln/>
-        </p:spPr>
-        <p:txBody>
-          <a:bodyPr wrap="square" lIns="0" tIns="0" rIns="0" bIns="0" rtlCol="0" anchor="ctr"/>
-          <a:lstStyle/>
-          <a:p>
-            <a:pPr algn="ctr" indent="0" marL="0">
-              <a:buNone/>
-            </a:pPr>
-            <a:r>
-              <a:rPr lang="en-US" sz="3400" b="1" dirty="0">
-                <a:solidFill>
-                  <a:srgbClr val="065A82"/>
-                </a:solidFill>
-                <a:latin typeface="Cambria" pitchFamily="34" charset="0"/>
-                <a:ea typeface="Cambria" pitchFamily="34" charset="-122"/>
-                <a:cs typeface="Cambria" pitchFamily="34" charset="-120"/>
-              </a:rPr>
-              <a:t>16,562</a:t>
-            </a:r>
-            <a:endParaRPr lang="en-US" sz="3400" dirty="0"/>
-          </a:p>
-        </p:txBody>
-      </p:sp>
-      <p:sp>
-        <p:nvSpPr>
-          <p:cNvPr id="8" name="Text 6"/>
-          <p:cNvSpPr txBox="1"/>
-          <p:nvPr/>
-        </p:nvSpPr>
-        <p:spPr>
-          <a:xfrm>
-            <a:off x="2651760" y="2011680"/>
-            <a:ext cx="1645920" cy="640080"/>
-          </a:xfrm>
-          <a:prstGeom prst="rect">
-            <a:avLst/>
-          </a:prstGeom>
-          <a:noFill/>
-          <a:ln/>
-        </p:spPr>
-        <p:txBody>
-          <a:bodyPr wrap="square" lIns="0" tIns="0" rIns="0" bIns="0" rtlCol="0" anchor="ctr"/>
-          <a:lstStyle/>
-          <a:p>
-            <a:pPr algn="ctr" indent="0" marL="0">
-              <a:buNone/>
-            </a:pPr>
-            <a:r>
-              <a:rPr lang="en-US" sz="1300" dirty="0">
-                <a:solidFill>
-                  <a:srgbClr val="1F2937"/>
-                </a:solidFill>
-                <a:latin typeface="Calibri" pitchFamily="34" charset="0"/>
-                <a:ea typeface="Calibri" pitchFamily="34" charset="-122"/>
-                <a:cs typeface="Calibri" pitchFamily="34" charset="-120"/>
-              </a:rPr>
-              <a:t>true reports made from labels</a:t>
-            </a:r>
-            <a:endParaRPr lang="en-US" sz="1300" dirty="0"/>
-          </a:p>
-        </p:txBody>
-      </p:sp>
-      <p:sp>
-        <p:nvSpPr>
-          <p:cNvPr id="9" name="Shape 7"/>
-          <p:cNvSpPr/>
-          <p:nvPr/>
-        </p:nvSpPr>
-        <p:spPr>
-          <a:xfrm>
-            <a:off x="4572000" y="1188720"/>
-            <a:ext cx="1828800" cy="1554480"/>
-          </a:xfrm>
-          <a:prstGeom prst="roundRect">
-            <a:avLst>
-              <a:gd name="adj" fmla="val 4706"/>
-            </a:avLst>
-          </a:prstGeom>
-          <a:solidFill>
-            <a:srgbClr val="E6F1F6"/>
-          </a:solidFill>
-          <a:ln w="12700">
-            <a:solidFill>
-              <a:srgbClr val="E6F1F6"/>
-            </a:solidFill>
-            <a:prstDash val="solid"/>
-          </a:ln>
-        </p:spPr>
-      </p:sp>
-      <p:sp>
-        <p:nvSpPr>
-          <p:cNvPr id="10" name="Text 8"/>
-          <p:cNvSpPr txBox="1"/>
-          <p:nvPr/>
-        </p:nvSpPr>
-        <p:spPr>
-          <a:xfrm>
-            <a:off x="4572000" y="1280160"/>
-            <a:ext cx="1828800" cy="731520"/>
-          </a:xfrm>
-          <a:prstGeom prst="rect">
-            <a:avLst/>
-          </a:prstGeom>
-          <a:noFill/>
-          <a:ln/>
-        </p:spPr>
-        <p:txBody>
-          <a:bodyPr wrap="square" lIns="0" tIns="0" rIns="0" bIns="0" rtlCol="0" anchor="ctr"/>
-          <a:lstStyle/>
-          <a:p>
-            <a:pPr algn="ctr" indent="0" marL="0">
-              <a:buNone/>
-            </a:pPr>
-            <a:r>
-              <a:rPr lang="en-US" sz="3400" b="1" dirty="0">
-                <a:solidFill>
-                  <a:srgbClr val="065A82"/>
-                </a:solidFill>
-                <a:latin typeface="Cambria" pitchFamily="34" charset="0"/>
-                <a:ea typeface="Cambria" pitchFamily="34" charset="-122"/>
-                <a:cs typeface="Cambria" pitchFamily="34" charset="-120"/>
-              </a:rPr>
-              <a:t>27,193</a:t>
-            </a:r>
-            <a:endParaRPr lang="en-US" sz="3400" dirty="0"/>
-          </a:p>
-        </p:txBody>
-      </p:sp>
-      <p:sp>
-        <p:nvSpPr>
-          <p:cNvPr id="11" name="Text 9"/>
-          <p:cNvSpPr txBox="1"/>
-          <p:nvPr/>
-        </p:nvSpPr>
-        <p:spPr>
-          <a:xfrm>
-            <a:off x="4663440" y="2011680"/>
-            <a:ext cx="1645920" cy="640080"/>
-          </a:xfrm>
-          <a:prstGeom prst="rect">
-            <a:avLst/>
-          </a:prstGeom>
-          <a:noFill/>
-          <a:ln/>
-        </p:spPr>
-        <p:txBody>
-          <a:bodyPr wrap="square" lIns="0" tIns="0" rIns="0" bIns="0" rtlCol="0" anchor="ctr"/>
-          <a:lstStyle/>
-          <a:p>
-            <a:pPr algn="ctr" indent="0" marL="0">
-              <a:buNone/>
-            </a:pPr>
-            <a:r>
-              <a:rPr lang="en-US" sz="1300" dirty="0">
-                <a:solidFill>
-                  <a:srgbClr val="1F2937"/>
-                </a:solidFill>
-                <a:latin typeface="Calibri" pitchFamily="34" charset="0"/>
-                <a:ea typeface="Calibri" pitchFamily="34" charset="-122"/>
-                <a:cs typeface="Calibri" pitchFamily="34" charset="-120"/>
-              </a:rPr>
-              <a:t>candidates: 13,396 planted mistakes</a:t>
-            </a:r>
-            <a:endParaRPr lang="en-US" sz="1300" dirty="0"/>
-          </a:p>
-        </p:txBody>
-      </p:sp>
-      <p:sp>
-        <p:nvSpPr>
-          <p:cNvPr id="12" name="Shape 10"/>
-          <p:cNvSpPr/>
-          <p:nvPr/>
-        </p:nvSpPr>
-        <p:spPr>
-          <a:xfrm>
-            <a:off x="6583680" y="1188720"/>
-            <a:ext cx="1828800" cy="1554480"/>
-          </a:xfrm>
-          <a:prstGeom prst="roundRect">
-            <a:avLst>
-              <a:gd name="adj" fmla="val 4706"/>
-            </a:avLst>
-          </a:prstGeom>
-          <a:solidFill>
-            <a:srgbClr val="E6F1F6"/>
-          </a:solidFill>
-          <a:ln w="12700">
-            <a:solidFill>
-              <a:srgbClr val="E6F1F6"/>
-            </a:solidFill>
-            <a:prstDash val="solid"/>
-          </a:ln>
-        </p:spPr>
-      </p:sp>
-      <p:sp>
-        <p:nvSpPr>
-          <p:cNvPr id="13" name="Text 11"/>
-          <p:cNvSpPr txBox="1"/>
-          <p:nvPr/>
-        </p:nvSpPr>
-        <p:spPr>
-          <a:xfrm>
-            <a:off x="6583680" y="1280160"/>
-            <a:ext cx="1828800" cy="731520"/>
-          </a:xfrm>
-          <a:prstGeom prst="rect">
-            <a:avLst/>
-          </a:prstGeom>
-          <a:noFill/>
-          <a:ln/>
-        </p:spPr>
-        <p:txBody>
-          <a:bodyPr wrap="square" lIns="0" tIns="0" rIns="0" bIns="0" rtlCol="0" anchor="ctr"/>
-          <a:lstStyle/>
-          <a:p>
-            <a:pPr algn="ctr" indent="0" marL="0">
-              <a:buNone/>
-            </a:pPr>
-            <a:r>
-              <a:rPr lang="en-US" sz="3400" b="1" dirty="0">
-                <a:solidFill>
-                  <a:srgbClr val="065A82"/>
-                </a:solidFill>
-                <a:latin typeface="Cambria" pitchFamily="34" charset="0"/>
-                <a:ea typeface="Cambria" pitchFamily="34" charset="-122"/>
-                <a:cs typeface="Cambria" pitchFamily="34" charset="-120"/>
-              </a:rPr>
-              <a:t>4</a:t>
-            </a:r>
-            <a:endParaRPr lang="en-US" sz="3400" dirty="0"/>
-          </a:p>
-        </p:txBody>
-      </p:sp>
-      <p:sp>
-        <p:nvSpPr>
-          <p:cNvPr id="14" name="Text 12"/>
-          <p:cNvSpPr txBox="1"/>
-          <p:nvPr/>
-        </p:nvSpPr>
-        <p:spPr>
-          <a:xfrm>
-            <a:off x="6675120" y="2011680"/>
-            <a:ext cx="1645920" cy="640080"/>
-          </a:xfrm>
-          <a:prstGeom prst="rect">
-            <a:avLst/>
-          </a:prstGeom>
-          <a:noFill/>
-          <a:ln/>
-        </p:spPr>
-        <p:txBody>
-          <a:bodyPr wrap="square" lIns="0" tIns="0" rIns="0" bIns="0" rtlCol="0" anchor="ctr"/>
-          <a:lstStyle/>
-          <a:p>
-            <a:pPr algn="ctr" indent="0" marL="0">
-              <a:buNone/>
-            </a:pPr>
-            <a:r>
-              <a:rPr lang="en-US" sz="1300" dirty="0">
-                <a:solidFill>
-                  <a:srgbClr val="1F2937"/>
-                </a:solidFill>
-                <a:latin typeface="Calibri" pitchFamily="34" charset="0"/>
-                <a:ea typeface="Calibri" pitchFamily="34" charset="-122"/>
-                <a:cs typeface="Calibri" pitchFamily="34" charset="-120"/>
-              </a:rPr>
-              <a:t>scorer layers tested</a:t>
-            </a:r>
-            <a:endParaRPr lang="en-US" sz="1300" dirty="0"/>
-          </a:p>
-        </p:txBody>
-      </p:sp>
-      <p:sp>
-        <p:nvSpPr>
-          <p:cNvPr id="15" name="Text 13"/>
-          <p:cNvSpPr txBox="1"/>
-          <p:nvPr/>
-        </p:nvSpPr>
-        <p:spPr>
-          <a:xfrm>
-            <a:off x="548640" y="3017520"/>
-            <a:ext cx="8046720" cy="1463040"/>
-          </a:xfrm>
-          <a:prstGeom prst="rect">
-            <a:avLst/>
-          </a:prstGeom>
-          <a:noFill/>
-          <a:ln/>
-        </p:spPr>
-        <p:txBody>
-          <a:bodyPr wrap="square" lIns="0" tIns="0" rIns="0" bIns="0" rtlCol="0" anchor="t"/>
-          <a:lstStyle/>
-          <a:p>
-            <a:pPr marL="342900" indent="-342900">
-              <a:spcAft>
-                <a:spcPts val="600"/>
-              </a:spcAft>
-              <a:buSzPct val="100000"/>
-              <a:buChar char="•"/>
-            </a:pPr>
-            <a:r>
-              <a:rPr lang="en-US" sz="1500" dirty="0">
-                <a:solidFill>
-                  <a:srgbClr val="1F2937"/>
-                </a:solidFill>
-                <a:latin typeface="Calibri" pitchFamily="34" charset="0"/>
-                <a:ea typeface="Calibri" pitchFamily="34" charset="-122"/>
-                <a:cs typeface="Calibri" pitchFamily="34" charset="-120"/>
-              </a:rPr>
-              <a:t>Locked dev / val / test split, grouped by patient: tuning on dev/val, final numbers on test only</a:t>
-            </a:r>
-            <a:endParaRPr lang="en-US" sz="1500" dirty="0"/>
-          </a:p>
-          <a:p>
-            <a:pPr marL="342900" indent="-342900">
-              <a:spcAft>
-                <a:spcPts val="600"/>
-              </a:spcAft>
-              <a:buSzPct val="100000"/>
-              <a:buChar char="•"/>
-            </a:pPr>
-            <a:r>
-              <a:rPr lang="en-US" sz="1500" dirty="0">
-                <a:solidFill>
-                  <a:srgbClr val="1F2937"/>
-                </a:solidFill>
-                <a:latin typeface="Calibri" pitchFamily="34" charset="0"/>
-                <a:ea typeface="Calibri" pitchFamily="34" charset="-122"/>
-                <a:cs typeface="Calibri" pitchFamily="34" charset="-120"/>
-              </a:rPr>
-              <a:t>Versions frozen (tag freeze-v1); every step saved with its command and settings</a:t>
-            </a:r>
-            <a:endParaRPr lang="en-US" sz="1500" dirty="0"/>
-          </a:p>
-          <a:p>
-            <a:pPr marL="342900" indent="-342900">
-              <a:spcAft>
-                <a:spcPts val="600"/>
-              </a:spcAft>
-              <a:buSzPct val="100000"/>
-              <a:buChar char="•"/>
-            </a:pPr>
-            <a:r>
-              <a:rPr lang="en-US" sz="1500" dirty="0">
-                <a:solidFill>
-                  <a:srgbClr val="1F2937"/>
-                </a:solidFill>
-                <a:latin typeface="Calibri" pitchFamily="34" charset="0"/>
-                <a:ea typeface="Calibri" pitchFamily="34" charset="-122"/>
-                <a:cs typeface="Calibri" pitchFamily="34" charset="-120"/>
-              </a:rPr>
-              <a:t>Also tried real AI report writers (Qwen, MedGemma), MedSAM masks, and real doctor text (HiSBreast, small subset)</a:t>
-            </a:r>
-            <a:endParaRPr lang="en-US" sz="1500" dirty="0"/>
-          </a:p>
-        </p:txBody>
-      </p:sp>
-      <p:sp>
-        <p:nvSpPr>
-          <p:cNvPr id="16" name="Text 14"/>
-          <p:cNvSpPr txBox="1"/>
-          <p:nvPr/>
-        </p:nvSpPr>
-        <p:spPr>
-          <a:xfrm>
-            <a:off x="548640" y="4754880"/>
-            <a:ext cx="8046720" cy="228600"/>
-          </a:xfrm>
-          <a:prstGeom prst="rect">
-            <a:avLst/>
-          </a:prstGeom>
-          <a:noFill/>
-          <a:ln/>
-        </p:spPr>
-        <p:txBody>
-          <a:bodyPr wrap="square" lIns="0" tIns="0" rIns="0" bIns="0" rtlCol="0" anchor="ctr"/>
-          <a:lstStyle/>
-          <a:p>
             <a:pPr indent="0" marL="0">
               <a:buNone/>
             </a:pPr>
@@ -3407,7 +5109,7 @@
                 <a:ea typeface="Calibri" pitchFamily="34" charset="-122"/>
                 <a:cs typeface="Calibri" pitchFamily="34" charset="-120"/>
               </a:rPr>
-              <a:t>Ultrasound report scorers · plain-language summary · 3/7</a:t>
+              <a:t>Ultrasound report scorers · plain-language summary · 3/9</a:t>
             </a:r>
             <a:endParaRPr lang="en-US" sz="1000" dirty="0"/>
           </a:p>
@@ -3478,38 +5180,49 @@
                 <a:ea typeface="Cambria" pitchFamily="34" charset="-122"/>
                 <a:cs typeface="Cambria" pitchFamily="34" charset="-120"/>
               </a:rPr>
-              <a:t>Word-matching scores miss the mistake</a:t>
+              <a:t>How we handled the data</a:t>
             </a:r>
             <a:endParaRPr lang="en-US" sz="3000" dirty="0"/>
           </a:p>
         </p:txBody>
       </p:sp>
-      <p:graphicFrame>
-        <p:nvGraphicFramePr>
-          <p:cNvPr id="3" name="Chart 0" descr=""/>
-          <p:cNvGraphicFramePr/>
-          <p:nvPr/>
-        </p:nvGraphicFramePr>
-        <p:xfrm>
-          <a:off x="457200" y="1097280"/>
-          <a:ext cx="4206240" cy="3383280"/>
-        </p:xfrm>
-        <a:graphic xmlns:a="http://schemas.openxmlformats.org/drawingml/2006/main">
-          <a:graphicData uri="http://schemas.openxmlformats.org/drawingml/2006/chart">
-            <c:chart xmlns:c="http://schemas.openxmlformats.org/drawingml/2006/chart" r:id="rId1"/>
-          </a:graphicData>
-        </a:graphic>
-      </p:graphicFrame>
-      <p:sp>
-        <p:nvSpPr>
-          <p:cNvPr id="4" name="Text 1"/>
+      <p:sp>
+        <p:nvSpPr>
+          <p:cNvPr id="3" name="Shape 1"/>
+          <p:cNvSpPr/>
+          <p:nvPr/>
+        </p:nvSpPr>
+        <p:spPr>
+          <a:xfrm>
+            <a:off x="548640" y="1097280"/>
+            <a:ext cx="3931920" cy="1600200"/>
+          </a:xfrm>
+          <a:prstGeom prst="roundRect">
+            <a:avLst>
+              <a:gd name="adj" fmla="val 4571"/>
+            </a:avLst>
+          </a:prstGeom>
+          <a:solidFill>
+            <a:srgbClr val="E6F1F6"/>
+          </a:solidFill>
+          <a:ln w="12700">
+            <a:solidFill>
+              <a:srgbClr val="E6F1F6"/>
+            </a:solidFill>
+            <a:prstDash val="solid"/>
+          </a:ln>
+        </p:spPr>
+      </p:sp>
+      <p:sp>
+        <p:nvSpPr>
+          <p:cNvPr id="4" name="Text 2"/>
           <p:cNvSpPr txBox="1"/>
           <p:nvPr/>
         </p:nvSpPr>
         <p:spPr>
           <a:xfrm>
-            <a:off x="4846320" y="1188720"/>
-            <a:ext cx="3840480" cy="3291840"/>
+            <a:off x="731520" y="1207008"/>
+            <a:ext cx="3566160" cy="365760"/>
           </a:xfrm>
           <a:prstGeom prst="rect">
             <a:avLst/>
@@ -3518,18 +5231,53 @@
           <a:ln/>
         </p:spPr>
         <p:txBody>
+          <a:bodyPr wrap="square" lIns="0" tIns="0" rIns="0" bIns="0" rtlCol="0" anchor="ctr"/>
+          <a:lstStyle/>
+          <a:p>
+            <a:pPr indent="0" marL="0">
+              <a:buNone/>
+            </a:pPr>
+            <a:r>
+              <a:rPr lang="en-US" sz="1600" b="1" dirty="0">
+                <a:solidFill>
+                  <a:srgbClr val="21295C"/>
+                </a:solidFill>
+                <a:latin typeface="Calibri" pitchFamily="34" charset="0"/>
+                <a:ea typeface="Calibri" pitchFamily="34" charset="-122"/>
+                <a:cs typeface="Calibri" pitchFamily="34" charset="-120"/>
+              </a:rPr>
+              <a:t>Reports from labels</a:t>
+            </a:r>
+            <a:endParaRPr lang="en-US" sz="1600" dirty="0"/>
+          </a:p>
+        </p:txBody>
+      </p:sp>
+      <p:sp>
+        <p:nvSpPr>
+          <p:cNvPr id="5" name="Text 3"/>
+          <p:cNvSpPr txBox="1"/>
+          <p:nvPr/>
+        </p:nvSpPr>
+        <p:spPr>
+          <a:xfrm>
+            <a:off x="731520" y="1600200"/>
+            <a:ext cx="3566160" cy="1005840"/>
+          </a:xfrm>
+          <a:prstGeom prst="rect">
+            <a:avLst/>
+          </a:prstGeom>
+          <a:noFill/>
+          <a:ln/>
+        </p:spPr>
+        <p:txBody>
           <a:bodyPr wrap="square" lIns="0" tIns="0" rIns="0" bIns="0" rtlCol="0" anchor="t"/>
           <a:lstStyle/>
           <a:p>
-            <a:pPr marL="342900" indent="-342900">
-              <a:spcAft>
-                <a:spcPts val="800"/>
-              </a:spcAft>
-              <a:buSzPct val="100000"/>
-              <a:buChar char="•"/>
-            </a:pPr>
-            <a:r>
-              <a:rPr lang="en-US" sz="1400" dirty="0">
+            <a:pPr indent="0" marL="0">
+              <a:buNone/>
+            </a:pPr>
+            <a:r>
+              <a:rPr lang="en-US" sz="1300" dirty="0">
                 <a:solidFill>
                   <a:srgbClr val="1F2937"/>
                 </a:solidFill>
@@ -3537,20 +5285,104 @@
                 <a:ea typeface="Calibri" pitchFamily="34" charset="-122"/>
                 <a:cs typeface="Calibri" pitchFamily="34" charset="-120"/>
               </a:rPr>
-              <a:t>No cut-off flags most mistakes without also flagging most harmless rewordings</a:t>
-            </a:r>
-            <a:endParaRPr lang="en-US" sz="1400" dirty="0"/>
-          </a:p>
-          <a:p>
-            <a:pPr marL="342900" indent="-342900">
-              <a:spcAft>
-                <a:spcPts val="800"/>
-              </a:spcAft>
-              <a:buSzPct val="100000"/>
-              <a:buChar char="•"/>
-            </a:pPr>
-            <a:r>
-              <a:rPr lang="en-US" sz="1400" dirty="0">
+              <a:t>Each true report is written by our templates from labels and masks: synthetic but fact-correct. No doctor-written text in the 10 sets.</a:t>
+            </a:r>
+            <a:endParaRPr lang="en-US" sz="1300" dirty="0"/>
+          </a:p>
+        </p:txBody>
+      </p:sp>
+      <p:sp>
+        <p:nvSpPr>
+          <p:cNvPr id="6" name="Shape 4"/>
+          <p:cNvSpPr/>
+          <p:nvPr/>
+        </p:nvSpPr>
+        <p:spPr>
+          <a:xfrm>
+            <a:off x="4663440" y="1097280"/>
+            <a:ext cx="3931920" cy="1600200"/>
+          </a:xfrm>
+          <a:prstGeom prst="roundRect">
+            <a:avLst>
+              <a:gd name="adj" fmla="val 4571"/>
+            </a:avLst>
+          </a:prstGeom>
+          <a:solidFill>
+            <a:srgbClr val="E6F1F6"/>
+          </a:solidFill>
+          <a:ln w="12700">
+            <a:solidFill>
+              <a:srgbClr val="E6F1F6"/>
+            </a:solidFill>
+            <a:prstDash val="solid"/>
+          </a:ln>
+        </p:spPr>
+      </p:sp>
+      <p:sp>
+        <p:nvSpPr>
+          <p:cNvPr id="7" name="Text 5"/>
+          <p:cNvSpPr txBox="1"/>
+          <p:nvPr/>
+        </p:nvSpPr>
+        <p:spPr>
+          <a:xfrm>
+            <a:off x="4846320" y="1207008"/>
+            <a:ext cx="3566160" cy="365760"/>
+          </a:xfrm>
+          <a:prstGeom prst="rect">
+            <a:avLst/>
+          </a:prstGeom>
+          <a:noFill/>
+          <a:ln/>
+        </p:spPr>
+        <p:txBody>
+          <a:bodyPr wrap="square" lIns="0" tIns="0" rIns="0" bIns="0" rtlCol="0" anchor="ctr"/>
+          <a:lstStyle/>
+          <a:p>
+            <a:pPr indent="0" marL="0">
+              <a:buNone/>
+            </a:pPr>
+            <a:r>
+              <a:rPr lang="en-US" sz="1600" b="1" dirty="0">
+                <a:solidFill>
+                  <a:srgbClr val="21295C"/>
+                </a:solidFill>
+                <a:latin typeface="Calibri" pitchFamily="34" charset="0"/>
+                <a:ea typeface="Calibri" pitchFamily="34" charset="-122"/>
+                <a:cs typeface="Calibri" pitchFamily="34" charset="-120"/>
+              </a:rPr>
+              <a:t>Locked splits</a:t>
+            </a:r>
+            <a:endParaRPr lang="en-US" sz="1600" dirty="0"/>
+          </a:p>
+        </p:txBody>
+      </p:sp>
+      <p:sp>
+        <p:nvSpPr>
+          <p:cNvPr id="8" name="Text 6"/>
+          <p:cNvSpPr txBox="1"/>
+          <p:nvPr/>
+        </p:nvSpPr>
+        <p:spPr>
+          <a:xfrm>
+            <a:off x="4846320" y="1600200"/>
+            <a:ext cx="3566160" cy="1005840"/>
+          </a:xfrm>
+          <a:prstGeom prst="rect">
+            <a:avLst/>
+          </a:prstGeom>
+          <a:noFill/>
+          <a:ln/>
+        </p:spPr>
+        <p:txBody>
+          <a:bodyPr wrap="square" lIns="0" tIns="0" rIns="0" bIns="0" rtlCol="0" anchor="t"/>
+          <a:lstStyle/>
+          <a:p>
+            <a:pPr indent="0" marL="0">
+              <a:buNone/>
+            </a:pPr>
+            <a:r>
+              <a:rPr lang="en-US" sz="1300" dirty="0">
                 <a:solidFill>
                   <a:srgbClr val="1F2937"/>
                 </a:solidFill>
@@ -3558,20 +5390,104 @@
                 <a:ea typeface="Calibri" pitchFamily="34" charset="-122"/>
                 <a:cs typeface="Calibri" pitchFamily="34" charset="-120"/>
               </a:rPr>
-              <a:t>A lazy "No abnormality." still scores about 0.85 on BERTScore</a:t>
-            </a:r>
-            <a:endParaRPr lang="en-US" sz="1400" dirty="0"/>
-          </a:p>
-          <a:p>
-            <a:pPr marL="342900" indent="-342900">
-              <a:spcAft>
-                <a:spcPts val="800"/>
-              </a:spcAft>
-              <a:buSzPct val="100000"/>
-              <a:buChar char="•"/>
-            </a:pPr>
-            <a:r>
-              <a:rPr lang="en-US" sz="1400" dirty="0">
+              <a:t>40% dev / 20% val / 40% test, grouped by patient or near-duplicate cluster. Tune on dev/val only; final numbers on test.</a:t>
+            </a:r>
+            <a:endParaRPr lang="en-US" sz="1300" dirty="0"/>
+          </a:p>
+        </p:txBody>
+      </p:sp>
+      <p:sp>
+        <p:nvSpPr>
+          <p:cNvPr id="9" name="Shape 7"/>
+          <p:cNvSpPr/>
+          <p:nvPr/>
+        </p:nvSpPr>
+        <p:spPr>
+          <a:xfrm>
+            <a:off x="548640" y="2834640"/>
+            <a:ext cx="3931920" cy="1600200"/>
+          </a:xfrm>
+          <a:prstGeom prst="roundRect">
+            <a:avLst>
+              <a:gd name="adj" fmla="val 4571"/>
+            </a:avLst>
+          </a:prstGeom>
+          <a:solidFill>
+            <a:srgbClr val="E6F1F6"/>
+          </a:solidFill>
+          <a:ln w="12700">
+            <a:solidFill>
+              <a:srgbClr val="E6F1F6"/>
+            </a:solidFill>
+            <a:prstDash val="solid"/>
+          </a:ln>
+        </p:spPr>
+      </p:sp>
+      <p:sp>
+        <p:nvSpPr>
+          <p:cNvPr id="10" name="Text 8"/>
+          <p:cNvSpPr txBox="1"/>
+          <p:nvPr/>
+        </p:nvSpPr>
+        <p:spPr>
+          <a:xfrm>
+            <a:off x="731520" y="2944368"/>
+            <a:ext cx="3566160" cy="365760"/>
+          </a:xfrm>
+          <a:prstGeom prst="rect">
+            <a:avLst/>
+          </a:prstGeom>
+          <a:noFill/>
+          <a:ln/>
+        </p:spPr>
+        <p:txBody>
+          <a:bodyPr wrap="square" lIns="0" tIns="0" rIns="0" bIns="0" rtlCol="0" anchor="ctr"/>
+          <a:lstStyle/>
+          <a:p>
+            <a:pPr indent="0" marL="0">
+              <a:buNone/>
+            </a:pPr>
+            <a:r>
+              <a:rPr lang="en-US" sz="1600" b="1" dirty="0">
+                <a:solidFill>
+                  <a:srgbClr val="21295C"/>
+                </a:solidFill>
+                <a:latin typeface="Calibri" pitchFamily="34" charset="0"/>
+                <a:ea typeface="Calibri" pitchFamily="34" charset="-122"/>
+                <a:cs typeface="Calibri" pitchFamily="34" charset="-120"/>
+              </a:rPr>
+              <a:t>Duplicates checked</a:t>
+            </a:r>
+            <a:endParaRPr lang="en-US" sz="1600" dirty="0"/>
+          </a:p>
+        </p:txBody>
+      </p:sp>
+      <p:sp>
+        <p:nvSpPr>
+          <p:cNvPr id="11" name="Text 9"/>
+          <p:cNvSpPr txBox="1"/>
+          <p:nvPr/>
+        </p:nvSpPr>
+        <p:spPr>
+          <a:xfrm>
+            <a:off x="731520" y="3337560"/>
+            <a:ext cx="3566160" cy="1005840"/>
+          </a:xfrm>
+          <a:prstGeom prst="rect">
+            <a:avLst/>
+          </a:prstGeom>
+          <a:noFill/>
+          <a:ln/>
+        </p:spPr>
+        <p:txBody>
+          <a:bodyPr wrap="square" lIns="0" tIns="0" rIns="0" bIns="0" rtlCol="0" anchor="t"/>
+          <a:lstStyle/>
+          <a:p>
+            <a:pPr indent="0" marL="0">
+              <a:buNone/>
+            </a:pPr>
+            <a:r>
+              <a:rPr lang="en-US" sz="1300" dirty="0">
                 <a:solidFill>
                   <a:srgbClr val="1F2937"/>
                 </a:solidFill>
@@ -3579,20 +5495,104 @@
                 <a:ea typeface="Calibri" pitchFamily="34" charset="-122"/>
                 <a:cs typeface="Calibri" pitchFamily="34" charset="-120"/>
               </a:rPr>
-              <a:t>Scores follow how much text changed: a mistake changes 2–4% of words, a rewording 5–60%</a:t>
-            </a:r>
-            <a:endParaRPr lang="en-US" sz="1400" dirty="0"/>
-          </a:p>
-          <a:p>
-            <a:pPr marL="342900" indent="-342900">
-              <a:spcAft>
-                <a:spcPts val="800"/>
-              </a:spcAft>
-              <a:buSzPct val="100000"/>
-              <a:buChar char="•"/>
-            </a:pPr>
-            <a:r>
-              <a:rPr lang="en-US" sz="1400" dirty="0">
+              <a:t>No dataset shares images with another. Inside one: BUSI 37%, FetalHead 9%, BUS-UCLM 6.6%, TN5000 5.6% near-duplicates, grouped not dropped.</a:t>
+            </a:r>
+            <a:endParaRPr lang="en-US" sz="1300" dirty="0"/>
+          </a:p>
+        </p:txBody>
+      </p:sp>
+      <p:sp>
+        <p:nvSpPr>
+          <p:cNvPr id="12" name="Shape 10"/>
+          <p:cNvSpPr/>
+          <p:nvPr/>
+        </p:nvSpPr>
+        <p:spPr>
+          <a:xfrm>
+            <a:off x="4663440" y="2834640"/>
+            <a:ext cx="3931920" cy="1600200"/>
+          </a:xfrm>
+          <a:prstGeom prst="roundRect">
+            <a:avLst>
+              <a:gd name="adj" fmla="val 4571"/>
+            </a:avLst>
+          </a:prstGeom>
+          <a:solidFill>
+            <a:srgbClr val="E6F1F6"/>
+          </a:solidFill>
+          <a:ln w="12700">
+            <a:solidFill>
+              <a:srgbClr val="E6F1F6"/>
+            </a:solidFill>
+            <a:prstDash val="solid"/>
+          </a:ln>
+        </p:spPr>
+      </p:sp>
+      <p:sp>
+        <p:nvSpPr>
+          <p:cNvPr id="13" name="Text 11"/>
+          <p:cNvSpPr txBox="1"/>
+          <p:nvPr/>
+        </p:nvSpPr>
+        <p:spPr>
+          <a:xfrm>
+            <a:off x="4846320" y="2944368"/>
+            <a:ext cx="3566160" cy="365760"/>
+          </a:xfrm>
+          <a:prstGeom prst="rect">
+            <a:avLst/>
+          </a:prstGeom>
+          <a:noFill/>
+          <a:ln/>
+        </p:spPr>
+        <p:txBody>
+          <a:bodyPr wrap="square" lIns="0" tIns="0" rIns="0" bIns="0" rtlCol="0" anchor="ctr"/>
+          <a:lstStyle/>
+          <a:p>
+            <a:pPr indent="0" marL="0">
+              <a:buNone/>
+            </a:pPr>
+            <a:r>
+              <a:rPr lang="en-US" sz="1600" b="1" dirty="0">
+                <a:solidFill>
+                  <a:srgbClr val="21295C"/>
+                </a:solidFill>
+                <a:latin typeface="Calibri" pitchFamily="34" charset="0"/>
+                <a:ea typeface="Calibri" pitchFamily="34" charset="-122"/>
+                <a:cs typeface="Calibri" pitchFamily="34" charset="-120"/>
+              </a:rPr>
+              <a:t>Known gaps</a:t>
+            </a:r>
+            <a:endParaRPr lang="en-US" sz="1600" dirty="0"/>
+          </a:p>
+        </p:txBody>
+      </p:sp>
+      <p:sp>
+        <p:nvSpPr>
+          <p:cNvPr id="14" name="Text 12"/>
+          <p:cNvSpPr txBox="1"/>
+          <p:nvPr/>
+        </p:nvSpPr>
+        <p:spPr>
+          <a:xfrm>
+            <a:off x="4846320" y="3337560"/>
+            <a:ext cx="3566160" cy="1005840"/>
+          </a:xfrm>
+          <a:prstGeom prst="rect">
+            <a:avLst/>
+          </a:prstGeom>
+          <a:noFill/>
+          <a:ln/>
+        </p:spPr>
+        <p:txBody>
+          <a:bodyPr wrap="square" lIns="0" tIns="0" rIns="0" bIns="0" rtlCol="0" anchor="t"/>
+          <a:lstStyle/>
+          <a:p>
+            <a:pPr indent="0" marL="0">
+              <a:buNone/>
+            </a:pPr>
+            <a:r>
+              <a:rPr lang="en-US" sz="1300" dirty="0">
                 <a:solidFill>
                   <a:srgbClr val="1F2937"/>
                 </a:solidFill>
@@ -3600,15 +5600,15 @@
                 <a:ea typeface="Calibri" pitchFamily="34" charset="-122"/>
                 <a:cs typeface="Calibri" pitchFamily="34" charset="-120"/>
               </a:rPr>
-              <a:t>AI judge (Gemma) does better: 0.89–1.00 vs one-word rewordings, weaker (0.60–0.71) on bigger rewordings, and prompt-sensitive</a:t>
-            </a:r>
-            <a:endParaRPr lang="en-US" sz="1400" dirty="0"/>
-          </a:p>
-        </p:txBody>
-      </p:sp>
-      <p:sp>
-        <p:nvSpPr>
-          <p:cNvPr id="5" name="Text 2"/>
+              <a:t>No patient IDs for BUSI, UDIAT, TN3K, TN5000, HC18, so one patient may sit in two splits. Pixel size (mm) only for BrEaST and fetal sets.</a:t>
+            </a:r>
+            <a:endParaRPr lang="en-US" sz="1300" dirty="0"/>
+          </a:p>
+        </p:txBody>
+      </p:sp>
+      <p:sp>
+        <p:nvSpPr>
+          <p:cNvPr id="15" name="Text 13"/>
           <p:cNvSpPr txBox="1"/>
           <p:nvPr/>
         </p:nvSpPr>
@@ -3639,7 +5639,7 @@
                 <a:ea typeface="Calibri" pitchFamily="34" charset="-122"/>
                 <a:cs typeface="Calibri" pitchFamily="34" charset="-120"/>
               </a:rPr>
-              <a:t>Ultrasound report scorers · plain-language summary · 4/7</a:t>
+              <a:t>Ultrasound report scorers · plain-language summary · 4/9</a:t>
             </a:r>
             <a:endParaRPr lang="en-US" sz="1000" dirty="0"/>
           </a:p>
@@ -3710,7 +5710,7 @@
                 <a:ea typeface="Cambria" pitchFamily="34" charset="-122"/>
                 <a:cs typeface="Cambria" pitchFamily="34" charset="-120"/>
               </a:rPr>
-              <a:t>Image check and real AI writers</a:t>
+              <a:t>The steps we ran</a:t>
             </a:r>
             <a:endParaRPr lang="en-US" sz="3000" dirty="0"/>
           </a:p>
@@ -3725,11 +5725,11 @@
         <p:spPr>
           <a:xfrm>
             <a:off x="548640" y="1097280"/>
-            <a:ext cx="3931920" cy="3383280"/>
+            <a:ext cx="3931920" cy="603504"/>
           </a:xfrm>
           <a:prstGeom prst="roundRect">
             <a:avLst>
-              <a:gd name="adj" fmla="val 2162"/>
+              <a:gd name="adj" fmla="val 12121"/>
             </a:avLst>
           </a:prstGeom>
           <a:solidFill>
@@ -3751,8 +5751,8 @@
         </p:nvSpPr>
         <p:spPr>
           <a:xfrm>
-            <a:off x="548640" y="1188720"/>
-            <a:ext cx="3931920" cy="822960"/>
+            <a:off x="621792" y="1097280"/>
+            <a:ext cx="685800" cy="603504"/>
           </a:xfrm>
           <a:prstGeom prst="rect">
             <a:avLst/>
@@ -3768,17 +5768,17 @@
               <a:buNone/>
             </a:pPr>
             <a:r>
-              <a:rPr lang="en-US" sz="4800" b="1" dirty="0">
+              <a:rPr lang="en-US" sz="1400" b="1" dirty="0">
                 <a:solidFill>
                   <a:srgbClr val="065A82"/>
                 </a:solidFill>
-                <a:latin typeface="Cambria" pitchFamily="34" charset="0"/>
-                <a:ea typeface="Cambria" pitchFamily="34" charset="-122"/>
-                <a:cs typeface="Cambria" pitchFamily="34" charset="-120"/>
-              </a:rPr>
-              <a:t>0.91</a:t>
-            </a:r>
-            <a:endParaRPr lang="en-US" sz="4800" dirty="0"/>
+                <a:latin typeface="Calibri" pitchFamily="34" charset="0"/>
+                <a:ea typeface="Calibri" pitchFamily="34" charset="-122"/>
+                <a:cs typeface="Calibri" pitchFamily="34" charset="-120"/>
+              </a:rPr>
+              <a:t>2–3</a:t>
+            </a:r>
+            <a:endParaRPr lang="en-US" sz="1400" dirty="0"/>
           </a:p>
         </p:txBody>
       </p:sp>
@@ -3790,8 +5790,8 @@
         </p:nvSpPr>
         <p:spPr>
           <a:xfrm>
-            <a:off x="731520" y="2011680"/>
-            <a:ext cx="3566160" cy="640080"/>
+            <a:off x="1325880" y="1097280"/>
+            <a:ext cx="3063240" cy="603504"/>
           </a:xfrm>
           <a:prstGeom prst="rect">
             <a:avLst/>
@@ -3803,11 +5803,28 @@
           <a:bodyPr wrap="square" lIns="0" tIns="0" rIns="0" bIns="0" rtlCol="0" anchor="ctr"/>
           <a:lstStyle/>
           <a:p>
-            <a:pPr algn="ctr" indent="0" marL="0">
+            <a:pPr indent="0" marL="0">
               <a:buNone/>
             </a:pPr>
             <a:r>
-              <a:rPr lang="en-US" sz="1300" dirty="0">
+              <a:rPr lang="en-US" sz="1250" b="1" dirty="0">
+                <a:solidFill>
+                  <a:srgbClr val="21295C"/>
+                </a:solidFill>
+                <a:latin typeface="Calibri" pitchFamily="34" charset="0"/>
+                <a:ea typeface="Calibri" pitchFamily="34" charset="-122"/>
+                <a:cs typeface="Calibri" pitchFamily="34" charset="-120"/>
+              </a:rPr>
+              <a:t>Reports + benchmark</a:t>
+            </a:r>
+            <a:endParaRPr lang="en-US" sz="1250" dirty="0"/>
+          </a:p>
+          <a:p>
+            <a:pPr indent="0" marL="0">
+              <a:buNone/>
+            </a:pPr>
+            <a:r>
+              <a:rPr lang="en-US" sz="1050" dirty="0">
                 <a:solidFill>
                   <a:srgbClr val="1F2937"/>
                 </a:solidFill>
@@ -3815,111 +5832,26 @@
                 <a:ea typeface="Calibri" pitchFamily="34" charset="-122"/>
                 <a:cs typeface="Calibri" pitchFamily="34" charset="-120"/>
               </a:rPr>
-              <a:t>Image check with MedSAM masks, breast + thyroid (word scores: 0.25–0.62)</a:t>
-            </a:r>
-            <a:endParaRPr lang="en-US" sz="1300" dirty="0"/>
-          </a:p>
-        </p:txBody>
-      </p:sp>
-      <p:sp>
-        <p:nvSpPr>
-          <p:cNvPr id="6" name="Text 4"/>
-          <p:cNvSpPr txBox="1"/>
-          <p:nvPr/>
-        </p:nvSpPr>
-        <p:spPr>
-          <a:xfrm>
-            <a:off x="731520" y="2743200"/>
-            <a:ext cx="3566160" cy="1645920"/>
-          </a:xfrm>
-          <a:prstGeom prst="rect">
-            <a:avLst/>
-          </a:prstGeom>
-          <a:noFill/>
-          <a:ln/>
-        </p:spPr>
-        <p:txBody>
-          <a:bodyPr wrap="square" lIns="0" tIns="0" rIns="0" bIns="0" rtlCol="0" anchor="t"/>
-          <a:lstStyle/>
-          <a:p>
-            <a:pPr marL="342900" indent="-342900">
-              <a:spcAft>
-                <a:spcPts val="500"/>
-              </a:spcAft>
-              <a:buSzPct val="100000"/>
-              <a:buChar char="•"/>
-            </a:pPr>
-            <a:r>
-              <a:rPr lang="en-US" sz="1300" dirty="0">
-                <a:solidFill>
-                  <a:srgbClr val="1F2937"/>
-                </a:solidFill>
-                <a:latin typeface="Calibri" pitchFamily="34" charset="0"/>
-                <a:ea typeface="Calibri" pitchFamily="34" charset="-122"/>
-                <a:cs typeface="Calibri" pitchFamily="34" charset="-120"/>
-              </a:rPr>
-              <a:t>Easy setup: the lesion box was handed to the model and errors were big</a:t>
-            </a:r>
-            <a:endParaRPr lang="en-US" sz="1300" dirty="0"/>
-          </a:p>
-          <a:p>
-            <a:pPr marL="342900" indent="-342900">
-              <a:spcAft>
-                <a:spcPts val="500"/>
-              </a:spcAft>
-              <a:buSzPct val="100000"/>
-              <a:buChar char="•"/>
-            </a:pPr>
-            <a:r>
-              <a:rPr lang="en-US" sz="1300" dirty="0">
-                <a:solidFill>
-                  <a:srgbClr val="1F2937"/>
-                </a:solidFill>
-                <a:latin typeface="Calibri" pitchFamily="34" charset="0"/>
-                <a:ea typeface="Calibri" pitchFamily="34" charset="-122"/>
-                <a:cs typeface="Calibri" pitchFamily="34" charset="-120"/>
-              </a:rPr>
-              <a:t>Fetal head fails (0.46, 0.50): skull outlined differently</a:t>
-            </a:r>
-            <a:endParaRPr lang="en-US" sz="1300" dirty="0"/>
-          </a:p>
-          <a:p>
-            <a:pPr marL="342900" indent="-342900">
-              <a:spcAft>
-                <a:spcPts val="500"/>
-              </a:spcAft>
-              <a:buSzPct val="100000"/>
-              <a:buChar char="•"/>
-            </a:pPr>
-            <a:r>
-              <a:rPr lang="en-US" sz="1300" dirty="0">
-                <a:solidFill>
-                  <a:srgbClr val="1F2937"/>
-                </a:solidFill>
-                <a:latin typeface="Calibri" pitchFamily="34" charset="0"/>
-                <a:ea typeface="Calibri" pitchFamily="34" charset="-122"/>
-                <a:cs typeface="Calibri" pitchFamily="34" charset="-120"/>
-              </a:rPr>
-              <a:t>Marks correct reports down (mean 0.68)</a:t>
-            </a:r>
-            <a:endParaRPr lang="en-US" sz="1300" dirty="0"/>
-          </a:p>
-        </p:txBody>
-      </p:sp>
-      <p:sp>
-        <p:nvSpPr>
-          <p:cNvPr id="7" name="Shape 5"/>
+              <a:t>16,562 true reports; 27,193 candidates (13,396 planted mistakes)</a:t>
+            </a:r>
+            <a:endParaRPr lang="en-US" sz="1250" dirty="0"/>
+          </a:p>
+        </p:txBody>
+      </p:sp>
+      <p:sp>
+        <p:nvSpPr>
+          <p:cNvPr id="6" name="Shape 4"/>
           <p:cNvSpPr/>
           <p:nvPr/>
         </p:nvSpPr>
         <p:spPr>
           <a:xfrm>
-            <a:off x="4663440" y="1097280"/>
-            <a:ext cx="3931920" cy="3383280"/>
+            <a:off x="548640" y="1773936"/>
+            <a:ext cx="3931920" cy="603504"/>
           </a:xfrm>
           <a:prstGeom prst="roundRect">
             <a:avLst>
-              <a:gd name="adj" fmla="val 2162"/>
+              <a:gd name="adj" fmla="val 12121"/>
             </a:avLst>
           </a:prstGeom>
           <a:solidFill>
@@ -3935,14 +5867,53 @@
       </p:sp>
       <p:sp>
         <p:nvSpPr>
+          <p:cNvPr id="7" name="Text 5"/>
+          <p:cNvSpPr txBox="1"/>
+          <p:nvPr/>
+        </p:nvSpPr>
+        <p:spPr>
+          <a:xfrm>
+            <a:off x="621792" y="1773936"/>
+            <a:ext cx="685800" cy="603504"/>
+          </a:xfrm>
+          <a:prstGeom prst="rect">
+            <a:avLst/>
+          </a:prstGeom>
+          <a:noFill/>
+          <a:ln/>
+        </p:spPr>
+        <p:txBody>
+          <a:bodyPr wrap="square" lIns="0" tIns="0" rIns="0" bIns="0" rtlCol="0" anchor="ctr"/>
+          <a:lstStyle/>
+          <a:p>
+            <a:pPr algn="ctr" indent="0" marL="0">
+              <a:buNone/>
+            </a:pPr>
+            <a:r>
+              <a:rPr lang="en-US" sz="1400" b="1" dirty="0">
+                <a:solidFill>
+                  <a:srgbClr val="065A82"/>
+                </a:solidFill>
+                <a:latin typeface="Calibri" pitchFamily="34" charset="0"/>
+                <a:ea typeface="Calibri" pitchFamily="34" charset="-122"/>
+                <a:cs typeface="Calibri" pitchFamily="34" charset="-120"/>
+              </a:rPr>
+              <a:t>4–5</a:t>
+            </a:r>
+            <a:endParaRPr lang="en-US" sz="1400" dirty="0"/>
+          </a:p>
+        </p:txBody>
+      </p:sp>
+      <p:sp>
+        <p:nvSpPr>
           <p:cNvPr id="8" name="Text 6"/>
           <p:cNvSpPr txBox="1"/>
           <p:nvPr/>
         </p:nvSpPr>
         <p:spPr>
           <a:xfrm>
-            <a:off x="4846320" y="1188720"/>
-            <a:ext cx="3566160" cy="640080"/>
+            <a:off x="1325880" y="1773936"/>
+            <a:ext cx="3063240" cy="603504"/>
           </a:xfrm>
           <a:prstGeom prst="rect">
             <a:avLst/>
@@ -3958,7 +5929,7 @@
               <a:buNone/>
             </a:pPr>
             <a:r>
-              <a:rPr lang="en-US" sz="1500" b="1" dirty="0">
+              <a:rPr lang="en-US" sz="1250" b="1" dirty="0">
                 <a:solidFill>
                   <a:srgbClr val="21295C"/>
                 </a:solidFill>
@@ -3966,22 +5937,66 @@
                 <a:ea typeface="Calibri" pitchFamily="34" charset="-122"/>
                 <a:cs typeface="Calibri" pitchFamily="34" charset="-120"/>
               </a:rPr>
-              <a:t>Real AI writers (Qwen, MedGemma) and real doctor text</a:t>
-            </a:r>
-            <a:endParaRPr lang="en-US" sz="1500" dirty="0"/>
-          </a:p>
-        </p:txBody>
-      </p:sp>
-      <p:sp>
-        <p:nvSpPr>
-          <p:cNvPr id="9" name="Text 7"/>
+              <a:t>Word-overlap scorers</a:t>
+            </a:r>
+            <a:endParaRPr lang="en-US" sz="1250" dirty="0"/>
+          </a:p>
+          <a:p>
+            <a:pPr indent="0" marL="0">
+              <a:buNone/>
+            </a:pPr>
+            <a:r>
+              <a:rPr lang="en-US" sz="1050" dirty="0">
+                <a:solidFill>
+                  <a:srgbClr val="1F2937"/>
+                </a:solidFill>
+                <a:latin typeface="Calibri" pitchFamily="34" charset="0"/>
+                <a:ea typeface="Calibri" pitchFamily="34" charset="-122"/>
+                <a:cs typeface="Calibri" pitchFamily="34" charset="-120"/>
+              </a:rPr>
+              <a:t>BLEU, ROUGE-L, chrF, BERTScore, RaTEScore; edit-size artefact found and fixed</a:t>
+            </a:r>
+            <a:endParaRPr lang="en-US" sz="1250" dirty="0"/>
+          </a:p>
+        </p:txBody>
+      </p:sp>
+      <p:sp>
+        <p:nvSpPr>
+          <p:cNvPr id="9" name="Shape 7"/>
+          <p:cNvSpPr/>
+          <p:nvPr/>
+        </p:nvSpPr>
+        <p:spPr>
+          <a:xfrm>
+            <a:off x="548640" y="2450592"/>
+            <a:ext cx="3931920" cy="603504"/>
+          </a:xfrm>
+          <a:prstGeom prst="roundRect">
+            <a:avLst>
+              <a:gd name="adj" fmla="val 12121"/>
+            </a:avLst>
+          </a:prstGeom>
+          <a:solidFill>
+            <a:srgbClr val="E6F1F6"/>
+          </a:solidFill>
+          <a:ln w="12700">
+            <a:solidFill>
+              <a:srgbClr val="E6F1F6"/>
+            </a:solidFill>
+            <a:prstDash val="solid"/>
+          </a:ln>
+        </p:spPr>
+      </p:sp>
+      <p:sp>
+        <p:nvSpPr>
+          <p:cNvPr id="10" name="Text 8"/>
           <p:cNvSpPr txBox="1"/>
           <p:nvPr/>
         </p:nvSpPr>
         <p:spPr>
           <a:xfrm>
-            <a:off x="4846320" y="1920240"/>
-            <a:ext cx="3566160" cy="2468880"/>
+            <a:off x="621792" y="2450592"/>
+            <a:ext cx="685800" cy="603504"/>
           </a:xfrm>
           <a:prstGeom prst="rect">
             <a:avLst/>
@@ -3990,18 +6005,70 @@
           <a:ln/>
         </p:spPr>
         <p:txBody>
-          <a:bodyPr wrap="square" lIns="0" tIns="0" rIns="0" bIns="0" rtlCol="0" anchor="t"/>
-          <a:lstStyle/>
-          <a:p>
-            <a:pPr marL="342900" indent="-342900">
-              <a:spcAft>
-                <a:spcPts val="600"/>
-              </a:spcAft>
-              <a:buSzPct val="100000"/>
-              <a:buChar char="•"/>
-            </a:pPr>
-            <a:r>
-              <a:rPr lang="en-US" sz="1300" dirty="0">
+          <a:bodyPr wrap="square" lIns="0" tIns="0" rIns="0" bIns="0" rtlCol="0" anchor="ctr"/>
+          <a:lstStyle/>
+          <a:p>
+            <a:pPr algn="ctr" indent="0" marL="0">
+              <a:buNone/>
+            </a:pPr>
+            <a:r>
+              <a:rPr lang="en-US" sz="1400" b="1" dirty="0">
+                <a:solidFill>
+                  <a:srgbClr val="065A82"/>
+                </a:solidFill>
+                <a:latin typeface="Calibri" pitchFamily="34" charset="0"/>
+                <a:ea typeface="Calibri" pitchFamily="34" charset="-122"/>
+                <a:cs typeface="Calibri" pitchFamily="34" charset="-120"/>
+              </a:rPr>
+              <a:t>6</a:t>
+            </a:r>
+            <a:endParaRPr lang="en-US" sz="1400" dirty="0"/>
+          </a:p>
+        </p:txBody>
+      </p:sp>
+      <p:sp>
+        <p:nvSpPr>
+          <p:cNvPr id="11" name="Text 9"/>
+          <p:cNvSpPr txBox="1"/>
+          <p:nvPr/>
+        </p:nvSpPr>
+        <p:spPr>
+          <a:xfrm>
+            <a:off x="1325880" y="2450592"/>
+            <a:ext cx="3063240" cy="603504"/>
+          </a:xfrm>
+          <a:prstGeom prst="rect">
+            <a:avLst/>
+          </a:prstGeom>
+          <a:noFill/>
+          <a:ln/>
+        </p:spPr>
+        <p:txBody>
+          <a:bodyPr wrap="square" lIns="0" tIns="0" rIns="0" bIns="0" rtlCol="0" anchor="ctr"/>
+          <a:lstStyle/>
+          <a:p>
+            <a:pPr indent="0" marL="0">
+              <a:buNone/>
+            </a:pPr>
+            <a:r>
+              <a:rPr lang="en-US" sz="1250" b="1" dirty="0">
+                <a:solidFill>
+                  <a:srgbClr val="21295C"/>
+                </a:solidFill>
+                <a:latin typeface="Calibri" pitchFamily="34" charset="0"/>
+                <a:ea typeface="Calibri" pitchFamily="34" charset="-122"/>
+                <a:cs typeface="Calibri" pitchFamily="34" charset="-120"/>
+              </a:rPr>
+              <a:t>Fact checker</a:t>
+            </a:r>
+            <a:endParaRPr lang="en-US" sz="1250" dirty="0"/>
+          </a:p>
+          <a:p>
+            <a:pPr indent="0" marL="0">
+              <a:buNone/>
+            </a:pPr>
+            <a:r>
+              <a:rPr lang="en-US" sz="1050" dirty="0">
                 <a:solidFill>
                   <a:srgbClr val="1F2937"/>
                 </a:solidFill>
@@ -4009,20 +6076,121 @@
                 <a:ea typeface="Calibri" pitchFamily="34" charset="-122"/>
                 <a:cs typeface="Calibri" pitchFamily="34" charset="-120"/>
               </a:rPr>
-              <a:t>Small open writers get BI-RADS, side and pathology right only occasionally</a:t>
-            </a:r>
-            <a:endParaRPr lang="en-US" sz="1300" dirty="0"/>
-          </a:p>
-          <a:p>
-            <a:pPr marL="342900" indent="-342900">
-              <a:spcAft>
-                <a:spcPts val="600"/>
-              </a:spcAft>
-              <a:buSzPct val="100000"/>
-              <a:buChar char="•"/>
-            </a:pPr>
-            <a:r>
-              <a:rPr lang="en-US" sz="1300" dirty="0">
+              <a:t>finding_f1 reads facts out of the text</a:t>
+            </a:r>
+            <a:endParaRPr lang="en-US" sz="1250" dirty="0"/>
+          </a:p>
+        </p:txBody>
+      </p:sp>
+      <p:sp>
+        <p:nvSpPr>
+          <p:cNvPr id="12" name="Shape 10"/>
+          <p:cNvSpPr/>
+          <p:nvPr/>
+        </p:nvSpPr>
+        <p:spPr>
+          <a:xfrm>
+            <a:off x="548640" y="3127248"/>
+            <a:ext cx="3931920" cy="603504"/>
+          </a:xfrm>
+          <a:prstGeom prst="roundRect">
+            <a:avLst>
+              <a:gd name="adj" fmla="val 12121"/>
+            </a:avLst>
+          </a:prstGeom>
+          <a:solidFill>
+            <a:srgbClr val="E6F1F6"/>
+          </a:solidFill>
+          <a:ln w="12700">
+            <a:solidFill>
+              <a:srgbClr val="E6F1F6"/>
+            </a:solidFill>
+            <a:prstDash val="solid"/>
+          </a:ln>
+        </p:spPr>
+      </p:sp>
+      <p:sp>
+        <p:nvSpPr>
+          <p:cNvPr id="13" name="Text 11"/>
+          <p:cNvSpPr txBox="1"/>
+          <p:nvPr/>
+        </p:nvSpPr>
+        <p:spPr>
+          <a:xfrm>
+            <a:off x="621792" y="3127248"/>
+            <a:ext cx="685800" cy="603504"/>
+          </a:xfrm>
+          <a:prstGeom prst="rect">
+            <a:avLst/>
+          </a:prstGeom>
+          <a:noFill/>
+          <a:ln/>
+        </p:spPr>
+        <p:txBody>
+          <a:bodyPr wrap="square" lIns="0" tIns="0" rIns="0" bIns="0" rtlCol="0" anchor="ctr"/>
+          <a:lstStyle/>
+          <a:p>
+            <a:pPr algn="ctr" indent="0" marL="0">
+              <a:buNone/>
+            </a:pPr>
+            <a:r>
+              <a:rPr lang="en-US" sz="1400" b="1" dirty="0">
+                <a:solidFill>
+                  <a:srgbClr val="065A82"/>
+                </a:solidFill>
+                <a:latin typeface="Calibri" pitchFamily="34" charset="0"/>
+                <a:ea typeface="Calibri" pitchFamily="34" charset="-122"/>
+                <a:cs typeface="Calibri" pitchFamily="34" charset="-120"/>
+              </a:rPr>
+              <a:t>7</a:t>
+            </a:r>
+            <a:endParaRPr lang="en-US" sz="1400" dirty="0"/>
+          </a:p>
+        </p:txBody>
+      </p:sp>
+      <p:sp>
+        <p:nvSpPr>
+          <p:cNvPr id="14" name="Text 12"/>
+          <p:cNvSpPr txBox="1"/>
+          <p:nvPr/>
+        </p:nvSpPr>
+        <p:spPr>
+          <a:xfrm>
+            <a:off x="1325880" y="3127248"/>
+            <a:ext cx="3063240" cy="603504"/>
+          </a:xfrm>
+          <a:prstGeom prst="rect">
+            <a:avLst/>
+          </a:prstGeom>
+          <a:noFill/>
+          <a:ln/>
+        </p:spPr>
+        <p:txBody>
+          <a:bodyPr wrap="square" lIns="0" tIns="0" rIns="0" bIns="0" rtlCol="0" anchor="ctr"/>
+          <a:lstStyle/>
+          <a:p>
+            <a:pPr indent="0" marL="0">
+              <a:buNone/>
+            </a:pPr>
+            <a:r>
+              <a:rPr lang="en-US" sz="1250" b="1" dirty="0">
+                <a:solidFill>
+                  <a:srgbClr val="21295C"/>
+                </a:solidFill>
+                <a:latin typeface="Calibri" pitchFamily="34" charset="0"/>
+                <a:ea typeface="Calibri" pitchFamily="34" charset="-122"/>
+                <a:cs typeface="Calibri" pitchFamily="34" charset="-120"/>
+              </a:rPr>
+              <a:t>AI judge</a:t>
+            </a:r>
+            <a:endParaRPr lang="en-US" sz="1250" dirty="0"/>
+          </a:p>
+          <a:p>
+            <a:pPr indent="0" marL="0">
+              <a:buNone/>
+            </a:pPr>
+            <a:r>
+              <a:rPr lang="en-US" sz="1050" dirty="0">
                 <a:solidFill>
                   <a:srgbClr val="1F2937"/>
                 </a:solidFill>
@@ -4030,20 +6198,121 @@
                 <a:ea typeface="Calibri" pitchFamily="34" charset="-122"/>
                 <a:cs typeface="Calibri" pitchFamily="34" charset="-120"/>
               </a:rPr>
-              <a:t>Scorers disagree on which writer is better, so no trustworthy ranking</a:t>
-            </a:r>
-            <a:endParaRPr lang="en-US" sz="1300" dirty="0"/>
-          </a:p>
-          <a:p>
-            <a:pPr marL="342900" indent="-342900">
-              <a:spcAft>
-                <a:spcPts val="600"/>
-              </a:spcAft>
-              <a:buSzPct val="100000"/>
-              <a:buChar char="•"/>
-            </a:pPr>
-            <a:r>
-              <a:rPr lang="en-US" sz="1300" dirty="0">
+              <a:t>Gemma-2-9B checks sentence by sentence</a:t>
+            </a:r>
+            <a:endParaRPr lang="en-US" sz="1250" dirty="0"/>
+          </a:p>
+        </p:txBody>
+      </p:sp>
+      <p:sp>
+        <p:nvSpPr>
+          <p:cNvPr id="15" name="Shape 13"/>
+          <p:cNvSpPr/>
+          <p:nvPr/>
+        </p:nvSpPr>
+        <p:spPr>
+          <a:xfrm>
+            <a:off x="548640" y="3803904"/>
+            <a:ext cx="3931920" cy="603504"/>
+          </a:xfrm>
+          <a:prstGeom prst="roundRect">
+            <a:avLst>
+              <a:gd name="adj" fmla="val 12121"/>
+            </a:avLst>
+          </a:prstGeom>
+          <a:solidFill>
+            <a:srgbClr val="E6F1F6"/>
+          </a:solidFill>
+          <a:ln w="12700">
+            <a:solidFill>
+              <a:srgbClr val="E6F1F6"/>
+            </a:solidFill>
+            <a:prstDash val="solid"/>
+          </a:ln>
+        </p:spPr>
+      </p:sp>
+      <p:sp>
+        <p:nvSpPr>
+          <p:cNvPr id="16" name="Text 14"/>
+          <p:cNvSpPr txBox="1"/>
+          <p:nvPr/>
+        </p:nvSpPr>
+        <p:spPr>
+          <a:xfrm>
+            <a:off x="621792" y="3803904"/>
+            <a:ext cx="685800" cy="603504"/>
+          </a:xfrm>
+          <a:prstGeom prst="rect">
+            <a:avLst/>
+          </a:prstGeom>
+          <a:noFill/>
+          <a:ln/>
+        </p:spPr>
+        <p:txBody>
+          <a:bodyPr wrap="square" lIns="0" tIns="0" rIns="0" bIns="0" rtlCol="0" anchor="ctr"/>
+          <a:lstStyle/>
+          <a:p>
+            <a:pPr algn="ctr" indent="0" marL="0">
+              <a:buNone/>
+            </a:pPr>
+            <a:r>
+              <a:rPr lang="en-US" sz="1400" b="1" dirty="0">
+                <a:solidFill>
+                  <a:srgbClr val="065A82"/>
+                </a:solidFill>
+                <a:latin typeface="Calibri" pitchFamily="34" charset="0"/>
+                <a:ea typeface="Calibri" pitchFamily="34" charset="-122"/>
+                <a:cs typeface="Calibri" pitchFamily="34" charset="-120"/>
+              </a:rPr>
+              <a:t>8</a:t>
+            </a:r>
+            <a:endParaRPr lang="en-US" sz="1400" dirty="0"/>
+          </a:p>
+        </p:txBody>
+      </p:sp>
+      <p:sp>
+        <p:nvSpPr>
+          <p:cNvPr id="17" name="Text 15"/>
+          <p:cNvSpPr txBox="1"/>
+          <p:nvPr/>
+        </p:nvSpPr>
+        <p:spPr>
+          <a:xfrm>
+            <a:off x="1325880" y="3803904"/>
+            <a:ext cx="3063240" cy="603504"/>
+          </a:xfrm>
+          <a:prstGeom prst="rect">
+            <a:avLst/>
+          </a:prstGeom>
+          <a:noFill/>
+          <a:ln/>
+        </p:spPr>
+        <p:txBody>
+          <a:bodyPr wrap="square" lIns="0" tIns="0" rIns="0" bIns="0" rtlCol="0" anchor="ctr"/>
+          <a:lstStyle/>
+          <a:p>
+            <a:pPr indent="0" marL="0">
+              <a:buNone/>
+            </a:pPr>
+            <a:r>
+              <a:rPr lang="en-US" sz="1250" b="1" dirty="0">
+                <a:solidFill>
+                  <a:srgbClr val="21295C"/>
+                </a:solidFill>
+                <a:latin typeface="Calibri" pitchFamily="34" charset="0"/>
+                <a:ea typeface="Calibri" pitchFamily="34" charset="-122"/>
+                <a:cs typeface="Calibri" pitchFamily="34" charset="-120"/>
+              </a:rPr>
+              <a:t>Image check</a:t>
+            </a:r>
+            <a:endParaRPr lang="en-US" sz="1250" dirty="0"/>
+          </a:p>
+          <a:p>
+            <a:pPr indent="0" marL="0">
+              <a:buNone/>
+            </a:pPr>
+            <a:r>
+              <a:rPr lang="en-US" sz="1050" dirty="0">
                 <a:solidFill>
                   <a:srgbClr val="1F2937"/>
                 </a:solidFill>
@@ -4051,15 +6320,625 @@
                 <a:ea typeface="Calibri" pitchFamily="34" charset="-122"/>
                 <a:cs typeface="Calibri" pitchFamily="34" charset="-120"/>
               </a:rPr>
-              <a:t>Real conclusions (HiSBreast, 41 test exams): BERTScore at chance (0.43), AI judge best (0.79–0.89)</a:t>
-            </a:r>
-            <a:endParaRPr lang="en-US" sz="1300" dirty="0"/>
-          </a:p>
-        </p:txBody>
-      </p:sp>
-      <p:sp>
-        <p:nvSpPr>
-          <p:cNvPr id="10" name="Text 8"/>
+              <a:t>size and position checked against true masks</a:t>
+            </a:r>
+            <a:endParaRPr lang="en-US" sz="1250" dirty="0"/>
+          </a:p>
+        </p:txBody>
+      </p:sp>
+      <p:sp>
+        <p:nvSpPr>
+          <p:cNvPr id="18" name="Shape 16"/>
+          <p:cNvSpPr/>
+          <p:nvPr/>
+        </p:nvSpPr>
+        <p:spPr>
+          <a:xfrm>
+            <a:off x="4663440" y="1097280"/>
+            <a:ext cx="3931920" cy="603504"/>
+          </a:xfrm>
+          <a:prstGeom prst="roundRect">
+            <a:avLst>
+              <a:gd name="adj" fmla="val 12121"/>
+            </a:avLst>
+          </a:prstGeom>
+          <a:solidFill>
+            <a:srgbClr val="E6F1F6"/>
+          </a:solidFill>
+          <a:ln w="12700">
+            <a:solidFill>
+              <a:srgbClr val="E6F1F6"/>
+            </a:solidFill>
+            <a:prstDash val="solid"/>
+          </a:ln>
+        </p:spPr>
+      </p:sp>
+      <p:sp>
+        <p:nvSpPr>
+          <p:cNvPr id="19" name="Text 17"/>
+          <p:cNvSpPr txBox="1"/>
+          <p:nvPr/>
+        </p:nvSpPr>
+        <p:spPr>
+          <a:xfrm>
+            <a:off x="4736592" y="1097280"/>
+            <a:ext cx="685800" cy="603504"/>
+          </a:xfrm>
+          <a:prstGeom prst="rect">
+            <a:avLst/>
+          </a:prstGeom>
+          <a:noFill/>
+          <a:ln/>
+        </p:spPr>
+        <p:txBody>
+          <a:bodyPr wrap="square" lIns="0" tIns="0" rIns="0" bIns="0" rtlCol="0" anchor="ctr"/>
+          <a:lstStyle/>
+          <a:p>
+            <a:pPr algn="ctr" indent="0" marL="0">
+              <a:buNone/>
+            </a:pPr>
+            <a:r>
+              <a:rPr lang="en-US" sz="1400" b="1" dirty="0">
+                <a:solidFill>
+                  <a:srgbClr val="065A82"/>
+                </a:solidFill>
+                <a:latin typeface="Calibri" pitchFamily="34" charset="0"/>
+                <a:ea typeface="Calibri" pitchFamily="34" charset="-122"/>
+                <a:cs typeface="Calibri" pitchFamily="34" charset="-120"/>
+              </a:rPr>
+              <a:t>10</a:t>
+            </a:r>
+            <a:endParaRPr lang="en-US" sz="1400" dirty="0"/>
+          </a:p>
+        </p:txBody>
+      </p:sp>
+      <p:sp>
+        <p:nvSpPr>
+          <p:cNvPr id="20" name="Text 18"/>
+          <p:cNvSpPr txBox="1"/>
+          <p:nvPr/>
+        </p:nvSpPr>
+        <p:spPr>
+          <a:xfrm>
+            <a:off x="5440680" y="1097280"/>
+            <a:ext cx="3063240" cy="603504"/>
+          </a:xfrm>
+          <a:prstGeom prst="rect">
+            <a:avLst/>
+          </a:prstGeom>
+          <a:noFill/>
+          <a:ln/>
+        </p:spPr>
+        <p:txBody>
+          <a:bodyPr wrap="square" lIns="0" tIns="0" rIns="0" bIns="0" rtlCol="0" anchor="ctr"/>
+          <a:lstStyle/>
+          <a:p>
+            <a:pPr indent="0" marL="0">
+              <a:buNone/>
+            </a:pPr>
+            <a:r>
+              <a:rPr lang="en-US" sz="1250" b="1" dirty="0">
+                <a:solidFill>
+                  <a:srgbClr val="21295C"/>
+                </a:solidFill>
+                <a:latin typeface="Calibri" pitchFamily="34" charset="0"/>
+                <a:ea typeface="Calibri" pitchFamily="34" charset="-122"/>
+                <a:cs typeface="Calibri" pitchFamily="34" charset="-120"/>
+              </a:rPr>
+              <a:t>Locks and freeze</a:t>
+            </a:r>
+            <a:endParaRPr lang="en-US" sz="1250" dirty="0"/>
+          </a:p>
+          <a:p>
+            <a:pPr indent="0" marL="0">
+              <a:buNone/>
+            </a:pPr>
+            <a:r>
+              <a:rPr lang="en-US" sz="1050" dirty="0">
+                <a:solidFill>
+                  <a:srgbClr val="1F2937"/>
+                </a:solidFill>
+                <a:latin typeface="Calibri" pitchFamily="34" charset="0"/>
+                <a:ea typeface="Calibri" pitchFamily="34" charset="-122"/>
+                <a:cs typeface="Calibri" pitchFamily="34" charset="-120"/>
+              </a:rPr>
+              <a:t>duplicates, dev/val/test split, versions frozen, test results</a:t>
+            </a:r>
+            <a:endParaRPr lang="en-US" sz="1250" dirty="0"/>
+          </a:p>
+        </p:txBody>
+      </p:sp>
+      <p:sp>
+        <p:nvSpPr>
+          <p:cNvPr id="21" name="Shape 19"/>
+          <p:cNvSpPr/>
+          <p:nvPr/>
+        </p:nvSpPr>
+        <p:spPr>
+          <a:xfrm>
+            <a:off x="4663440" y="1773936"/>
+            <a:ext cx="3931920" cy="603504"/>
+          </a:xfrm>
+          <a:prstGeom prst="roundRect">
+            <a:avLst>
+              <a:gd name="adj" fmla="val 12121"/>
+            </a:avLst>
+          </a:prstGeom>
+          <a:solidFill>
+            <a:srgbClr val="E6F1F6"/>
+          </a:solidFill>
+          <a:ln w="12700">
+            <a:solidFill>
+              <a:srgbClr val="E6F1F6"/>
+            </a:solidFill>
+            <a:prstDash val="solid"/>
+          </a:ln>
+        </p:spPr>
+      </p:sp>
+      <p:sp>
+        <p:nvSpPr>
+          <p:cNvPr id="22" name="Text 20"/>
+          <p:cNvSpPr txBox="1"/>
+          <p:nvPr/>
+        </p:nvSpPr>
+        <p:spPr>
+          <a:xfrm>
+            <a:off x="4736592" y="1773936"/>
+            <a:ext cx="685800" cy="603504"/>
+          </a:xfrm>
+          <a:prstGeom prst="rect">
+            <a:avLst/>
+          </a:prstGeom>
+          <a:noFill/>
+          <a:ln/>
+        </p:spPr>
+        <p:txBody>
+          <a:bodyPr wrap="square" lIns="0" tIns="0" rIns="0" bIns="0" rtlCol="0" anchor="ctr"/>
+          <a:lstStyle/>
+          <a:p>
+            <a:pPr algn="ctr" indent="0" marL="0">
+              <a:buNone/>
+            </a:pPr>
+            <a:r>
+              <a:rPr lang="en-US" sz="1400" b="1" dirty="0">
+                <a:solidFill>
+                  <a:srgbClr val="065A82"/>
+                </a:solidFill>
+                <a:latin typeface="Calibri" pitchFamily="34" charset="0"/>
+                <a:ea typeface="Calibri" pitchFamily="34" charset="-122"/>
+                <a:cs typeface="Calibri" pitchFamily="34" charset="-120"/>
+              </a:rPr>
+              <a:t>11–14</a:t>
+            </a:r>
+            <a:endParaRPr lang="en-US" sz="1400" dirty="0"/>
+          </a:p>
+        </p:txBody>
+      </p:sp>
+      <p:sp>
+        <p:nvSpPr>
+          <p:cNvPr id="23" name="Text 21"/>
+          <p:cNvSpPr txBox="1"/>
+          <p:nvPr/>
+        </p:nvSpPr>
+        <p:spPr>
+          <a:xfrm>
+            <a:off x="5440680" y="1773936"/>
+            <a:ext cx="3063240" cy="603504"/>
+          </a:xfrm>
+          <a:prstGeom prst="rect">
+            <a:avLst/>
+          </a:prstGeom>
+          <a:noFill/>
+          <a:ln/>
+        </p:spPr>
+        <p:txBody>
+          <a:bodyPr wrap="square" lIns="0" tIns="0" rIns="0" bIns="0" rtlCol="0" anchor="ctr"/>
+          <a:lstStyle/>
+          <a:p>
+            <a:pPr indent="0" marL="0">
+              <a:buNone/>
+            </a:pPr>
+            <a:r>
+              <a:rPr lang="en-US" sz="1250" b="1" dirty="0">
+                <a:solidFill>
+                  <a:srgbClr val="21295C"/>
+                </a:solidFill>
+                <a:latin typeface="Calibri" pitchFamily="34" charset="0"/>
+                <a:ea typeface="Calibri" pitchFamily="34" charset="-122"/>
+                <a:cs typeface="Calibri" pitchFamily="34" charset="-120"/>
+              </a:rPr>
+              <a:t>Real AI writers</a:t>
+            </a:r>
+            <a:endParaRPr lang="en-US" sz="1250" dirty="0"/>
+          </a:p>
+          <a:p>
+            <a:pPr indent="0" marL="0">
+              <a:buNone/>
+            </a:pPr>
+            <a:r>
+              <a:rPr lang="en-US" sz="1050" dirty="0">
+                <a:solidFill>
+                  <a:srgbClr val="1F2937"/>
+                </a:solidFill>
+                <a:latin typeface="Calibri" pitchFamily="34" charset="0"/>
+                <a:ea typeface="Calibri" pitchFamily="34" charset="-122"/>
+                <a:cs typeface="Calibri" pitchFamily="34" charset="-120"/>
+              </a:rPr>
+              <a:t>Qwen2.5-VL and MedGemma reports; bigger judge test</a:t>
+            </a:r>
+            <a:endParaRPr lang="en-US" sz="1250" dirty="0"/>
+          </a:p>
+        </p:txBody>
+      </p:sp>
+      <p:sp>
+        <p:nvSpPr>
+          <p:cNvPr id="24" name="Shape 22"/>
+          <p:cNvSpPr/>
+          <p:nvPr/>
+        </p:nvSpPr>
+        <p:spPr>
+          <a:xfrm>
+            <a:off x="4663440" y="2450592"/>
+            <a:ext cx="3931920" cy="603504"/>
+          </a:xfrm>
+          <a:prstGeom prst="roundRect">
+            <a:avLst>
+              <a:gd name="adj" fmla="val 12121"/>
+            </a:avLst>
+          </a:prstGeom>
+          <a:solidFill>
+            <a:srgbClr val="E6F1F6"/>
+          </a:solidFill>
+          <a:ln w="12700">
+            <a:solidFill>
+              <a:srgbClr val="E6F1F6"/>
+            </a:solidFill>
+            <a:prstDash val="solid"/>
+          </a:ln>
+        </p:spPr>
+      </p:sp>
+      <p:sp>
+        <p:nvSpPr>
+          <p:cNvPr id="25" name="Text 23"/>
+          <p:cNvSpPr txBox="1"/>
+          <p:nvPr/>
+        </p:nvSpPr>
+        <p:spPr>
+          <a:xfrm>
+            <a:off x="4736592" y="2450592"/>
+            <a:ext cx="685800" cy="603504"/>
+          </a:xfrm>
+          <a:prstGeom prst="rect">
+            <a:avLst/>
+          </a:prstGeom>
+          <a:noFill/>
+          <a:ln/>
+        </p:spPr>
+        <p:txBody>
+          <a:bodyPr wrap="square" lIns="0" tIns="0" rIns="0" bIns="0" rtlCol="0" anchor="ctr"/>
+          <a:lstStyle/>
+          <a:p>
+            <a:pPr algn="ctr" indent="0" marL="0">
+              <a:buNone/>
+            </a:pPr>
+            <a:r>
+              <a:rPr lang="en-US" sz="1400" b="1" dirty="0">
+                <a:solidFill>
+                  <a:srgbClr val="065A82"/>
+                </a:solidFill>
+                <a:latin typeface="Calibri" pitchFamily="34" charset="0"/>
+                <a:ea typeface="Calibri" pitchFamily="34" charset="-122"/>
+                <a:cs typeface="Calibri" pitchFamily="34" charset="-120"/>
+              </a:rPr>
+              <a:t>15</a:t>
+            </a:r>
+            <a:endParaRPr lang="en-US" sz="1400" dirty="0"/>
+          </a:p>
+        </p:txBody>
+      </p:sp>
+      <p:sp>
+        <p:nvSpPr>
+          <p:cNvPr id="26" name="Text 24"/>
+          <p:cNvSpPr txBox="1"/>
+          <p:nvPr/>
+        </p:nvSpPr>
+        <p:spPr>
+          <a:xfrm>
+            <a:off x="5440680" y="2450592"/>
+            <a:ext cx="3063240" cy="603504"/>
+          </a:xfrm>
+          <a:prstGeom prst="rect">
+            <a:avLst/>
+          </a:prstGeom>
+          <a:noFill/>
+          <a:ln/>
+        </p:spPr>
+        <p:txBody>
+          <a:bodyPr wrap="square" lIns="0" tIns="0" rIns="0" bIns="0" rtlCol="0" anchor="ctr"/>
+          <a:lstStyle/>
+          <a:p>
+            <a:pPr indent="0" marL="0">
+              <a:buNone/>
+            </a:pPr>
+            <a:r>
+              <a:rPr lang="en-US" sz="1250" b="1" dirty="0">
+                <a:solidFill>
+                  <a:srgbClr val="21295C"/>
+                </a:solidFill>
+                <a:latin typeface="Calibri" pitchFamily="34" charset="0"/>
+                <a:ea typeface="Calibri" pitchFamily="34" charset="-122"/>
+                <a:cs typeface="Calibri" pitchFamily="34" charset="-120"/>
+              </a:rPr>
+              <a:t>Real doctor text</a:t>
+            </a:r>
+            <a:endParaRPr lang="en-US" sz="1250" dirty="0"/>
+          </a:p>
+          <a:p>
+            <a:pPr indent="0" marL="0">
+              <a:buNone/>
+            </a:pPr>
+            <a:r>
+              <a:rPr lang="en-US" sz="1050" dirty="0">
+                <a:solidFill>
+                  <a:srgbClr val="1F2937"/>
+                </a:solidFill>
+                <a:latin typeface="Calibri" pitchFamily="34" charset="0"/>
+                <a:ea typeface="Calibri" pitchFamily="34" charset="-122"/>
+                <a:cs typeface="Calibri" pitchFamily="34" charset="-120"/>
+              </a:rPr>
+              <a:t>HiSBreast, 101 machine-translated exams</a:t>
+            </a:r>
+            <a:endParaRPr lang="en-US" sz="1250" dirty="0"/>
+          </a:p>
+        </p:txBody>
+      </p:sp>
+      <p:sp>
+        <p:nvSpPr>
+          <p:cNvPr id="27" name="Shape 25"/>
+          <p:cNvSpPr/>
+          <p:nvPr/>
+        </p:nvSpPr>
+        <p:spPr>
+          <a:xfrm>
+            <a:off x="4663440" y="3127248"/>
+            <a:ext cx="3931920" cy="603504"/>
+          </a:xfrm>
+          <a:prstGeom prst="roundRect">
+            <a:avLst>
+              <a:gd name="adj" fmla="val 12121"/>
+            </a:avLst>
+          </a:prstGeom>
+          <a:solidFill>
+            <a:srgbClr val="E6F1F6"/>
+          </a:solidFill>
+          <a:ln w="12700">
+            <a:solidFill>
+              <a:srgbClr val="E6F1F6"/>
+            </a:solidFill>
+            <a:prstDash val="solid"/>
+          </a:ln>
+        </p:spPr>
+      </p:sp>
+      <p:sp>
+        <p:nvSpPr>
+          <p:cNvPr id="28" name="Text 26"/>
+          <p:cNvSpPr txBox="1"/>
+          <p:nvPr/>
+        </p:nvSpPr>
+        <p:spPr>
+          <a:xfrm>
+            <a:off x="4736592" y="3127248"/>
+            <a:ext cx="685800" cy="603504"/>
+          </a:xfrm>
+          <a:prstGeom prst="rect">
+            <a:avLst/>
+          </a:prstGeom>
+          <a:noFill/>
+          <a:ln/>
+        </p:spPr>
+        <p:txBody>
+          <a:bodyPr wrap="square" lIns="0" tIns="0" rIns="0" bIns="0" rtlCol="0" anchor="ctr"/>
+          <a:lstStyle/>
+          <a:p>
+            <a:pPr algn="ctr" indent="0" marL="0">
+              <a:buNone/>
+            </a:pPr>
+            <a:r>
+              <a:rPr lang="en-US" sz="1400" b="1" dirty="0">
+                <a:solidFill>
+                  <a:srgbClr val="065A82"/>
+                </a:solidFill>
+                <a:latin typeface="Calibri" pitchFamily="34" charset="0"/>
+                <a:ea typeface="Calibri" pitchFamily="34" charset="-122"/>
+                <a:cs typeface="Calibri" pitchFamily="34" charset="-120"/>
+              </a:rPr>
+              <a:t>16</a:t>
+            </a:r>
+            <a:endParaRPr lang="en-US" sz="1400" dirty="0"/>
+          </a:p>
+        </p:txBody>
+      </p:sp>
+      <p:sp>
+        <p:nvSpPr>
+          <p:cNvPr id="29" name="Text 27"/>
+          <p:cNvSpPr txBox="1"/>
+          <p:nvPr/>
+        </p:nvSpPr>
+        <p:spPr>
+          <a:xfrm>
+            <a:off x="5440680" y="3127248"/>
+            <a:ext cx="3063240" cy="603504"/>
+          </a:xfrm>
+          <a:prstGeom prst="rect">
+            <a:avLst/>
+          </a:prstGeom>
+          <a:noFill/>
+          <a:ln/>
+        </p:spPr>
+        <p:txBody>
+          <a:bodyPr wrap="square" lIns="0" tIns="0" rIns="0" bIns="0" rtlCol="0" anchor="ctr"/>
+          <a:lstStyle/>
+          <a:p>
+            <a:pPr indent="0" marL="0">
+              <a:buNone/>
+            </a:pPr>
+            <a:r>
+              <a:rPr lang="en-US" sz="1250" b="1" dirty="0">
+                <a:solidFill>
+                  <a:srgbClr val="21295C"/>
+                </a:solidFill>
+                <a:latin typeface="Calibri" pitchFamily="34" charset="0"/>
+                <a:ea typeface="Calibri" pitchFamily="34" charset="-122"/>
+                <a:cs typeface="Calibri" pitchFamily="34" charset="-120"/>
+              </a:rPr>
+              <a:t>Predicted masks</a:t>
+            </a:r>
+            <a:endParaRPr lang="en-US" sz="1250" dirty="0"/>
+          </a:p>
+          <a:p>
+            <a:pPr indent="0" marL="0">
+              <a:buNone/>
+            </a:pPr>
+            <a:r>
+              <a:rPr lang="en-US" sz="1050" dirty="0">
+                <a:solidFill>
+                  <a:srgbClr val="1F2937"/>
+                </a:solidFill>
+                <a:latin typeface="Calibri" pitchFamily="34" charset="0"/>
+                <a:ea typeface="Calibri" pitchFamily="34" charset="-122"/>
+                <a:cs typeface="Calibri" pitchFamily="34" charset="-120"/>
+              </a:rPr>
+              <a:t>MedSAM masks instead of true masks</a:t>
+            </a:r>
+            <a:endParaRPr lang="en-US" sz="1250" dirty="0"/>
+          </a:p>
+        </p:txBody>
+      </p:sp>
+      <p:sp>
+        <p:nvSpPr>
+          <p:cNvPr id="30" name="Shape 28"/>
+          <p:cNvSpPr/>
+          <p:nvPr/>
+        </p:nvSpPr>
+        <p:spPr>
+          <a:xfrm>
+            <a:off x="4663440" y="3803904"/>
+            <a:ext cx="3931920" cy="603504"/>
+          </a:xfrm>
+          <a:prstGeom prst="roundRect">
+            <a:avLst>
+              <a:gd name="adj" fmla="val 12121"/>
+            </a:avLst>
+          </a:prstGeom>
+          <a:solidFill>
+            <a:srgbClr val="E6F1F6"/>
+          </a:solidFill>
+          <a:ln w="12700">
+            <a:solidFill>
+              <a:srgbClr val="E6F1F6"/>
+            </a:solidFill>
+            <a:prstDash val="solid"/>
+          </a:ln>
+        </p:spPr>
+      </p:sp>
+      <p:sp>
+        <p:nvSpPr>
+          <p:cNvPr id="31" name="Text 29"/>
+          <p:cNvSpPr txBox="1"/>
+          <p:nvPr/>
+        </p:nvSpPr>
+        <p:spPr>
+          <a:xfrm>
+            <a:off x="4736592" y="3803904"/>
+            <a:ext cx="685800" cy="603504"/>
+          </a:xfrm>
+          <a:prstGeom prst="rect">
+            <a:avLst/>
+          </a:prstGeom>
+          <a:noFill/>
+          <a:ln/>
+        </p:spPr>
+        <p:txBody>
+          <a:bodyPr wrap="square" lIns="0" tIns="0" rIns="0" bIns="0" rtlCol="0" anchor="ctr"/>
+          <a:lstStyle/>
+          <a:p>
+            <a:pPr algn="ctr" indent="0" marL="0">
+              <a:buNone/>
+            </a:pPr>
+            <a:r>
+              <a:rPr lang="en-US" sz="1400" b="1" dirty="0">
+                <a:solidFill>
+                  <a:srgbClr val="065A82"/>
+                </a:solidFill>
+                <a:latin typeface="Calibri" pitchFamily="34" charset="0"/>
+                <a:ea typeface="Calibri" pitchFamily="34" charset="-122"/>
+                <a:cs typeface="Calibri" pitchFamily="34" charset="-120"/>
+              </a:rPr>
+              <a:t>17</a:t>
+            </a:r>
+            <a:endParaRPr lang="en-US" sz="1400" dirty="0"/>
+          </a:p>
+        </p:txBody>
+      </p:sp>
+      <p:sp>
+        <p:nvSpPr>
+          <p:cNvPr id="32" name="Text 30"/>
+          <p:cNvSpPr txBox="1"/>
+          <p:nvPr/>
+        </p:nvSpPr>
+        <p:spPr>
+          <a:xfrm>
+            <a:off x="5440680" y="3803904"/>
+            <a:ext cx="3063240" cy="603504"/>
+          </a:xfrm>
+          <a:prstGeom prst="rect">
+            <a:avLst/>
+          </a:prstGeom>
+          <a:noFill/>
+          <a:ln/>
+        </p:spPr>
+        <p:txBody>
+          <a:bodyPr wrap="square" lIns="0" tIns="0" rIns="0" bIns="0" rtlCol="0" anchor="ctr"/>
+          <a:lstStyle/>
+          <a:p>
+            <a:pPr indent="0" marL="0">
+              <a:buNone/>
+            </a:pPr>
+            <a:r>
+              <a:rPr lang="en-US" sz="1250" b="1" dirty="0">
+                <a:solidFill>
+                  <a:srgbClr val="21295C"/>
+                </a:solidFill>
+                <a:latin typeface="Calibri" pitchFamily="34" charset="0"/>
+                <a:ea typeface="Calibri" pitchFamily="34" charset="-122"/>
+                <a:cs typeface="Calibri" pitchFamily="34" charset="-120"/>
+              </a:rPr>
+              <a:t>Final tables</a:t>
+            </a:r>
+            <a:endParaRPr lang="en-US" sz="1250" dirty="0"/>
+          </a:p>
+          <a:p>
+            <a:pPr indent="0" marL="0">
+              <a:buNone/>
+            </a:pPr>
+            <a:r>
+              <a:rPr lang="en-US" sz="1050" dirty="0">
+                <a:solidFill>
+                  <a:srgbClr val="1F2937"/>
+                </a:solidFill>
+                <a:latin typeface="Calibri" pitchFamily="34" charset="0"/>
+                <a:ea typeface="Calibri" pitchFamily="34" charset="-122"/>
+                <a:cs typeface="Calibri" pitchFamily="34" charset="-120"/>
+              </a:rPr>
+              <a:t>combined results and plain summary</a:t>
+            </a:r>
+            <a:endParaRPr lang="en-US" sz="1250" dirty="0"/>
+          </a:p>
+        </p:txBody>
+      </p:sp>
+      <p:sp>
+        <p:nvSpPr>
+          <p:cNvPr id="33" name="Text 31"/>
           <p:cNvSpPr txBox="1"/>
           <p:nvPr/>
         </p:nvSpPr>
@@ -4090,7 +6969,7 @@
                 <a:ea typeface="Calibri" pitchFamily="34" charset="-122"/>
                 <a:cs typeface="Calibri" pitchFamily="34" charset="-120"/>
               </a:rPr>
-              <a:t>Ultrasound report scorers · plain-language summary · 5/7</a:t>
+              <a:t>Ultrasound report scorers · plain-language summary · 5/9</a:t>
             </a:r>
             <a:endParaRPr lang="en-US" sz="1000" dirty="0"/>
           </a:p>
@@ -4161,74 +7040,38 @@
                 <a:ea typeface="Cambria" pitchFamily="34" charset="-122"/>
                 <a:cs typeface="Cambria" pitchFamily="34" charset="-120"/>
               </a:rPr>
-              <a:t>What failed or turned out wrong</a:t>
+              <a:t>Word-matching scores miss the mistake</a:t>
             </a:r>
             <a:endParaRPr lang="en-US" sz="3000" dirty="0"/>
           </a:p>
         </p:txBody>
       </p:sp>
-      <p:sp>
-        <p:nvSpPr>
-          <p:cNvPr id="3" name="Shape 1"/>
-          <p:cNvSpPr/>
-          <p:nvPr/>
-        </p:nvSpPr>
-        <p:spPr>
-          <a:xfrm>
-            <a:off x="548640" y="1097280"/>
-            <a:ext cx="8046720" cy="585216"/>
-          </a:xfrm>
-          <a:prstGeom prst="roundRect">
-            <a:avLst>
-              <a:gd name="adj" fmla="val 12500"/>
-            </a:avLst>
-          </a:prstGeom>
-          <a:solidFill>
-            <a:srgbClr val="E6F1F6"/>
-          </a:solidFill>
-          <a:ln w="12700">
-            <a:solidFill>
-              <a:srgbClr val="E6F1F6"/>
-            </a:solidFill>
-            <a:prstDash val="solid"/>
-          </a:ln>
-        </p:spPr>
-      </p:sp>
-      <p:sp>
-        <p:nvSpPr>
-          <p:cNvPr id="4" name="Shape 2"/>
-          <p:cNvSpPr/>
-          <p:nvPr/>
-        </p:nvSpPr>
-        <p:spPr>
-          <a:xfrm>
-            <a:off x="685800" y="1225296"/>
-            <a:ext cx="329184" cy="329184"/>
-          </a:xfrm>
-          <a:prstGeom prst="ellipse">
-            <a:avLst/>
-          </a:prstGeom>
-          <a:solidFill>
-            <a:srgbClr val="E8505B"/>
-          </a:solidFill>
-          <a:ln w="12700">
-            <a:solidFill>
-              <a:srgbClr val="E8505B"/>
-            </a:solidFill>
-            <a:prstDash val="solid"/>
-          </a:ln>
-        </p:spPr>
-      </p:sp>
-      <p:sp>
-        <p:nvSpPr>
-          <p:cNvPr id="5" name="Text 3"/>
+      <p:graphicFrame>
+        <p:nvGraphicFramePr>
+          <p:cNvPr id="3" name="Chart 0" descr=""/>
+          <p:cNvGraphicFramePr/>
+          <p:nvPr/>
+        </p:nvGraphicFramePr>
+        <p:xfrm>
+          <a:off x="457200" y="1097280"/>
+          <a:ext cx="4206240" cy="3383280"/>
+        </p:xfrm>
+        <a:graphic xmlns:a="http://schemas.openxmlformats.org/drawingml/2006/main">
+          <a:graphicData uri="http://schemas.openxmlformats.org/drawingml/2006/chart">
+            <c:chart xmlns:c="http://schemas.openxmlformats.org/drawingml/2006/chart" r:id="rId1"/>
+          </a:graphicData>
+        </a:graphic>
+      </p:graphicFrame>
+      <p:sp>
+        <p:nvSpPr>
+          <p:cNvPr id="4" name="Text 1"/>
           <p:cNvSpPr txBox="1"/>
           <p:nvPr/>
         </p:nvSpPr>
         <p:spPr>
           <a:xfrm>
-            <a:off x="685800" y="1225296"/>
-            <a:ext cx="329184" cy="329184"/>
+            <a:off x="4846320" y="1188720"/>
+            <a:ext cx="3840480" cy="3291840"/>
           </a:xfrm>
           <a:prstGeom prst="rect">
             <a:avLst/>
@@ -4237,37 +7080,104 @@
           <a:ln/>
         </p:spPr>
         <p:txBody>
-          <a:bodyPr wrap="square" lIns="0" tIns="0" rIns="0" bIns="0" rtlCol="0" anchor="ctr"/>
-          <a:lstStyle/>
-          <a:p>
-            <a:pPr algn="ctr" indent="0" marL="0">
-              <a:buNone/>
-            </a:pPr>
-            <a:r>
-              <a:rPr lang="en-US" sz="1400" b="1" dirty="0">
-                <a:solidFill>
-                  <a:srgbClr val="FFFFFF"/>
-                </a:solidFill>
-                <a:latin typeface="Calibri" pitchFamily="34" charset="0"/>
-                <a:ea typeface="Calibri" pitchFamily="34" charset="-122"/>
-                <a:cs typeface="Calibri" pitchFamily="34" charset="-120"/>
-              </a:rPr>
-              <a:t>!</a:t>
+          <a:bodyPr wrap="square" lIns="0" tIns="0" rIns="0" bIns="0" rtlCol="0" anchor="t"/>
+          <a:lstStyle/>
+          <a:p>
+            <a:pPr marL="342900" indent="-342900">
+              <a:spcAft>
+                <a:spcPts val="800"/>
+              </a:spcAft>
+              <a:buSzPct val="100000"/>
+              <a:buChar char="•"/>
+            </a:pPr>
+            <a:r>
+              <a:rPr lang="en-US" sz="1400" dirty="0">
+                <a:solidFill>
+                  <a:srgbClr val="1F2937"/>
+                </a:solidFill>
+                <a:latin typeface="Calibri" pitchFamily="34" charset="0"/>
+                <a:ea typeface="Calibri" pitchFamily="34" charset="-122"/>
+                <a:cs typeface="Calibri" pitchFamily="34" charset="-120"/>
+              </a:rPr>
+              <a:t>No cut-off flags most mistakes without also flagging most harmless rewordings</a:t>
             </a:r>
             <a:endParaRPr lang="en-US" sz="1400" dirty="0"/>
           </a:p>
-        </p:txBody>
-      </p:sp>
-      <p:sp>
-        <p:nvSpPr>
-          <p:cNvPr id="6" name="Text 4"/>
+          <a:p>
+            <a:pPr marL="342900" indent="-342900">
+              <a:spcAft>
+                <a:spcPts val="800"/>
+              </a:spcAft>
+              <a:buSzPct val="100000"/>
+              <a:buChar char="•"/>
+            </a:pPr>
+            <a:r>
+              <a:rPr lang="en-US" sz="1400" dirty="0">
+                <a:solidFill>
+                  <a:srgbClr val="1F2937"/>
+                </a:solidFill>
+                <a:latin typeface="Calibri" pitchFamily="34" charset="0"/>
+                <a:ea typeface="Calibri" pitchFamily="34" charset="-122"/>
+                <a:cs typeface="Calibri" pitchFamily="34" charset="-120"/>
+              </a:rPr>
+              <a:t>A lazy "No abnormality." still scores about 0.85 on BERTScore</a:t>
+            </a:r>
+            <a:endParaRPr lang="en-US" sz="1400" dirty="0"/>
+          </a:p>
+          <a:p>
+            <a:pPr marL="342900" indent="-342900">
+              <a:spcAft>
+                <a:spcPts val="800"/>
+              </a:spcAft>
+              <a:buSzPct val="100000"/>
+              <a:buChar char="•"/>
+            </a:pPr>
+            <a:r>
+              <a:rPr lang="en-US" sz="1400" dirty="0">
+                <a:solidFill>
+                  <a:srgbClr val="1F2937"/>
+                </a:solidFill>
+                <a:latin typeface="Calibri" pitchFamily="34" charset="0"/>
+                <a:ea typeface="Calibri" pitchFamily="34" charset="-122"/>
+                <a:cs typeface="Calibri" pitchFamily="34" charset="-120"/>
+              </a:rPr>
+              <a:t>Scores follow how much text changed: a mistake changes 2–4% of words, a rewording 5–60%</a:t>
+            </a:r>
+            <a:endParaRPr lang="en-US" sz="1400" dirty="0"/>
+          </a:p>
+          <a:p>
+            <a:pPr marL="342900" indent="-342900">
+              <a:spcAft>
+                <a:spcPts val="800"/>
+              </a:spcAft>
+              <a:buSzPct val="100000"/>
+              <a:buChar char="•"/>
+            </a:pPr>
+            <a:r>
+              <a:rPr lang="en-US" sz="1400" dirty="0">
+                <a:solidFill>
+                  <a:srgbClr val="1F2937"/>
+                </a:solidFill>
+                <a:latin typeface="Calibri" pitchFamily="34" charset="0"/>
+                <a:ea typeface="Calibri" pitchFamily="34" charset="-122"/>
+                <a:cs typeface="Calibri" pitchFamily="34" charset="-120"/>
+              </a:rPr>
+              <a:t>AI judge (Gemma) does better: 0.89–1.00 vs one-word rewordings, weaker (0.60–0.71) on bigger rewordings, and prompt-sensitive</a:t>
+            </a:r>
+            <a:endParaRPr lang="en-US" sz="1400" dirty="0"/>
+          </a:p>
+        </p:txBody>
+      </p:sp>
+      <p:sp>
+        <p:nvSpPr>
+          <p:cNvPr id="5" name="Text 2"/>
           <p:cNvSpPr txBox="1"/>
           <p:nvPr/>
         </p:nvSpPr>
         <p:spPr>
           <a:xfrm>
-            <a:off x="1143000" y="1097280"/>
-            <a:ext cx="2194560" cy="585216"/>
+            <a:off x="548640" y="4754880"/>
+            <a:ext cx="8046720" cy="228600"/>
           </a:xfrm>
           <a:prstGeom prst="rect">
             <a:avLst/>
@@ -4283,760 +7193,6 @@
               <a:buNone/>
             </a:pPr>
             <a:r>
-              <a:rPr lang="en-US" sz="1400" b="1" dirty="0">
-                <a:solidFill>
-                  <a:srgbClr val="21295C"/>
-                </a:solidFill>
-                <a:latin typeface="Calibri" pitchFamily="34" charset="0"/>
-                <a:ea typeface="Calibri" pitchFamily="34" charset="-122"/>
-                <a:cs typeface="Calibri" pitchFamily="34" charset="-120"/>
-              </a:rPr>
-              <a:t>Retracted headline</a:t>
-            </a:r>
-            <a:endParaRPr lang="en-US" sz="1400" dirty="0"/>
-          </a:p>
-        </p:txBody>
-      </p:sp>
-      <p:sp>
-        <p:nvSpPr>
-          <p:cNvPr id="7" name="Text 5"/>
-          <p:cNvSpPr txBox="1"/>
-          <p:nvPr/>
-        </p:nvSpPr>
-        <p:spPr>
-          <a:xfrm>
-            <a:off x="3383280" y="1097280"/>
-            <a:ext cx="5120640" cy="585216"/>
-          </a:xfrm>
-          <a:prstGeom prst="rect">
-            <a:avLst/>
-          </a:prstGeom>
-          <a:noFill/>
-          <a:ln/>
-        </p:spPr>
-        <p:txBody>
-          <a:bodyPr wrap="square" lIns="0" tIns="0" rIns="0" bIns="0" rtlCol="0" anchor="ctr"/>
-          <a:lstStyle/>
-          <a:p>
-            <a:pPr indent="0" marL="0">
-              <a:buNone/>
-            </a:pPr>
-            <a:r>
-              <a:rPr lang="en-US" sz="1200" dirty="0">
-                <a:solidFill>
-                  <a:srgbClr val="1F2937"/>
-                </a:solidFill>
-                <a:latin typeface="Calibri" pitchFamily="34" charset="0"/>
-                <a:ea typeface="Calibri" pitchFamily="34" charset="-122"/>
-                <a:cs typeface="Calibri" pitchFamily="34" charset="-120"/>
-              </a:rPr>
-              <a:t>"Word scores are worse than chance" was an artefact: our rewordings changed 5–10× more text than our mistakes</a:t>
-            </a:r>
-            <a:endParaRPr lang="en-US" sz="1200" dirty="0"/>
-          </a:p>
-        </p:txBody>
-      </p:sp>
-      <p:sp>
-        <p:nvSpPr>
-          <p:cNvPr id="8" name="Shape 6"/>
-          <p:cNvSpPr/>
-          <p:nvPr/>
-        </p:nvSpPr>
-        <p:spPr>
-          <a:xfrm>
-            <a:off x="548640" y="1773936"/>
-            <a:ext cx="8046720" cy="585216"/>
-          </a:xfrm>
-          <a:prstGeom prst="roundRect">
-            <a:avLst>
-              <a:gd name="adj" fmla="val 12500"/>
-            </a:avLst>
-          </a:prstGeom>
-          <a:solidFill>
-            <a:srgbClr val="E6F1F6"/>
-          </a:solidFill>
-          <a:ln w="12700">
-            <a:solidFill>
-              <a:srgbClr val="E6F1F6"/>
-            </a:solidFill>
-            <a:prstDash val="solid"/>
-          </a:ln>
-        </p:spPr>
-      </p:sp>
-      <p:sp>
-        <p:nvSpPr>
-          <p:cNvPr id="9" name="Shape 7"/>
-          <p:cNvSpPr/>
-          <p:nvPr/>
-        </p:nvSpPr>
-        <p:spPr>
-          <a:xfrm>
-            <a:off x="685800" y="1901952"/>
-            <a:ext cx="329184" cy="329184"/>
-          </a:xfrm>
-          <a:prstGeom prst="ellipse">
-            <a:avLst/>
-          </a:prstGeom>
-          <a:solidFill>
-            <a:srgbClr val="E8505B"/>
-          </a:solidFill>
-          <a:ln w="12700">
-            <a:solidFill>
-              <a:srgbClr val="E8505B"/>
-            </a:solidFill>
-            <a:prstDash val="solid"/>
-          </a:ln>
-        </p:spPr>
-      </p:sp>
-      <p:sp>
-        <p:nvSpPr>
-          <p:cNvPr id="10" name="Text 8"/>
-          <p:cNvSpPr txBox="1"/>
-          <p:nvPr/>
-        </p:nvSpPr>
-        <p:spPr>
-          <a:xfrm>
-            <a:off x="685800" y="1901952"/>
-            <a:ext cx="329184" cy="329184"/>
-          </a:xfrm>
-          <a:prstGeom prst="rect">
-            <a:avLst/>
-          </a:prstGeom>
-          <a:noFill/>
-          <a:ln/>
-        </p:spPr>
-        <p:txBody>
-          <a:bodyPr wrap="square" lIns="0" tIns="0" rIns="0" bIns="0" rtlCol="0" anchor="ctr"/>
-          <a:lstStyle/>
-          <a:p>
-            <a:pPr algn="ctr" indent="0" marL="0">
-              <a:buNone/>
-            </a:pPr>
-            <a:r>
-              <a:rPr lang="en-US" sz="1400" b="1" dirty="0">
-                <a:solidFill>
-                  <a:srgbClr val="FFFFFF"/>
-                </a:solidFill>
-                <a:latin typeface="Calibri" pitchFamily="34" charset="0"/>
-                <a:ea typeface="Calibri" pitchFamily="34" charset="-122"/>
-                <a:cs typeface="Calibri" pitchFamily="34" charset="-120"/>
-              </a:rPr>
-              <a:t>!</a:t>
-            </a:r>
-            <a:endParaRPr lang="en-US" sz="1400" dirty="0"/>
-          </a:p>
-        </p:txBody>
-      </p:sp>
-      <p:sp>
-        <p:nvSpPr>
-          <p:cNvPr id="11" name="Text 9"/>
-          <p:cNvSpPr txBox="1"/>
-          <p:nvPr/>
-        </p:nvSpPr>
-        <p:spPr>
-          <a:xfrm>
-            <a:off x="1143000" y="1773936"/>
-            <a:ext cx="2194560" cy="585216"/>
-          </a:xfrm>
-          <a:prstGeom prst="rect">
-            <a:avLst/>
-          </a:prstGeom>
-          <a:noFill/>
-          <a:ln/>
-        </p:spPr>
-        <p:txBody>
-          <a:bodyPr wrap="square" lIns="0" tIns="0" rIns="0" bIns="0" rtlCol="0" anchor="ctr"/>
-          <a:lstStyle/>
-          <a:p>
-            <a:pPr indent="0" marL="0">
-              <a:buNone/>
-            </a:pPr>
-            <a:r>
-              <a:rPr lang="en-US" sz="1400" b="1" dirty="0">
-                <a:solidFill>
-                  <a:srgbClr val="21295C"/>
-                </a:solidFill>
-                <a:latin typeface="Calibri" pitchFamily="34" charset="0"/>
-                <a:ea typeface="Calibri" pitchFamily="34" charset="-122"/>
-                <a:cs typeface="Calibri" pitchFamily="34" charset="-120"/>
-              </a:rPr>
-              <a:t>Judge number dropped</a:t>
-            </a:r>
-            <a:endParaRPr lang="en-US" sz="1400" dirty="0"/>
-          </a:p>
-        </p:txBody>
-      </p:sp>
-      <p:sp>
-        <p:nvSpPr>
-          <p:cNvPr id="12" name="Text 10"/>
-          <p:cNvSpPr txBox="1"/>
-          <p:nvPr/>
-        </p:nvSpPr>
-        <p:spPr>
-          <a:xfrm>
-            <a:off x="3383280" y="1773936"/>
-            <a:ext cx="5120640" cy="585216"/>
-          </a:xfrm>
-          <a:prstGeom prst="rect">
-            <a:avLst/>
-          </a:prstGeom>
-          <a:noFill/>
-          <a:ln/>
-        </p:spPr>
-        <p:txBody>
-          <a:bodyPr wrap="square" lIns="0" tIns="0" rIns="0" bIns="0" rtlCol="0" anchor="ctr"/>
-          <a:lstStyle/>
-          <a:p>
-            <a:pPr indent="0" marL="0">
-              <a:buNone/>
-            </a:pPr>
-            <a:r>
-              <a:rPr lang="en-US" sz="1200" dirty="0">
-                <a:solidFill>
-                  <a:srgbClr val="1F2937"/>
-                </a:solidFill>
-                <a:latin typeface="Calibri" pitchFamily="34" charset="0"/>
-                <a:ea typeface="Calibri" pitchFamily="34" charset="-122"/>
-                <a:cs typeface="Calibri" pitchFamily="34" charset="-120"/>
-              </a:rPr>
-              <a:t>BrEaST 0.86 on dev became 0.67 on the locked test set</a:t>
-            </a:r>
-            <a:endParaRPr lang="en-US" sz="1200" dirty="0"/>
-          </a:p>
-        </p:txBody>
-      </p:sp>
-      <p:sp>
-        <p:nvSpPr>
-          <p:cNvPr id="13" name="Shape 11"/>
-          <p:cNvSpPr/>
-          <p:nvPr/>
-        </p:nvSpPr>
-        <p:spPr>
-          <a:xfrm>
-            <a:off x="548640" y="2450592"/>
-            <a:ext cx="8046720" cy="585216"/>
-          </a:xfrm>
-          <a:prstGeom prst="roundRect">
-            <a:avLst>
-              <a:gd name="adj" fmla="val 12500"/>
-            </a:avLst>
-          </a:prstGeom>
-          <a:solidFill>
-            <a:srgbClr val="E6F1F6"/>
-          </a:solidFill>
-          <a:ln w="12700">
-            <a:solidFill>
-              <a:srgbClr val="E6F1F6"/>
-            </a:solidFill>
-            <a:prstDash val="solid"/>
-          </a:ln>
-        </p:spPr>
-      </p:sp>
-      <p:sp>
-        <p:nvSpPr>
-          <p:cNvPr id="14" name="Shape 12"/>
-          <p:cNvSpPr/>
-          <p:nvPr/>
-        </p:nvSpPr>
-        <p:spPr>
-          <a:xfrm>
-            <a:off x="685800" y="2578608"/>
-            <a:ext cx="329184" cy="329184"/>
-          </a:xfrm>
-          <a:prstGeom prst="ellipse">
-            <a:avLst/>
-          </a:prstGeom>
-          <a:solidFill>
-            <a:srgbClr val="E8505B"/>
-          </a:solidFill>
-          <a:ln w="12700">
-            <a:solidFill>
-              <a:srgbClr val="E8505B"/>
-            </a:solidFill>
-            <a:prstDash val="solid"/>
-          </a:ln>
-        </p:spPr>
-      </p:sp>
-      <p:sp>
-        <p:nvSpPr>
-          <p:cNvPr id="15" name="Text 13"/>
-          <p:cNvSpPr txBox="1"/>
-          <p:nvPr/>
-        </p:nvSpPr>
-        <p:spPr>
-          <a:xfrm>
-            <a:off x="685800" y="2578608"/>
-            <a:ext cx="329184" cy="329184"/>
-          </a:xfrm>
-          <a:prstGeom prst="rect">
-            <a:avLst/>
-          </a:prstGeom>
-          <a:noFill/>
-          <a:ln/>
-        </p:spPr>
-        <p:txBody>
-          <a:bodyPr wrap="square" lIns="0" tIns="0" rIns="0" bIns="0" rtlCol="0" anchor="ctr"/>
-          <a:lstStyle/>
-          <a:p>
-            <a:pPr algn="ctr" indent="0" marL="0">
-              <a:buNone/>
-            </a:pPr>
-            <a:r>
-              <a:rPr lang="en-US" sz="1400" b="1" dirty="0">
-                <a:solidFill>
-                  <a:srgbClr val="FFFFFF"/>
-                </a:solidFill>
-                <a:latin typeface="Calibri" pitchFamily="34" charset="0"/>
-                <a:ea typeface="Calibri" pitchFamily="34" charset="-122"/>
-                <a:cs typeface="Calibri" pitchFamily="34" charset="-120"/>
-              </a:rPr>
-              <a:t>!</a:t>
-            </a:r>
-            <a:endParaRPr lang="en-US" sz="1400" dirty="0"/>
-          </a:p>
-        </p:txBody>
-      </p:sp>
-      <p:sp>
-        <p:nvSpPr>
-          <p:cNvPr id="16" name="Text 14"/>
-          <p:cNvSpPr txBox="1"/>
-          <p:nvPr/>
-        </p:nvSpPr>
-        <p:spPr>
-          <a:xfrm>
-            <a:off x="1143000" y="2450592"/>
-            <a:ext cx="2194560" cy="585216"/>
-          </a:xfrm>
-          <a:prstGeom prst="rect">
-            <a:avLst/>
-          </a:prstGeom>
-          <a:noFill/>
-          <a:ln/>
-        </p:spPr>
-        <p:txBody>
-          <a:bodyPr wrap="square" lIns="0" tIns="0" rIns="0" bIns="0" rtlCol="0" anchor="ctr"/>
-          <a:lstStyle/>
-          <a:p>
-            <a:pPr indent="0" marL="0">
-              <a:buNone/>
-            </a:pPr>
-            <a:r>
-              <a:rPr lang="en-US" sz="1400" b="1" dirty="0">
-                <a:solidFill>
-                  <a:srgbClr val="21295C"/>
-                </a:solidFill>
-                <a:latin typeface="Calibri" pitchFamily="34" charset="0"/>
-                <a:ea typeface="Calibri" pitchFamily="34" charset="-122"/>
-                <a:cs typeface="Calibri" pitchFamily="34" charset="-120"/>
-              </a:rPr>
-              <a:t>Bugs found and fixed</a:t>
-            </a:r>
-            <a:endParaRPr lang="en-US" sz="1400" dirty="0"/>
-          </a:p>
-        </p:txBody>
-      </p:sp>
-      <p:sp>
-        <p:nvSpPr>
-          <p:cNvPr id="17" name="Text 15"/>
-          <p:cNvSpPr txBox="1"/>
-          <p:nvPr/>
-        </p:nvSpPr>
-        <p:spPr>
-          <a:xfrm>
-            <a:off x="3383280" y="2450592"/>
-            <a:ext cx="5120640" cy="585216"/>
-          </a:xfrm>
-          <a:prstGeom prst="rect">
-            <a:avLst/>
-          </a:prstGeom>
-          <a:noFill/>
-          <a:ln/>
-        </p:spPr>
-        <p:txBody>
-          <a:bodyPr wrap="square" lIns="0" tIns="0" rIns="0" bIns="0" rtlCol="0" anchor="ctr"/>
-          <a:lstStyle/>
-          <a:p>
-            <a:pPr indent="0" marL="0">
-              <a:buNone/>
-            </a:pPr>
-            <a:r>
-              <a:rPr lang="en-US" sz="1200" dirty="0">
-                <a:solidFill>
-                  <a:srgbClr val="1F2937"/>
-                </a:solidFill>
-                <a:latin typeface="Calibri" pitchFamily="34" charset="0"/>
-                <a:ea typeface="Calibri" pitchFamily="34" charset="-122"/>
-                <a:cs typeface="Calibri" pitchFamily="34" charset="-120"/>
-              </a:rPr>
-              <a:t>BUS-BRA "single breast" wording, extractor decimal bug, copied option lists; reruns kept</a:t>
-            </a:r>
-            <a:endParaRPr lang="en-US" sz="1200" dirty="0"/>
-          </a:p>
-        </p:txBody>
-      </p:sp>
-      <p:sp>
-        <p:nvSpPr>
-          <p:cNvPr id="18" name="Shape 16"/>
-          <p:cNvSpPr/>
-          <p:nvPr/>
-        </p:nvSpPr>
-        <p:spPr>
-          <a:xfrm>
-            <a:off x="548640" y="3127248"/>
-            <a:ext cx="8046720" cy="585216"/>
-          </a:xfrm>
-          <a:prstGeom prst="roundRect">
-            <a:avLst>
-              <a:gd name="adj" fmla="val 12500"/>
-            </a:avLst>
-          </a:prstGeom>
-          <a:solidFill>
-            <a:srgbClr val="E6F1F6"/>
-          </a:solidFill>
-          <a:ln w="12700">
-            <a:solidFill>
-              <a:srgbClr val="E6F1F6"/>
-            </a:solidFill>
-            <a:prstDash val="solid"/>
-          </a:ln>
-        </p:spPr>
-      </p:sp>
-      <p:sp>
-        <p:nvSpPr>
-          <p:cNvPr id="19" name="Shape 17"/>
-          <p:cNvSpPr/>
-          <p:nvPr/>
-        </p:nvSpPr>
-        <p:spPr>
-          <a:xfrm>
-            <a:off x="685800" y="3255264"/>
-            <a:ext cx="329184" cy="329184"/>
-          </a:xfrm>
-          <a:prstGeom prst="ellipse">
-            <a:avLst/>
-          </a:prstGeom>
-          <a:solidFill>
-            <a:srgbClr val="E8505B"/>
-          </a:solidFill>
-          <a:ln w="12700">
-            <a:solidFill>
-              <a:srgbClr val="E8505B"/>
-            </a:solidFill>
-            <a:prstDash val="solid"/>
-          </a:ln>
-        </p:spPr>
-      </p:sp>
-      <p:sp>
-        <p:nvSpPr>
-          <p:cNvPr id="20" name="Text 18"/>
-          <p:cNvSpPr txBox="1"/>
-          <p:nvPr/>
-        </p:nvSpPr>
-        <p:spPr>
-          <a:xfrm>
-            <a:off x="685800" y="3255264"/>
-            <a:ext cx="329184" cy="329184"/>
-          </a:xfrm>
-          <a:prstGeom prst="rect">
-            <a:avLst/>
-          </a:prstGeom>
-          <a:noFill/>
-          <a:ln/>
-        </p:spPr>
-        <p:txBody>
-          <a:bodyPr wrap="square" lIns="0" tIns="0" rIns="0" bIns="0" rtlCol="0" anchor="ctr"/>
-          <a:lstStyle/>
-          <a:p>
-            <a:pPr algn="ctr" indent="0" marL="0">
-              <a:buNone/>
-            </a:pPr>
-            <a:r>
-              <a:rPr lang="en-US" sz="1400" b="1" dirty="0">
-                <a:solidFill>
-                  <a:srgbClr val="FFFFFF"/>
-                </a:solidFill>
-                <a:latin typeface="Calibri" pitchFamily="34" charset="0"/>
-                <a:ea typeface="Calibri" pitchFamily="34" charset="-122"/>
-                <a:cs typeface="Calibri" pitchFamily="34" charset="-120"/>
-              </a:rPr>
-              <a:t>!</a:t>
-            </a:r>
-            <a:endParaRPr lang="en-US" sz="1400" dirty="0"/>
-          </a:p>
-        </p:txBody>
-      </p:sp>
-      <p:sp>
-        <p:nvSpPr>
-          <p:cNvPr id="21" name="Text 19"/>
-          <p:cNvSpPr txBox="1"/>
-          <p:nvPr/>
-        </p:nvSpPr>
-        <p:spPr>
-          <a:xfrm>
-            <a:off x="1143000" y="3127248"/>
-            <a:ext cx="2194560" cy="585216"/>
-          </a:xfrm>
-          <a:prstGeom prst="rect">
-            <a:avLst/>
-          </a:prstGeom>
-          <a:noFill/>
-          <a:ln/>
-        </p:spPr>
-        <p:txBody>
-          <a:bodyPr wrap="square" lIns="0" tIns="0" rIns="0" bIns="0" rtlCol="0" anchor="ctr"/>
-          <a:lstStyle/>
-          <a:p>
-            <a:pPr indent="0" marL="0">
-              <a:buNone/>
-            </a:pPr>
-            <a:r>
-              <a:rPr lang="en-US" sz="1400" b="1" dirty="0">
-                <a:solidFill>
-                  <a:srgbClr val="21295C"/>
-                </a:solidFill>
-                <a:latin typeface="Calibri" pitchFamily="34" charset="0"/>
-                <a:ea typeface="Calibri" pitchFamily="34" charset="-122"/>
-                <a:cs typeface="Calibri" pitchFamily="34" charset="-120"/>
-              </a:rPr>
-              <a:t>Thin real data</a:t>
-            </a:r>
-            <a:endParaRPr lang="en-US" sz="1400" dirty="0"/>
-          </a:p>
-        </p:txBody>
-      </p:sp>
-      <p:sp>
-        <p:nvSpPr>
-          <p:cNvPr id="22" name="Text 20"/>
-          <p:cNvSpPr txBox="1"/>
-          <p:nvPr/>
-        </p:nvSpPr>
-        <p:spPr>
-          <a:xfrm>
-            <a:off x="3383280" y="3127248"/>
-            <a:ext cx="5120640" cy="585216"/>
-          </a:xfrm>
-          <a:prstGeom prst="rect">
-            <a:avLst/>
-          </a:prstGeom>
-          <a:noFill/>
-          <a:ln/>
-        </p:spPr>
-        <p:txBody>
-          <a:bodyPr wrap="square" lIns="0" tIns="0" rIns="0" bIns="0" rtlCol="0" anchor="ctr"/>
-          <a:lstStyle/>
-          <a:p>
-            <a:pPr indent="0" marL="0">
-              <a:buNone/>
-            </a:pPr>
-            <a:r>
-              <a:rPr lang="en-US" sz="1200" dirty="0">
-                <a:solidFill>
-                  <a:srgbClr val="1F2937"/>
-                </a:solidFill>
-                <a:latin typeface="Calibri" pitchFamily="34" charset="0"/>
-                <a:ea typeface="Calibri" pitchFamily="34" charset="-122"/>
-                <a:cs typeface="Calibri" pitchFamily="34" charset="-120"/>
-              </a:rPr>
-              <a:t>Only 101 of 427 HiSBreast exams passed our translation checks</a:t>
-            </a:r>
-            <a:endParaRPr lang="en-US" sz="1200" dirty="0"/>
-          </a:p>
-        </p:txBody>
-      </p:sp>
-      <p:sp>
-        <p:nvSpPr>
-          <p:cNvPr id="23" name="Shape 21"/>
-          <p:cNvSpPr/>
-          <p:nvPr/>
-        </p:nvSpPr>
-        <p:spPr>
-          <a:xfrm>
-            <a:off x="548640" y="3803904"/>
-            <a:ext cx="8046720" cy="585216"/>
-          </a:xfrm>
-          <a:prstGeom prst="roundRect">
-            <a:avLst>
-              <a:gd name="adj" fmla="val 12500"/>
-            </a:avLst>
-          </a:prstGeom>
-          <a:solidFill>
-            <a:srgbClr val="E6F1F6"/>
-          </a:solidFill>
-          <a:ln w="12700">
-            <a:solidFill>
-              <a:srgbClr val="E6F1F6"/>
-            </a:solidFill>
-            <a:prstDash val="solid"/>
-          </a:ln>
-        </p:spPr>
-      </p:sp>
-      <p:sp>
-        <p:nvSpPr>
-          <p:cNvPr id="24" name="Shape 22"/>
-          <p:cNvSpPr/>
-          <p:nvPr/>
-        </p:nvSpPr>
-        <p:spPr>
-          <a:xfrm>
-            <a:off x="685800" y="3931920"/>
-            <a:ext cx="329184" cy="329184"/>
-          </a:xfrm>
-          <a:prstGeom prst="ellipse">
-            <a:avLst/>
-          </a:prstGeom>
-          <a:solidFill>
-            <a:srgbClr val="E8505B"/>
-          </a:solidFill>
-          <a:ln w="12700">
-            <a:solidFill>
-              <a:srgbClr val="E8505B"/>
-            </a:solidFill>
-            <a:prstDash val="solid"/>
-          </a:ln>
-        </p:spPr>
-      </p:sp>
-      <p:sp>
-        <p:nvSpPr>
-          <p:cNvPr id="25" name="Text 23"/>
-          <p:cNvSpPr txBox="1"/>
-          <p:nvPr/>
-        </p:nvSpPr>
-        <p:spPr>
-          <a:xfrm>
-            <a:off x="685800" y="3931920"/>
-            <a:ext cx="329184" cy="329184"/>
-          </a:xfrm>
-          <a:prstGeom prst="rect">
-            <a:avLst/>
-          </a:prstGeom>
-          <a:noFill/>
-          <a:ln/>
-        </p:spPr>
-        <p:txBody>
-          <a:bodyPr wrap="square" lIns="0" tIns="0" rIns="0" bIns="0" rtlCol="0" anchor="ctr"/>
-          <a:lstStyle/>
-          <a:p>
-            <a:pPr algn="ctr" indent="0" marL="0">
-              <a:buNone/>
-            </a:pPr>
-            <a:r>
-              <a:rPr lang="en-US" sz="1400" b="1" dirty="0">
-                <a:solidFill>
-                  <a:srgbClr val="FFFFFF"/>
-                </a:solidFill>
-                <a:latin typeface="Calibri" pitchFamily="34" charset="0"/>
-                <a:ea typeface="Calibri" pitchFamily="34" charset="-122"/>
-                <a:cs typeface="Calibri" pitchFamily="34" charset="-120"/>
-              </a:rPr>
-              <a:t>!</a:t>
-            </a:r>
-            <a:endParaRPr lang="en-US" sz="1400" dirty="0"/>
-          </a:p>
-        </p:txBody>
-      </p:sp>
-      <p:sp>
-        <p:nvSpPr>
-          <p:cNvPr id="26" name="Text 24"/>
-          <p:cNvSpPr txBox="1"/>
-          <p:nvPr/>
-        </p:nvSpPr>
-        <p:spPr>
-          <a:xfrm>
-            <a:off x="1143000" y="3803904"/>
-            <a:ext cx="2194560" cy="585216"/>
-          </a:xfrm>
-          <a:prstGeom prst="rect">
-            <a:avLst/>
-          </a:prstGeom>
-          <a:noFill/>
-          <a:ln/>
-        </p:spPr>
-        <p:txBody>
-          <a:bodyPr wrap="square" lIns="0" tIns="0" rIns="0" bIns="0" rtlCol="0" anchor="ctr"/>
-          <a:lstStyle/>
-          <a:p>
-            <a:pPr indent="0" marL="0">
-              <a:buNone/>
-            </a:pPr>
-            <a:r>
-              <a:rPr lang="en-US" sz="1400" b="1" dirty="0">
-                <a:solidFill>
-                  <a:srgbClr val="21295C"/>
-                </a:solidFill>
-                <a:latin typeface="Calibri" pitchFamily="34" charset="0"/>
-                <a:ea typeface="Calibri" pitchFamily="34" charset="-122"/>
-                <a:cs typeface="Calibri" pitchFamily="34" charset="-120"/>
-              </a:rPr>
-              <a:t>Not run</a:t>
-            </a:r>
-            <a:endParaRPr lang="en-US" sz="1400" dirty="0"/>
-          </a:p>
-        </p:txBody>
-      </p:sp>
-      <p:sp>
-        <p:nvSpPr>
-          <p:cNvPr id="27" name="Text 25"/>
-          <p:cNvSpPr txBox="1"/>
-          <p:nvPr/>
-        </p:nvSpPr>
-        <p:spPr>
-          <a:xfrm>
-            <a:off x="3383280" y="3803904"/>
-            <a:ext cx="5120640" cy="585216"/>
-          </a:xfrm>
-          <a:prstGeom prst="rect">
-            <a:avLst/>
-          </a:prstGeom>
-          <a:noFill/>
-          <a:ln/>
-        </p:spPr>
-        <p:txBody>
-          <a:bodyPr wrap="square" lIns="0" tIns="0" rIns="0" bIns="0" rtlCol="0" anchor="ctr"/>
-          <a:lstStyle/>
-          <a:p>
-            <a:pPr indent="0" marL="0">
-              <a:buNone/>
-            </a:pPr>
-            <a:r>
-              <a:rPr lang="en-US" sz="1200" dirty="0">
-                <a:solidFill>
-                  <a:srgbClr val="1F2937"/>
-                </a:solidFill>
-                <a:latin typeface="Calibri" pitchFamily="34" charset="0"/>
-                <a:ea typeface="Calibri" pitchFamily="34" charset="-122"/>
-                <a:cs typeface="Calibri" pitchFamily="34" charset="-120"/>
-              </a:rPr>
-              <a:t>GREEN, Claude judge, Jev, LLaVA-Med, clinician review</a:t>
-            </a:r>
-            <a:endParaRPr lang="en-US" sz="1200" dirty="0"/>
-          </a:p>
-        </p:txBody>
-      </p:sp>
-      <p:sp>
-        <p:nvSpPr>
-          <p:cNvPr id="28" name="Text 26"/>
-          <p:cNvSpPr txBox="1"/>
-          <p:nvPr/>
-        </p:nvSpPr>
-        <p:spPr>
-          <a:xfrm>
-            <a:off x="548640" y="4754880"/>
-            <a:ext cx="8046720" cy="228600"/>
-          </a:xfrm>
-          <a:prstGeom prst="rect">
-            <a:avLst/>
-          </a:prstGeom>
-          <a:noFill/>
-          <a:ln/>
-        </p:spPr>
-        <p:txBody>
-          <a:bodyPr wrap="square" lIns="0" tIns="0" rIns="0" bIns="0" rtlCol="0" anchor="ctr"/>
-          <a:lstStyle/>
-          <a:p>
-            <a:pPr indent="0" marL="0">
-              <a:buNone/>
-            </a:pPr>
-            <a:r>
               <a:rPr lang="en-US" sz="1000" dirty="0">
                 <a:solidFill>
                   <a:srgbClr val="5B6678"/>
@@ -5045,7 +7201,7 @@
                 <a:ea typeface="Calibri" pitchFamily="34" charset="-122"/>
                 <a:cs typeface="Calibri" pitchFamily="34" charset="-120"/>
               </a:rPr>
-              <a:t>Ultrasound report scorers · plain-language summary · 6/7</a:t>
+              <a:t>Ultrasound report scorers · plain-language summary · 6/9</a:t>
             </a:r>
             <a:endParaRPr lang="en-US" sz="1000" dirty="0"/>
           </a:p>
@@ -5062,6 +7218,1412 @@
 <file path=ppt/slides/slide7.xml><?xml version="1.0" encoding="utf-8"?>
 <p:sld xmlns:a="http://schemas.openxmlformats.org/drawingml/2006/main" xmlns:r="http://schemas.openxmlformats.org/officeDocument/2006/relationships" xmlns:p="http://schemas.openxmlformats.org/presentationml/2006/main">
   <p:cSld name="Slide 7">
+    <p:bg>
+      <p:bgPr>
+        <a:solidFill>
+          <a:srgbClr val="FFFFFF"/>
+        </a:solidFill>
+      </p:bgPr>
+    </p:bg>
+    <p:spTree>
+      <p:nvGrpSpPr>
+        <p:cNvPr id="1" name=""/>
+        <p:cNvGrpSpPr/>
+        <p:nvPr/>
+      </p:nvGrpSpPr>
+      <p:grpSpPr>
+        <a:xfrm>
+          <a:off x="0" y="0"/>
+          <a:ext cx="0" cy="0"/>
+          <a:chOff x="0" y="0"/>
+          <a:chExt cx="0" cy="0"/>
+        </a:xfrm>
+      </p:grpSpPr>
+      <p:sp>
+        <p:nvSpPr>
+          <p:cNvPr id="2" name="Text 0"/>
+          <p:cNvSpPr txBox="1"/>
+          <p:nvPr/>
+        </p:nvSpPr>
+        <p:spPr>
+          <a:xfrm>
+            <a:off x="548640" y="320040"/>
+            <a:ext cx="8046720" cy="640080"/>
+          </a:xfrm>
+          <a:prstGeom prst="rect">
+            <a:avLst/>
+          </a:prstGeom>
+          <a:noFill/>
+          <a:ln/>
+        </p:spPr>
+        <p:txBody>
+          <a:bodyPr wrap="square" lIns="0" tIns="0" rIns="0" bIns="0" rtlCol="0" anchor="ctr"/>
+          <a:lstStyle/>
+          <a:p>
+            <a:pPr indent="0" marL="0">
+              <a:buNone/>
+            </a:pPr>
+            <a:r>
+              <a:rPr lang="en-US" sz="3000" b="1" dirty="0">
+                <a:solidFill>
+                  <a:srgbClr val="21295C"/>
+                </a:solidFill>
+                <a:latin typeface="Cambria" pitchFamily="34" charset="0"/>
+                <a:ea typeface="Cambria" pitchFamily="34" charset="-122"/>
+                <a:cs typeface="Cambria" pitchFamily="34" charset="-120"/>
+              </a:rPr>
+              <a:t>Image check and real AI writers</a:t>
+            </a:r>
+            <a:endParaRPr lang="en-US" sz="3000" dirty="0"/>
+          </a:p>
+        </p:txBody>
+      </p:sp>
+      <p:sp>
+        <p:nvSpPr>
+          <p:cNvPr id="3" name="Shape 1"/>
+          <p:cNvSpPr/>
+          <p:nvPr/>
+        </p:nvSpPr>
+        <p:spPr>
+          <a:xfrm>
+            <a:off x="548640" y="1097280"/>
+            <a:ext cx="3931920" cy="3383280"/>
+          </a:xfrm>
+          <a:prstGeom prst="roundRect">
+            <a:avLst>
+              <a:gd name="adj" fmla="val 2162"/>
+            </a:avLst>
+          </a:prstGeom>
+          <a:solidFill>
+            <a:srgbClr val="E6F1F6"/>
+          </a:solidFill>
+          <a:ln w="12700">
+            <a:solidFill>
+              <a:srgbClr val="E6F1F6"/>
+            </a:solidFill>
+            <a:prstDash val="solid"/>
+          </a:ln>
+        </p:spPr>
+      </p:sp>
+      <p:sp>
+        <p:nvSpPr>
+          <p:cNvPr id="4" name="Text 2"/>
+          <p:cNvSpPr txBox="1"/>
+          <p:nvPr/>
+        </p:nvSpPr>
+        <p:spPr>
+          <a:xfrm>
+            <a:off x="548640" y="1188720"/>
+            <a:ext cx="3931920" cy="822960"/>
+          </a:xfrm>
+          <a:prstGeom prst="rect">
+            <a:avLst/>
+          </a:prstGeom>
+          <a:noFill/>
+          <a:ln/>
+        </p:spPr>
+        <p:txBody>
+          <a:bodyPr wrap="square" lIns="0" tIns="0" rIns="0" bIns="0" rtlCol="0" anchor="ctr"/>
+          <a:lstStyle/>
+          <a:p>
+            <a:pPr algn="ctr" indent="0" marL="0">
+              <a:buNone/>
+            </a:pPr>
+            <a:r>
+              <a:rPr lang="en-US" sz="4800" b="1" dirty="0">
+                <a:solidFill>
+                  <a:srgbClr val="065A82"/>
+                </a:solidFill>
+                <a:latin typeface="Cambria" pitchFamily="34" charset="0"/>
+                <a:ea typeface="Cambria" pitchFamily="34" charset="-122"/>
+                <a:cs typeface="Cambria" pitchFamily="34" charset="-120"/>
+              </a:rPr>
+              <a:t>0.91</a:t>
+            </a:r>
+            <a:endParaRPr lang="en-US" sz="4800" dirty="0"/>
+          </a:p>
+        </p:txBody>
+      </p:sp>
+      <p:sp>
+        <p:nvSpPr>
+          <p:cNvPr id="5" name="Text 3"/>
+          <p:cNvSpPr txBox="1"/>
+          <p:nvPr/>
+        </p:nvSpPr>
+        <p:spPr>
+          <a:xfrm>
+            <a:off x="731520" y="2011680"/>
+            <a:ext cx="3566160" cy="640080"/>
+          </a:xfrm>
+          <a:prstGeom prst="rect">
+            <a:avLst/>
+          </a:prstGeom>
+          <a:noFill/>
+          <a:ln/>
+        </p:spPr>
+        <p:txBody>
+          <a:bodyPr wrap="square" lIns="0" tIns="0" rIns="0" bIns="0" rtlCol="0" anchor="ctr"/>
+          <a:lstStyle/>
+          <a:p>
+            <a:pPr algn="ctr" indent="0" marL="0">
+              <a:buNone/>
+            </a:pPr>
+            <a:r>
+              <a:rPr lang="en-US" sz="1300" dirty="0">
+                <a:solidFill>
+                  <a:srgbClr val="1F2937"/>
+                </a:solidFill>
+                <a:latin typeface="Calibri" pitchFamily="34" charset="0"/>
+                <a:ea typeface="Calibri" pitchFamily="34" charset="-122"/>
+                <a:cs typeface="Calibri" pitchFamily="34" charset="-120"/>
+              </a:rPr>
+              <a:t>Image check with MedSAM masks, breast + thyroid (word scores: 0.25–0.62)</a:t>
+            </a:r>
+            <a:endParaRPr lang="en-US" sz="1300" dirty="0"/>
+          </a:p>
+        </p:txBody>
+      </p:sp>
+      <p:sp>
+        <p:nvSpPr>
+          <p:cNvPr id="6" name="Text 4"/>
+          <p:cNvSpPr txBox="1"/>
+          <p:nvPr/>
+        </p:nvSpPr>
+        <p:spPr>
+          <a:xfrm>
+            <a:off x="731520" y="2743200"/>
+            <a:ext cx="3566160" cy="1645920"/>
+          </a:xfrm>
+          <a:prstGeom prst="rect">
+            <a:avLst/>
+          </a:prstGeom>
+          <a:noFill/>
+          <a:ln/>
+        </p:spPr>
+        <p:txBody>
+          <a:bodyPr wrap="square" lIns="0" tIns="0" rIns="0" bIns="0" rtlCol="0" anchor="t"/>
+          <a:lstStyle/>
+          <a:p>
+            <a:pPr marL="342900" indent="-342900">
+              <a:spcAft>
+                <a:spcPts val="500"/>
+              </a:spcAft>
+              <a:buSzPct val="100000"/>
+              <a:buChar char="•"/>
+            </a:pPr>
+            <a:r>
+              <a:rPr lang="en-US" sz="1300" dirty="0">
+                <a:solidFill>
+                  <a:srgbClr val="1F2937"/>
+                </a:solidFill>
+                <a:latin typeface="Calibri" pitchFamily="34" charset="0"/>
+                <a:ea typeface="Calibri" pitchFamily="34" charset="-122"/>
+                <a:cs typeface="Calibri" pitchFamily="34" charset="-120"/>
+              </a:rPr>
+              <a:t>Easy setup: the lesion box was handed to the model and errors were big</a:t>
+            </a:r>
+            <a:endParaRPr lang="en-US" sz="1300" dirty="0"/>
+          </a:p>
+          <a:p>
+            <a:pPr marL="342900" indent="-342900">
+              <a:spcAft>
+                <a:spcPts val="500"/>
+              </a:spcAft>
+              <a:buSzPct val="100000"/>
+              <a:buChar char="•"/>
+            </a:pPr>
+            <a:r>
+              <a:rPr lang="en-US" sz="1300" dirty="0">
+                <a:solidFill>
+                  <a:srgbClr val="1F2937"/>
+                </a:solidFill>
+                <a:latin typeface="Calibri" pitchFamily="34" charset="0"/>
+                <a:ea typeface="Calibri" pitchFamily="34" charset="-122"/>
+                <a:cs typeface="Calibri" pitchFamily="34" charset="-120"/>
+              </a:rPr>
+              <a:t>Fetal head fails (0.46, 0.50): skull outlined differently</a:t>
+            </a:r>
+            <a:endParaRPr lang="en-US" sz="1300" dirty="0"/>
+          </a:p>
+          <a:p>
+            <a:pPr marL="342900" indent="-342900">
+              <a:spcAft>
+                <a:spcPts val="500"/>
+              </a:spcAft>
+              <a:buSzPct val="100000"/>
+              <a:buChar char="•"/>
+            </a:pPr>
+            <a:r>
+              <a:rPr lang="en-US" sz="1300" dirty="0">
+                <a:solidFill>
+                  <a:srgbClr val="1F2937"/>
+                </a:solidFill>
+                <a:latin typeface="Calibri" pitchFamily="34" charset="0"/>
+                <a:ea typeface="Calibri" pitchFamily="34" charset="-122"/>
+                <a:cs typeface="Calibri" pitchFamily="34" charset="-120"/>
+              </a:rPr>
+              <a:t>Marks correct reports down (mean 0.68)</a:t>
+            </a:r>
+            <a:endParaRPr lang="en-US" sz="1300" dirty="0"/>
+          </a:p>
+        </p:txBody>
+      </p:sp>
+      <p:sp>
+        <p:nvSpPr>
+          <p:cNvPr id="7" name="Shape 5"/>
+          <p:cNvSpPr/>
+          <p:nvPr/>
+        </p:nvSpPr>
+        <p:spPr>
+          <a:xfrm>
+            <a:off x="4663440" y="1097280"/>
+            <a:ext cx="3931920" cy="3383280"/>
+          </a:xfrm>
+          <a:prstGeom prst="roundRect">
+            <a:avLst>
+              <a:gd name="adj" fmla="val 2162"/>
+            </a:avLst>
+          </a:prstGeom>
+          <a:solidFill>
+            <a:srgbClr val="E6F1F6"/>
+          </a:solidFill>
+          <a:ln w="12700">
+            <a:solidFill>
+              <a:srgbClr val="E6F1F6"/>
+            </a:solidFill>
+            <a:prstDash val="solid"/>
+          </a:ln>
+        </p:spPr>
+      </p:sp>
+      <p:sp>
+        <p:nvSpPr>
+          <p:cNvPr id="8" name="Text 6"/>
+          <p:cNvSpPr txBox="1"/>
+          <p:nvPr/>
+        </p:nvSpPr>
+        <p:spPr>
+          <a:xfrm>
+            <a:off x="4846320" y="1188720"/>
+            <a:ext cx="3566160" cy="640080"/>
+          </a:xfrm>
+          <a:prstGeom prst="rect">
+            <a:avLst/>
+          </a:prstGeom>
+          <a:noFill/>
+          <a:ln/>
+        </p:spPr>
+        <p:txBody>
+          <a:bodyPr wrap="square" lIns="0" tIns="0" rIns="0" bIns="0" rtlCol="0" anchor="ctr"/>
+          <a:lstStyle/>
+          <a:p>
+            <a:pPr indent="0" marL="0">
+              <a:buNone/>
+            </a:pPr>
+            <a:r>
+              <a:rPr lang="en-US" sz="1500" b="1" dirty="0">
+                <a:solidFill>
+                  <a:srgbClr val="21295C"/>
+                </a:solidFill>
+                <a:latin typeface="Calibri" pitchFamily="34" charset="0"/>
+                <a:ea typeface="Calibri" pitchFamily="34" charset="-122"/>
+                <a:cs typeface="Calibri" pitchFamily="34" charset="-120"/>
+              </a:rPr>
+              <a:t>Real AI writers (Qwen, MedGemma) and real doctor text</a:t>
+            </a:r>
+            <a:endParaRPr lang="en-US" sz="1500" dirty="0"/>
+          </a:p>
+        </p:txBody>
+      </p:sp>
+      <p:sp>
+        <p:nvSpPr>
+          <p:cNvPr id="9" name="Text 7"/>
+          <p:cNvSpPr txBox="1"/>
+          <p:nvPr/>
+        </p:nvSpPr>
+        <p:spPr>
+          <a:xfrm>
+            <a:off x="4846320" y="1920240"/>
+            <a:ext cx="3566160" cy="2468880"/>
+          </a:xfrm>
+          <a:prstGeom prst="rect">
+            <a:avLst/>
+          </a:prstGeom>
+          <a:noFill/>
+          <a:ln/>
+        </p:spPr>
+        <p:txBody>
+          <a:bodyPr wrap="square" lIns="0" tIns="0" rIns="0" bIns="0" rtlCol="0" anchor="t"/>
+          <a:lstStyle/>
+          <a:p>
+            <a:pPr marL="342900" indent="-342900">
+              <a:spcAft>
+                <a:spcPts val="600"/>
+              </a:spcAft>
+              <a:buSzPct val="100000"/>
+              <a:buChar char="•"/>
+            </a:pPr>
+            <a:r>
+              <a:rPr lang="en-US" sz="1300" dirty="0">
+                <a:solidFill>
+                  <a:srgbClr val="1F2937"/>
+                </a:solidFill>
+                <a:latin typeface="Calibri" pitchFamily="34" charset="0"/>
+                <a:ea typeface="Calibri" pitchFamily="34" charset="-122"/>
+                <a:cs typeface="Calibri" pitchFamily="34" charset="-120"/>
+              </a:rPr>
+              <a:t>Small open writers get BI-RADS, side and pathology right only occasionally</a:t>
+            </a:r>
+            <a:endParaRPr lang="en-US" sz="1300" dirty="0"/>
+          </a:p>
+          <a:p>
+            <a:pPr marL="342900" indent="-342900">
+              <a:spcAft>
+                <a:spcPts val="600"/>
+              </a:spcAft>
+              <a:buSzPct val="100000"/>
+              <a:buChar char="•"/>
+            </a:pPr>
+            <a:r>
+              <a:rPr lang="en-US" sz="1300" dirty="0">
+                <a:solidFill>
+                  <a:srgbClr val="1F2937"/>
+                </a:solidFill>
+                <a:latin typeface="Calibri" pitchFamily="34" charset="0"/>
+                <a:ea typeface="Calibri" pitchFamily="34" charset="-122"/>
+                <a:cs typeface="Calibri" pitchFamily="34" charset="-120"/>
+              </a:rPr>
+              <a:t>Scorers disagree on which writer is better, so no trustworthy ranking</a:t>
+            </a:r>
+            <a:endParaRPr lang="en-US" sz="1300" dirty="0"/>
+          </a:p>
+          <a:p>
+            <a:pPr marL="342900" indent="-342900">
+              <a:spcAft>
+                <a:spcPts val="600"/>
+              </a:spcAft>
+              <a:buSzPct val="100000"/>
+              <a:buChar char="•"/>
+            </a:pPr>
+            <a:r>
+              <a:rPr lang="en-US" sz="1300" dirty="0">
+                <a:solidFill>
+                  <a:srgbClr val="1F2937"/>
+                </a:solidFill>
+                <a:latin typeface="Calibri" pitchFamily="34" charset="0"/>
+                <a:ea typeface="Calibri" pitchFamily="34" charset="-122"/>
+                <a:cs typeface="Calibri" pitchFamily="34" charset="-120"/>
+              </a:rPr>
+              <a:t>Real conclusions (HiSBreast, 41 test exams): BERTScore at chance (0.43), AI judge best (0.79–0.89)</a:t>
+            </a:r>
+            <a:endParaRPr lang="en-US" sz="1300" dirty="0"/>
+          </a:p>
+        </p:txBody>
+      </p:sp>
+      <p:sp>
+        <p:nvSpPr>
+          <p:cNvPr id="10" name="Text 8"/>
+          <p:cNvSpPr txBox="1"/>
+          <p:nvPr/>
+        </p:nvSpPr>
+        <p:spPr>
+          <a:xfrm>
+            <a:off x="548640" y="4754880"/>
+            <a:ext cx="8046720" cy="228600"/>
+          </a:xfrm>
+          <a:prstGeom prst="rect">
+            <a:avLst/>
+          </a:prstGeom>
+          <a:noFill/>
+          <a:ln/>
+        </p:spPr>
+        <p:txBody>
+          <a:bodyPr wrap="square" lIns="0" tIns="0" rIns="0" bIns="0" rtlCol="0" anchor="ctr"/>
+          <a:lstStyle/>
+          <a:p>
+            <a:pPr indent="0" marL="0">
+              <a:buNone/>
+            </a:pPr>
+            <a:r>
+              <a:rPr lang="en-US" sz="1000" dirty="0">
+                <a:solidFill>
+                  <a:srgbClr val="5B6678"/>
+                </a:solidFill>
+                <a:latin typeface="Calibri" pitchFamily="34" charset="0"/>
+                <a:ea typeface="Calibri" pitchFamily="34" charset="-122"/>
+                <a:cs typeface="Calibri" pitchFamily="34" charset="-120"/>
+              </a:rPr>
+              <a:t>Ultrasound report scorers · plain-language summary · 7/9</a:t>
+            </a:r>
+            <a:endParaRPr lang="en-US" sz="1000" dirty="0"/>
+          </a:p>
+        </p:txBody>
+      </p:sp>
+    </p:spTree>
+  </p:cSld>
+  <p:clrMapOvr>
+    <a:masterClrMapping/>
+  </p:clrMapOvr>
+</p:sld>
+</file>
+
+<file path=ppt/slides/slide8.xml><?xml version="1.0" encoding="utf-8"?>
+<p:sld xmlns:a="http://schemas.openxmlformats.org/drawingml/2006/main" xmlns:r="http://schemas.openxmlformats.org/officeDocument/2006/relationships" xmlns:p="http://schemas.openxmlformats.org/presentationml/2006/main">
+  <p:cSld name="Slide 8">
+    <p:bg>
+      <p:bgPr>
+        <a:solidFill>
+          <a:srgbClr val="FFFFFF"/>
+        </a:solidFill>
+      </p:bgPr>
+    </p:bg>
+    <p:spTree>
+      <p:nvGrpSpPr>
+        <p:cNvPr id="1" name=""/>
+        <p:cNvGrpSpPr/>
+        <p:nvPr/>
+      </p:nvGrpSpPr>
+      <p:grpSpPr>
+        <a:xfrm>
+          <a:off x="0" y="0"/>
+          <a:ext cx="0" cy="0"/>
+          <a:chOff x="0" y="0"/>
+          <a:chExt cx="0" cy="0"/>
+        </a:xfrm>
+      </p:grpSpPr>
+      <p:sp>
+        <p:nvSpPr>
+          <p:cNvPr id="2" name="Text 0"/>
+          <p:cNvSpPr txBox="1"/>
+          <p:nvPr/>
+        </p:nvSpPr>
+        <p:spPr>
+          <a:xfrm>
+            <a:off x="548640" y="320040"/>
+            <a:ext cx="8046720" cy="640080"/>
+          </a:xfrm>
+          <a:prstGeom prst="rect">
+            <a:avLst/>
+          </a:prstGeom>
+          <a:noFill/>
+          <a:ln/>
+        </p:spPr>
+        <p:txBody>
+          <a:bodyPr wrap="square" lIns="0" tIns="0" rIns="0" bIns="0" rtlCol="0" anchor="ctr"/>
+          <a:lstStyle/>
+          <a:p>
+            <a:pPr indent="0" marL="0">
+              <a:buNone/>
+            </a:pPr>
+            <a:r>
+              <a:rPr lang="en-US" sz="3000" b="1" dirty="0">
+                <a:solidFill>
+                  <a:srgbClr val="21295C"/>
+                </a:solidFill>
+                <a:latin typeface="Cambria" pitchFamily="34" charset="0"/>
+                <a:ea typeface="Cambria" pitchFamily="34" charset="-122"/>
+                <a:cs typeface="Cambria" pitchFamily="34" charset="-120"/>
+              </a:rPr>
+              <a:t>What failed or turned out wrong</a:t>
+            </a:r>
+            <a:endParaRPr lang="en-US" sz="3000" dirty="0"/>
+          </a:p>
+        </p:txBody>
+      </p:sp>
+      <p:sp>
+        <p:nvSpPr>
+          <p:cNvPr id="3" name="Shape 1"/>
+          <p:cNvSpPr/>
+          <p:nvPr/>
+        </p:nvSpPr>
+        <p:spPr>
+          <a:xfrm>
+            <a:off x="548640" y="1097280"/>
+            <a:ext cx="8046720" cy="585216"/>
+          </a:xfrm>
+          <a:prstGeom prst="roundRect">
+            <a:avLst>
+              <a:gd name="adj" fmla="val 12500"/>
+            </a:avLst>
+          </a:prstGeom>
+          <a:solidFill>
+            <a:srgbClr val="E6F1F6"/>
+          </a:solidFill>
+          <a:ln w="12700">
+            <a:solidFill>
+              <a:srgbClr val="E6F1F6"/>
+            </a:solidFill>
+            <a:prstDash val="solid"/>
+          </a:ln>
+        </p:spPr>
+      </p:sp>
+      <p:sp>
+        <p:nvSpPr>
+          <p:cNvPr id="4" name="Shape 2"/>
+          <p:cNvSpPr/>
+          <p:nvPr/>
+        </p:nvSpPr>
+        <p:spPr>
+          <a:xfrm>
+            <a:off x="685800" y="1225296"/>
+            <a:ext cx="329184" cy="329184"/>
+          </a:xfrm>
+          <a:prstGeom prst="ellipse">
+            <a:avLst/>
+          </a:prstGeom>
+          <a:solidFill>
+            <a:srgbClr val="E8505B"/>
+          </a:solidFill>
+          <a:ln w="12700">
+            <a:solidFill>
+              <a:srgbClr val="E8505B"/>
+            </a:solidFill>
+            <a:prstDash val="solid"/>
+          </a:ln>
+        </p:spPr>
+      </p:sp>
+      <p:sp>
+        <p:nvSpPr>
+          <p:cNvPr id="5" name="Text 3"/>
+          <p:cNvSpPr txBox="1"/>
+          <p:nvPr/>
+        </p:nvSpPr>
+        <p:spPr>
+          <a:xfrm>
+            <a:off x="685800" y="1225296"/>
+            <a:ext cx="329184" cy="329184"/>
+          </a:xfrm>
+          <a:prstGeom prst="rect">
+            <a:avLst/>
+          </a:prstGeom>
+          <a:noFill/>
+          <a:ln/>
+        </p:spPr>
+        <p:txBody>
+          <a:bodyPr wrap="square" lIns="0" tIns="0" rIns="0" bIns="0" rtlCol="0" anchor="ctr"/>
+          <a:lstStyle/>
+          <a:p>
+            <a:pPr algn="ctr" indent="0" marL="0">
+              <a:buNone/>
+            </a:pPr>
+            <a:r>
+              <a:rPr lang="en-US" sz="1400" b="1" dirty="0">
+                <a:solidFill>
+                  <a:srgbClr val="FFFFFF"/>
+                </a:solidFill>
+                <a:latin typeface="Calibri" pitchFamily="34" charset="0"/>
+                <a:ea typeface="Calibri" pitchFamily="34" charset="-122"/>
+                <a:cs typeface="Calibri" pitchFamily="34" charset="-120"/>
+              </a:rPr>
+              <a:t>!</a:t>
+            </a:r>
+            <a:endParaRPr lang="en-US" sz="1400" dirty="0"/>
+          </a:p>
+        </p:txBody>
+      </p:sp>
+      <p:sp>
+        <p:nvSpPr>
+          <p:cNvPr id="6" name="Text 4"/>
+          <p:cNvSpPr txBox="1"/>
+          <p:nvPr/>
+        </p:nvSpPr>
+        <p:spPr>
+          <a:xfrm>
+            <a:off x="1143000" y="1097280"/>
+            <a:ext cx="2194560" cy="585216"/>
+          </a:xfrm>
+          <a:prstGeom prst="rect">
+            <a:avLst/>
+          </a:prstGeom>
+          <a:noFill/>
+          <a:ln/>
+        </p:spPr>
+        <p:txBody>
+          <a:bodyPr wrap="square" lIns="0" tIns="0" rIns="0" bIns="0" rtlCol="0" anchor="ctr"/>
+          <a:lstStyle/>
+          <a:p>
+            <a:pPr indent="0" marL="0">
+              <a:buNone/>
+            </a:pPr>
+            <a:r>
+              <a:rPr lang="en-US" sz="1400" b="1" dirty="0">
+                <a:solidFill>
+                  <a:srgbClr val="21295C"/>
+                </a:solidFill>
+                <a:latin typeface="Calibri" pitchFamily="34" charset="0"/>
+                <a:ea typeface="Calibri" pitchFamily="34" charset="-122"/>
+                <a:cs typeface="Calibri" pitchFamily="34" charset="-120"/>
+              </a:rPr>
+              <a:t>Retracted headline</a:t>
+            </a:r>
+            <a:endParaRPr lang="en-US" sz="1400" dirty="0"/>
+          </a:p>
+        </p:txBody>
+      </p:sp>
+      <p:sp>
+        <p:nvSpPr>
+          <p:cNvPr id="7" name="Text 5"/>
+          <p:cNvSpPr txBox="1"/>
+          <p:nvPr/>
+        </p:nvSpPr>
+        <p:spPr>
+          <a:xfrm>
+            <a:off x="3383280" y="1097280"/>
+            <a:ext cx="5120640" cy="585216"/>
+          </a:xfrm>
+          <a:prstGeom prst="rect">
+            <a:avLst/>
+          </a:prstGeom>
+          <a:noFill/>
+          <a:ln/>
+        </p:spPr>
+        <p:txBody>
+          <a:bodyPr wrap="square" lIns="0" tIns="0" rIns="0" bIns="0" rtlCol="0" anchor="ctr"/>
+          <a:lstStyle/>
+          <a:p>
+            <a:pPr indent="0" marL="0">
+              <a:buNone/>
+            </a:pPr>
+            <a:r>
+              <a:rPr lang="en-US" sz="1200" dirty="0">
+                <a:solidFill>
+                  <a:srgbClr val="1F2937"/>
+                </a:solidFill>
+                <a:latin typeface="Calibri" pitchFamily="34" charset="0"/>
+                <a:ea typeface="Calibri" pitchFamily="34" charset="-122"/>
+                <a:cs typeface="Calibri" pitchFamily="34" charset="-120"/>
+              </a:rPr>
+              <a:t>"Word scores are worse than chance" was an artefact: our rewordings changed 5–10× more text than our mistakes</a:t>
+            </a:r>
+            <a:endParaRPr lang="en-US" sz="1200" dirty="0"/>
+          </a:p>
+        </p:txBody>
+      </p:sp>
+      <p:sp>
+        <p:nvSpPr>
+          <p:cNvPr id="8" name="Shape 6"/>
+          <p:cNvSpPr/>
+          <p:nvPr/>
+        </p:nvSpPr>
+        <p:spPr>
+          <a:xfrm>
+            <a:off x="548640" y="1773936"/>
+            <a:ext cx="8046720" cy="585216"/>
+          </a:xfrm>
+          <a:prstGeom prst="roundRect">
+            <a:avLst>
+              <a:gd name="adj" fmla="val 12500"/>
+            </a:avLst>
+          </a:prstGeom>
+          <a:solidFill>
+            <a:srgbClr val="E6F1F6"/>
+          </a:solidFill>
+          <a:ln w="12700">
+            <a:solidFill>
+              <a:srgbClr val="E6F1F6"/>
+            </a:solidFill>
+            <a:prstDash val="solid"/>
+          </a:ln>
+        </p:spPr>
+      </p:sp>
+      <p:sp>
+        <p:nvSpPr>
+          <p:cNvPr id="9" name="Shape 7"/>
+          <p:cNvSpPr/>
+          <p:nvPr/>
+        </p:nvSpPr>
+        <p:spPr>
+          <a:xfrm>
+            <a:off x="685800" y="1901952"/>
+            <a:ext cx="329184" cy="329184"/>
+          </a:xfrm>
+          <a:prstGeom prst="ellipse">
+            <a:avLst/>
+          </a:prstGeom>
+          <a:solidFill>
+            <a:srgbClr val="E8505B"/>
+          </a:solidFill>
+          <a:ln w="12700">
+            <a:solidFill>
+              <a:srgbClr val="E8505B"/>
+            </a:solidFill>
+            <a:prstDash val="solid"/>
+          </a:ln>
+        </p:spPr>
+      </p:sp>
+      <p:sp>
+        <p:nvSpPr>
+          <p:cNvPr id="10" name="Text 8"/>
+          <p:cNvSpPr txBox="1"/>
+          <p:nvPr/>
+        </p:nvSpPr>
+        <p:spPr>
+          <a:xfrm>
+            <a:off x="685800" y="1901952"/>
+            <a:ext cx="329184" cy="329184"/>
+          </a:xfrm>
+          <a:prstGeom prst="rect">
+            <a:avLst/>
+          </a:prstGeom>
+          <a:noFill/>
+          <a:ln/>
+        </p:spPr>
+        <p:txBody>
+          <a:bodyPr wrap="square" lIns="0" tIns="0" rIns="0" bIns="0" rtlCol="0" anchor="ctr"/>
+          <a:lstStyle/>
+          <a:p>
+            <a:pPr algn="ctr" indent="0" marL="0">
+              <a:buNone/>
+            </a:pPr>
+            <a:r>
+              <a:rPr lang="en-US" sz="1400" b="1" dirty="0">
+                <a:solidFill>
+                  <a:srgbClr val="FFFFFF"/>
+                </a:solidFill>
+                <a:latin typeface="Calibri" pitchFamily="34" charset="0"/>
+                <a:ea typeface="Calibri" pitchFamily="34" charset="-122"/>
+                <a:cs typeface="Calibri" pitchFamily="34" charset="-120"/>
+              </a:rPr>
+              <a:t>!</a:t>
+            </a:r>
+            <a:endParaRPr lang="en-US" sz="1400" dirty="0"/>
+          </a:p>
+        </p:txBody>
+      </p:sp>
+      <p:sp>
+        <p:nvSpPr>
+          <p:cNvPr id="11" name="Text 9"/>
+          <p:cNvSpPr txBox="1"/>
+          <p:nvPr/>
+        </p:nvSpPr>
+        <p:spPr>
+          <a:xfrm>
+            <a:off x="1143000" y="1773936"/>
+            <a:ext cx="2194560" cy="585216"/>
+          </a:xfrm>
+          <a:prstGeom prst="rect">
+            <a:avLst/>
+          </a:prstGeom>
+          <a:noFill/>
+          <a:ln/>
+        </p:spPr>
+        <p:txBody>
+          <a:bodyPr wrap="square" lIns="0" tIns="0" rIns="0" bIns="0" rtlCol="0" anchor="ctr"/>
+          <a:lstStyle/>
+          <a:p>
+            <a:pPr indent="0" marL="0">
+              <a:buNone/>
+            </a:pPr>
+            <a:r>
+              <a:rPr lang="en-US" sz="1400" b="1" dirty="0">
+                <a:solidFill>
+                  <a:srgbClr val="21295C"/>
+                </a:solidFill>
+                <a:latin typeface="Calibri" pitchFamily="34" charset="0"/>
+                <a:ea typeface="Calibri" pitchFamily="34" charset="-122"/>
+                <a:cs typeface="Calibri" pitchFamily="34" charset="-120"/>
+              </a:rPr>
+              <a:t>Judge number dropped</a:t>
+            </a:r>
+            <a:endParaRPr lang="en-US" sz="1400" dirty="0"/>
+          </a:p>
+        </p:txBody>
+      </p:sp>
+      <p:sp>
+        <p:nvSpPr>
+          <p:cNvPr id="12" name="Text 10"/>
+          <p:cNvSpPr txBox="1"/>
+          <p:nvPr/>
+        </p:nvSpPr>
+        <p:spPr>
+          <a:xfrm>
+            <a:off x="3383280" y="1773936"/>
+            <a:ext cx="5120640" cy="585216"/>
+          </a:xfrm>
+          <a:prstGeom prst="rect">
+            <a:avLst/>
+          </a:prstGeom>
+          <a:noFill/>
+          <a:ln/>
+        </p:spPr>
+        <p:txBody>
+          <a:bodyPr wrap="square" lIns="0" tIns="0" rIns="0" bIns="0" rtlCol="0" anchor="ctr"/>
+          <a:lstStyle/>
+          <a:p>
+            <a:pPr indent="0" marL="0">
+              <a:buNone/>
+            </a:pPr>
+            <a:r>
+              <a:rPr lang="en-US" sz="1200" dirty="0">
+                <a:solidFill>
+                  <a:srgbClr val="1F2937"/>
+                </a:solidFill>
+                <a:latin typeface="Calibri" pitchFamily="34" charset="0"/>
+                <a:ea typeface="Calibri" pitchFamily="34" charset="-122"/>
+                <a:cs typeface="Calibri" pitchFamily="34" charset="-120"/>
+              </a:rPr>
+              <a:t>BrEaST 0.86 on dev became 0.67 on the locked test set</a:t>
+            </a:r>
+            <a:endParaRPr lang="en-US" sz="1200" dirty="0"/>
+          </a:p>
+        </p:txBody>
+      </p:sp>
+      <p:sp>
+        <p:nvSpPr>
+          <p:cNvPr id="13" name="Shape 11"/>
+          <p:cNvSpPr/>
+          <p:nvPr/>
+        </p:nvSpPr>
+        <p:spPr>
+          <a:xfrm>
+            <a:off x="548640" y="2450592"/>
+            <a:ext cx="8046720" cy="585216"/>
+          </a:xfrm>
+          <a:prstGeom prst="roundRect">
+            <a:avLst>
+              <a:gd name="adj" fmla="val 12500"/>
+            </a:avLst>
+          </a:prstGeom>
+          <a:solidFill>
+            <a:srgbClr val="E6F1F6"/>
+          </a:solidFill>
+          <a:ln w="12700">
+            <a:solidFill>
+              <a:srgbClr val="E6F1F6"/>
+            </a:solidFill>
+            <a:prstDash val="solid"/>
+          </a:ln>
+        </p:spPr>
+      </p:sp>
+      <p:sp>
+        <p:nvSpPr>
+          <p:cNvPr id="14" name="Shape 12"/>
+          <p:cNvSpPr/>
+          <p:nvPr/>
+        </p:nvSpPr>
+        <p:spPr>
+          <a:xfrm>
+            <a:off x="685800" y="2578608"/>
+            <a:ext cx="329184" cy="329184"/>
+          </a:xfrm>
+          <a:prstGeom prst="ellipse">
+            <a:avLst/>
+          </a:prstGeom>
+          <a:solidFill>
+            <a:srgbClr val="E8505B"/>
+          </a:solidFill>
+          <a:ln w="12700">
+            <a:solidFill>
+              <a:srgbClr val="E8505B"/>
+            </a:solidFill>
+            <a:prstDash val="solid"/>
+          </a:ln>
+        </p:spPr>
+      </p:sp>
+      <p:sp>
+        <p:nvSpPr>
+          <p:cNvPr id="15" name="Text 13"/>
+          <p:cNvSpPr txBox="1"/>
+          <p:nvPr/>
+        </p:nvSpPr>
+        <p:spPr>
+          <a:xfrm>
+            <a:off x="685800" y="2578608"/>
+            <a:ext cx="329184" cy="329184"/>
+          </a:xfrm>
+          <a:prstGeom prst="rect">
+            <a:avLst/>
+          </a:prstGeom>
+          <a:noFill/>
+          <a:ln/>
+        </p:spPr>
+        <p:txBody>
+          <a:bodyPr wrap="square" lIns="0" tIns="0" rIns="0" bIns="0" rtlCol="0" anchor="ctr"/>
+          <a:lstStyle/>
+          <a:p>
+            <a:pPr algn="ctr" indent="0" marL="0">
+              <a:buNone/>
+            </a:pPr>
+            <a:r>
+              <a:rPr lang="en-US" sz="1400" b="1" dirty="0">
+                <a:solidFill>
+                  <a:srgbClr val="FFFFFF"/>
+                </a:solidFill>
+                <a:latin typeface="Calibri" pitchFamily="34" charset="0"/>
+                <a:ea typeface="Calibri" pitchFamily="34" charset="-122"/>
+                <a:cs typeface="Calibri" pitchFamily="34" charset="-120"/>
+              </a:rPr>
+              <a:t>!</a:t>
+            </a:r>
+            <a:endParaRPr lang="en-US" sz="1400" dirty="0"/>
+          </a:p>
+        </p:txBody>
+      </p:sp>
+      <p:sp>
+        <p:nvSpPr>
+          <p:cNvPr id="16" name="Text 14"/>
+          <p:cNvSpPr txBox="1"/>
+          <p:nvPr/>
+        </p:nvSpPr>
+        <p:spPr>
+          <a:xfrm>
+            <a:off x="1143000" y="2450592"/>
+            <a:ext cx="2194560" cy="585216"/>
+          </a:xfrm>
+          <a:prstGeom prst="rect">
+            <a:avLst/>
+          </a:prstGeom>
+          <a:noFill/>
+          <a:ln/>
+        </p:spPr>
+        <p:txBody>
+          <a:bodyPr wrap="square" lIns="0" tIns="0" rIns="0" bIns="0" rtlCol="0" anchor="ctr"/>
+          <a:lstStyle/>
+          <a:p>
+            <a:pPr indent="0" marL="0">
+              <a:buNone/>
+            </a:pPr>
+            <a:r>
+              <a:rPr lang="en-US" sz="1400" b="1" dirty="0">
+                <a:solidFill>
+                  <a:srgbClr val="21295C"/>
+                </a:solidFill>
+                <a:latin typeface="Calibri" pitchFamily="34" charset="0"/>
+                <a:ea typeface="Calibri" pitchFamily="34" charset="-122"/>
+                <a:cs typeface="Calibri" pitchFamily="34" charset="-120"/>
+              </a:rPr>
+              <a:t>Bugs found and fixed</a:t>
+            </a:r>
+            <a:endParaRPr lang="en-US" sz="1400" dirty="0"/>
+          </a:p>
+        </p:txBody>
+      </p:sp>
+      <p:sp>
+        <p:nvSpPr>
+          <p:cNvPr id="17" name="Text 15"/>
+          <p:cNvSpPr txBox="1"/>
+          <p:nvPr/>
+        </p:nvSpPr>
+        <p:spPr>
+          <a:xfrm>
+            <a:off x="3383280" y="2450592"/>
+            <a:ext cx="5120640" cy="585216"/>
+          </a:xfrm>
+          <a:prstGeom prst="rect">
+            <a:avLst/>
+          </a:prstGeom>
+          <a:noFill/>
+          <a:ln/>
+        </p:spPr>
+        <p:txBody>
+          <a:bodyPr wrap="square" lIns="0" tIns="0" rIns="0" bIns="0" rtlCol="0" anchor="ctr"/>
+          <a:lstStyle/>
+          <a:p>
+            <a:pPr indent="0" marL="0">
+              <a:buNone/>
+            </a:pPr>
+            <a:r>
+              <a:rPr lang="en-US" sz="1200" dirty="0">
+                <a:solidFill>
+                  <a:srgbClr val="1F2937"/>
+                </a:solidFill>
+                <a:latin typeface="Calibri" pitchFamily="34" charset="0"/>
+                <a:ea typeface="Calibri" pitchFamily="34" charset="-122"/>
+                <a:cs typeface="Calibri" pitchFamily="34" charset="-120"/>
+              </a:rPr>
+              <a:t>BUS-BRA "single breast" wording, extractor decimal bug, copied option lists; reruns kept</a:t>
+            </a:r>
+            <a:endParaRPr lang="en-US" sz="1200" dirty="0"/>
+          </a:p>
+        </p:txBody>
+      </p:sp>
+      <p:sp>
+        <p:nvSpPr>
+          <p:cNvPr id="18" name="Shape 16"/>
+          <p:cNvSpPr/>
+          <p:nvPr/>
+        </p:nvSpPr>
+        <p:spPr>
+          <a:xfrm>
+            <a:off x="548640" y="3127248"/>
+            <a:ext cx="8046720" cy="585216"/>
+          </a:xfrm>
+          <a:prstGeom prst="roundRect">
+            <a:avLst>
+              <a:gd name="adj" fmla="val 12500"/>
+            </a:avLst>
+          </a:prstGeom>
+          <a:solidFill>
+            <a:srgbClr val="E6F1F6"/>
+          </a:solidFill>
+          <a:ln w="12700">
+            <a:solidFill>
+              <a:srgbClr val="E6F1F6"/>
+            </a:solidFill>
+            <a:prstDash val="solid"/>
+          </a:ln>
+        </p:spPr>
+      </p:sp>
+      <p:sp>
+        <p:nvSpPr>
+          <p:cNvPr id="19" name="Shape 17"/>
+          <p:cNvSpPr/>
+          <p:nvPr/>
+        </p:nvSpPr>
+        <p:spPr>
+          <a:xfrm>
+            <a:off x="685800" y="3255264"/>
+            <a:ext cx="329184" cy="329184"/>
+          </a:xfrm>
+          <a:prstGeom prst="ellipse">
+            <a:avLst/>
+          </a:prstGeom>
+          <a:solidFill>
+            <a:srgbClr val="E8505B"/>
+          </a:solidFill>
+          <a:ln w="12700">
+            <a:solidFill>
+              <a:srgbClr val="E8505B"/>
+            </a:solidFill>
+            <a:prstDash val="solid"/>
+          </a:ln>
+        </p:spPr>
+      </p:sp>
+      <p:sp>
+        <p:nvSpPr>
+          <p:cNvPr id="20" name="Text 18"/>
+          <p:cNvSpPr txBox="1"/>
+          <p:nvPr/>
+        </p:nvSpPr>
+        <p:spPr>
+          <a:xfrm>
+            <a:off x="685800" y="3255264"/>
+            <a:ext cx="329184" cy="329184"/>
+          </a:xfrm>
+          <a:prstGeom prst="rect">
+            <a:avLst/>
+          </a:prstGeom>
+          <a:noFill/>
+          <a:ln/>
+        </p:spPr>
+        <p:txBody>
+          <a:bodyPr wrap="square" lIns="0" tIns="0" rIns="0" bIns="0" rtlCol="0" anchor="ctr"/>
+          <a:lstStyle/>
+          <a:p>
+            <a:pPr algn="ctr" indent="0" marL="0">
+              <a:buNone/>
+            </a:pPr>
+            <a:r>
+              <a:rPr lang="en-US" sz="1400" b="1" dirty="0">
+                <a:solidFill>
+                  <a:srgbClr val="FFFFFF"/>
+                </a:solidFill>
+                <a:latin typeface="Calibri" pitchFamily="34" charset="0"/>
+                <a:ea typeface="Calibri" pitchFamily="34" charset="-122"/>
+                <a:cs typeface="Calibri" pitchFamily="34" charset="-120"/>
+              </a:rPr>
+              <a:t>!</a:t>
+            </a:r>
+            <a:endParaRPr lang="en-US" sz="1400" dirty="0"/>
+          </a:p>
+        </p:txBody>
+      </p:sp>
+      <p:sp>
+        <p:nvSpPr>
+          <p:cNvPr id="21" name="Text 19"/>
+          <p:cNvSpPr txBox="1"/>
+          <p:nvPr/>
+        </p:nvSpPr>
+        <p:spPr>
+          <a:xfrm>
+            <a:off x="1143000" y="3127248"/>
+            <a:ext cx="2194560" cy="585216"/>
+          </a:xfrm>
+          <a:prstGeom prst="rect">
+            <a:avLst/>
+          </a:prstGeom>
+          <a:noFill/>
+          <a:ln/>
+        </p:spPr>
+        <p:txBody>
+          <a:bodyPr wrap="square" lIns="0" tIns="0" rIns="0" bIns="0" rtlCol="0" anchor="ctr"/>
+          <a:lstStyle/>
+          <a:p>
+            <a:pPr indent="0" marL="0">
+              <a:buNone/>
+            </a:pPr>
+            <a:r>
+              <a:rPr lang="en-US" sz="1400" b="1" dirty="0">
+                <a:solidFill>
+                  <a:srgbClr val="21295C"/>
+                </a:solidFill>
+                <a:latin typeface="Calibri" pitchFamily="34" charset="0"/>
+                <a:ea typeface="Calibri" pitchFamily="34" charset="-122"/>
+                <a:cs typeface="Calibri" pitchFamily="34" charset="-120"/>
+              </a:rPr>
+              <a:t>Thin real data</a:t>
+            </a:r>
+            <a:endParaRPr lang="en-US" sz="1400" dirty="0"/>
+          </a:p>
+        </p:txBody>
+      </p:sp>
+      <p:sp>
+        <p:nvSpPr>
+          <p:cNvPr id="22" name="Text 20"/>
+          <p:cNvSpPr txBox="1"/>
+          <p:nvPr/>
+        </p:nvSpPr>
+        <p:spPr>
+          <a:xfrm>
+            <a:off x="3383280" y="3127248"/>
+            <a:ext cx="5120640" cy="585216"/>
+          </a:xfrm>
+          <a:prstGeom prst="rect">
+            <a:avLst/>
+          </a:prstGeom>
+          <a:noFill/>
+          <a:ln/>
+        </p:spPr>
+        <p:txBody>
+          <a:bodyPr wrap="square" lIns="0" tIns="0" rIns="0" bIns="0" rtlCol="0" anchor="ctr"/>
+          <a:lstStyle/>
+          <a:p>
+            <a:pPr indent="0" marL="0">
+              <a:buNone/>
+            </a:pPr>
+            <a:r>
+              <a:rPr lang="en-US" sz="1200" dirty="0">
+                <a:solidFill>
+                  <a:srgbClr val="1F2937"/>
+                </a:solidFill>
+                <a:latin typeface="Calibri" pitchFamily="34" charset="0"/>
+                <a:ea typeface="Calibri" pitchFamily="34" charset="-122"/>
+                <a:cs typeface="Calibri" pitchFamily="34" charset="-120"/>
+              </a:rPr>
+              <a:t>Only 101 of 427 HiSBreast exams passed our translation checks</a:t>
+            </a:r>
+            <a:endParaRPr lang="en-US" sz="1200" dirty="0"/>
+          </a:p>
+        </p:txBody>
+      </p:sp>
+      <p:sp>
+        <p:nvSpPr>
+          <p:cNvPr id="23" name="Shape 21"/>
+          <p:cNvSpPr/>
+          <p:nvPr/>
+        </p:nvSpPr>
+        <p:spPr>
+          <a:xfrm>
+            <a:off x="548640" y="3803904"/>
+            <a:ext cx="8046720" cy="585216"/>
+          </a:xfrm>
+          <a:prstGeom prst="roundRect">
+            <a:avLst>
+              <a:gd name="adj" fmla="val 12500"/>
+            </a:avLst>
+          </a:prstGeom>
+          <a:solidFill>
+            <a:srgbClr val="E6F1F6"/>
+          </a:solidFill>
+          <a:ln w="12700">
+            <a:solidFill>
+              <a:srgbClr val="E6F1F6"/>
+            </a:solidFill>
+            <a:prstDash val="solid"/>
+          </a:ln>
+        </p:spPr>
+      </p:sp>
+      <p:sp>
+        <p:nvSpPr>
+          <p:cNvPr id="24" name="Shape 22"/>
+          <p:cNvSpPr/>
+          <p:nvPr/>
+        </p:nvSpPr>
+        <p:spPr>
+          <a:xfrm>
+            <a:off x="685800" y="3931920"/>
+            <a:ext cx="329184" cy="329184"/>
+          </a:xfrm>
+          <a:prstGeom prst="ellipse">
+            <a:avLst/>
+          </a:prstGeom>
+          <a:solidFill>
+            <a:srgbClr val="E8505B"/>
+          </a:solidFill>
+          <a:ln w="12700">
+            <a:solidFill>
+              <a:srgbClr val="E8505B"/>
+            </a:solidFill>
+            <a:prstDash val="solid"/>
+          </a:ln>
+        </p:spPr>
+      </p:sp>
+      <p:sp>
+        <p:nvSpPr>
+          <p:cNvPr id="25" name="Text 23"/>
+          <p:cNvSpPr txBox="1"/>
+          <p:nvPr/>
+        </p:nvSpPr>
+        <p:spPr>
+          <a:xfrm>
+            <a:off x="685800" y="3931920"/>
+            <a:ext cx="329184" cy="329184"/>
+          </a:xfrm>
+          <a:prstGeom prst="rect">
+            <a:avLst/>
+          </a:prstGeom>
+          <a:noFill/>
+          <a:ln/>
+        </p:spPr>
+        <p:txBody>
+          <a:bodyPr wrap="square" lIns="0" tIns="0" rIns="0" bIns="0" rtlCol="0" anchor="ctr"/>
+          <a:lstStyle/>
+          <a:p>
+            <a:pPr algn="ctr" indent="0" marL="0">
+              <a:buNone/>
+            </a:pPr>
+            <a:r>
+              <a:rPr lang="en-US" sz="1400" b="1" dirty="0">
+                <a:solidFill>
+                  <a:srgbClr val="FFFFFF"/>
+                </a:solidFill>
+                <a:latin typeface="Calibri" pitchFamily="34" charset="0"/>
+                <a:ea typeface="Calibri" pitchFamily="34" charset="-122"/>
+                <a:cs typeface="Calibri" pitchFamily="34" charset="-120"/>
+              </a:rPr>
+              <a:t>!</a:t>
+            </a:r>
+            <a:endParaRPr lang="en-US" sz="1400" dirty="0"/>
+          </a:p>
+        </p:txBody>
+      </p:sp>
+      <p:sp>
+        <p:nvSpPr>
+          <p:cNvPr id="26" name="Text 24"/>
+          <p:cNvSpPr txBox="1"/>
+          <p:nvPr/>
+        </p:nvSpPr>
+        <p:spPr>
+          <a:xfrm>
+            <a:off x="1143000" y="3803904"/>
+            <a:ext cx="2194560" cy="585216"/>
+          </a:xfrm>
+          <a:prstGeom prst="rect">
+            <a:avLst/>
+          </a:prstGeom>
+          <a:noFill/>
+          <a:ln/>
+        </p:spPr>
+        <p:txBody>
+          <a:bodyPr wrap="square" lIns="0" tIns="0" rIns="0" bIns="0" rtlCol="0" anchor="ctr"/>
+          <a:lstStyle/>
+          <a:p>
+            <a:pPr indent="0" marL="0">
+              <a:buNone/>
+            </a:pPr>
+            <a:r>
+              <a:rPr lang="en-US" sz="1400" b="1" dirty="0">
+                <a:solidFill>
+                  <a:srgbClr val="21295C"/>
+                </a:solidFill>
+                <a:latin typeface="Calibri" pitchFamily="34" charset="0"/>
+                <a:ea typeface="Calibri" pitchFamily="34" charset="-122"/>
+                <a:cs typeface="Calibri" pitchFamily="34" charset="-120"/>
+              </a:rPr>
+              <a:t>Not run</a:t>
+            </a:r>
+            <a:endParaRPr lang="en-US" sz="1400" dirty="0"/>
+          </a:p>
+        </p:txBody>
+      </p:sp>
+      <p:sp>
+        <p:nvSpPr>
+          <p:cNvPr id="27" name="Text 25"/>
+          <p:cNvSpPr txBox="1"/>
+          <p:nvPr/>
+        </p:nvSpPr>
+        <p:spPr>
+          <a:xfrm>
+            <a:off x="3383280" y="3803904"/>
+            <a:ext cx="5120640" cy="585216"/>
+          </a:xfrm>
+          <a:prstGeom prst="rect">
+            <a:avLst/>
+          </a:prstGeom>
+          <a:noFill/>
+          <a:ln/>
+        </p:spPr>
+        <p:txBody>
+          <a:bodyPr wrap="square" lIns="0" tIns="0" rIns="0" bIns="0" rtlCol="0" anchor="ctr"/>
+          <a:lstStyle/>
+          <a:p>
+            <a:pPr indent="0" marL="0">
+              <a:buNone/>
+            </a:pPr>
+            <a:r>
+              <a:rPr lang="en-US" sz="1200" dirty="0">
+                <a:solidFill>
+                  <a:srgbClr val="1F2937"/>
+                </a:solidFill>
+                <a:latin typeface="Calibri" pitchFamily="34" charset="0"/>
+                <a:ea typeface="Calibri" pitchFamily="34" charset="-122"/>
+                <a:cs typeface="Calibri" pitchFamily="34" charset="-120"/>
+              </a:rPr>
+              <a:t>GREEN, Claude judge, Jev, LLaVA-Med, clinician review</a:t>
+            </a:r>
+            <a:endParaRPr lang="en-US" sz="1200" dirty="0"/>
+          </a:p>
+        </p:txBody>
+      </p:sp>
+      <p:sp>
+        <p:nvSpPr>
+          <p:cNvPr id="28" name="Text 26"/>
+          <p:cNvSpPr txBox="1"/>
+          <p:nvPr/>
+        </p:nvSpPr>
+        <p:spPr>
+          <a:xfrm>
+            <a:off x="548640" y="4754880"/>
+            <a:ext cx="8046720" cy="228600"/>
+          </a:xfrm>
+          <a:prstGeom prst="rect">
+            <a:avLst/>
+          </a:prstGeom>
+          <a:noFill/>
+          <a:ln/>
+        </p:spPr>
+        <p:txBody>
+          <a:bodyPr wrap="square" lIns="0" tIns="0" rIns="0" bIns="0" rtlCol="0" anchor="ctr"/>
+          <a:lstStyle/>
+          <a:p>
+            <a:pPr indent="0" marL="0">
+              <a:buNone/>
+            </a:pPr>
+            <a:r>
+              <a:rPr lang="en-US" sz="1000" dirty="0">
+                <a:solidFill>
+                  <a:srgbClr val="5B6678"/>
+                </a:solidFill>
+                <a:latin typeface="Calibri" pitchFamily="34" charset="0"/>
+                <a:ea typeface="Calibri" pitchFamily="34" charset="-122"/>
+                <a:cs typeface="Calibri" pitchFamily="34" charset="-120"/>
+              </a:rPr>
+              <a:t>Ultrasound report scorers · plain-language summary · 8/9</a:t>
+            </a:r>
+            <a:endParaRPr lang="en-US" sz="1000" dirty="0"/>
+          </a:p>
+        </p:txBody>
+      </p:sp>
+    </p:spTree>
+  </p:cSld>
+  <p:clrMapOvr>
+    <a:masterClrMapping/>
+  </p:clrMapOvr>
+</p:sld>
+</file>
+
+<file path=ppt/slides/slide9.xml><?xml version="1.0" encoding="utf-8"?>
+<p:sld xmlns:a="http://schemas.openxmlformats.org/drawingml/2006/main" xmlns:r="http://schemas.openxmlformats.org/officeDocument/2006/relationships" xmlns:p="http://schemas.openxmlformats.org/presentationml/2006/main">
+  <p:cSld name="Slide 9">
     <p:bg>
       <p:bgPr>
         <a:solidFill>

--- a/usmeta/PROJECT_SLIDES.pptx
+++ b/usmeta/PROJECT_SLIDES.pptx
@@ -3102,7 +3102,7 @@
                       </a:endParaRPr>
                     </a:p>
                   </a:txBody>
-                  <a:tcPr marL="5486400" marR="5486400" marT="0" marB="0" anchor="ctr">
+                  <a:tcPr marL="73152" marR="73152" marT="0" marB="0" anchor="ctr">
                     <a:lnL w="0" cap="flat" cmpd="sng" algn="ctr">
                       <a:noFill/>
                     </a:lnL>
@@ -3146,7 +3146,7 @@
                       </a:endParaRPr>
                     </a:p>
                   </a:txBody>
-                  <a:tcPr marL="5486400" marR="5486400" marT="0" marB="0" anchor="ctr">
+                  <a:tcPr marL="73152" marR="73152" marT="0" marB="0" anchor="ctr">
                     <a:lnL w="0" cap="flat" cmpd="sng" algn="ctr">
                       <a:noFill/>
                     </a:lnL>
@@ -3190,7 +3190,7 @@
                       </a:endParaRPr>
                     </a:p>
                   </a:txBody>
-                  <a:tcPr marL="5486400" marR="5486400" marT="0" marB="0" anchor="ctr">
+                  <a:tcPr marL="73152" marR="73152" marT="0" marB="0" anchor="ctr">
                     <a:lnL w="0" cap="flat" cmpd="sng" algn="ctr">
                       <a:noFill/>
                     </a:lnL>
@@ -3234,7 +3234,7 @@
                       </a:endParaRPr>
                     </a:p>
                   </a:txBody>
-                  <a:tcPr marL="5486400" marR="5486400" marT="0" marB="0" anchor="ctr">
+                  <a:tcPr marL="73152" marR="73152" marT="0" marB="0" anchor="ctr">
                     <a:lnL w="0" cap="flat" cmpd="sng" algn="ctr">
                       <a:noFill/>
                     </a:lnL>
@@ -3280,7 +3280,7 @@
                       </a:endParaRPr>
                     </a:p>
                   </a:txBody>
-                  <a:tcPr marL="5486400" marR="5486400" marT="0" marB="0" anchor="ctr">
+                  <a:tcPr marL="73152" marR="73152" marT="0" marB="0" anchor="ctr">
                     <a:lnL w="0" cap="flat" cmpd="sng" algn="ctr">
                       <a:noFill/>
                     </a:lnL>
@@ -3324,7 +3324,7 @@
                       </a:endParaRPr>
                     </a:p>
                   </a:txBody>
-                  <a:tcPr marL="5486400" marR="5486400" marT="0" marB="0" anchor="ctr">
+                  <a:tcPr marL="73152" marR="73152" marT="0" marB="0" anchor="ctr">
                     <a:lnL w="0" cap="flat" cmpd="sng" algn="ctr">
                       <a:noFill/>
                     </a:lnL>
@@ -3368,7 +3368,7 @@
                       </a:endParaRPr>
                     </a:p>
                   </a:txBody>
-                  <a:tcPr marL="5486400" marR="5486400" marT="0" marB="0" anchor="ctr">
+                  <a:tcPr marL="73152" marR="73152" marT="0" marB="0" anchor="ctr">
                     <a:lnL w="0" cap="flat" cmpd="sng" algn="ctr">
                       <a:noFill/>
                     </a:lnL>
@@ -3412,7 +3412,7 @@
                       </a:endParaRPr>
                     </a:p>
                   </a:txBody>
-                  <a:tcPr marL="5486400" marR="5486400" marT="0" marB="0" anchor="ctr">
+                  <a:tcPr marL="73152" marR="73152" marT="0" marB="0" anchor="ctr">
                     <a:lnL w="0" cap="flat" cmpd="sng" algn="ctr">
                       <a:noFill/>
                     </a:lnL>
@@ -3458,7 +3458,7 @@
                       </a:endParaRPr>
                     </a:p>
                   </a:txBody>
-                  <a:tcPr marL="5486400" marR="5486400" marT="0" marB="0" anchor="ctr">
+                  <a:tcPr marL="73152" marR="73152" marT="0" marB="0" anchor="ctr">
                     <a:lnL w="0" cap="flat" cmpd="sng" algn="ctr">
                       <a:noFill/>
                     </a:lnL>
@@ -3502,7 +3502,7 @@
                       </a:endParaRPr>
                     </a:p>
                   </a:txBody>
-                  <a:tcPr marL="5486400" marR="5486400" marT="0" marB="0" anchor="ctr">
+                  <a:tcPr marL="73152" marR="73152" marT="0" marB="0" anchor="ctr">
                     <a:lnL w="0" cap="flat" cmpd="sng" algn="ctr">
                       <a:noFill/>
                     </a:lnL>
@@ -3546,7 +3546,7 @@
                       </a:endParaRPr>
                     </a:p>
                   </a:txBody>
-                  <a:tcPr marL="5486400" marR="5486400" marT="0" marB="0" anchor="ctr">
+                  <a:tcPr marL="73152" marR="73152" marT="0" marB="0" anchor="ctr">
                     <a:lnL w="0" cap="flat" cmpd="sng" algn="ctr">
                       <a:noFill/>
                     </a:lnL>
@@ -3590,7 +3590,7 @@
                       </a:endParaRPr>
                     </a:p>
                   </a:txBody>
-                  <a:tcPr marL="5486400" marR="5486400" marT="0" marB="0" anchor="ctr">
+                  <a:tcPr marL="73152" marR="73152" marT="0" marB="0" anchor="ctr">
                     <a:lnL w="0" cap="flat" cmpd="sng" algn="ctr">
                       <a:noFill/>
                     </a:lnL>
@@ -3636,7 +3636,7 @@
                       </a:endParaRPr>
                     </a:p>
                   </a:txBody>
-                  <a:tcPr marL="5486400" marR="5486400" marT="0" marB="0" anchor="ctr">
+                  <a:tcPr marL="73152" marR="73152" marT="0" marB="0" anchor="ctr">
                     <a:lnL w="0" cap="flat" cmpd="sng" algn="ctr">
                       <a:noFill/>
                     </a:lnL>
@@ -3680,7 +3680,7 @@
                       </a:endParaRPr>
                     </a:p>
                   </a:txBody>
-                  <a:tcPr marL="5486400" marR="5486400" marT="0" marB="0" anchor="ctr">
+                  <a:tcPr marL="73152" marR="73152" marT="0" marB="0" anchor="ctr">
                     <a:lnL w="0" cap="flat" cmpd="sng" algn="ctr">
                       <a:noFill/>
                     </a:lnL>
@@ -3724,7 +3724,7 @@
                       </a:endParaRPr>
                     </a:p>
                   </a:txBody>
-                  <a:tcPr marL="5486400" marR="5486400" marT="0" marB="0" anchor="ctr">
+                  <a:tcPr marL="73152" marR="73152" marT="0" marB="0" anchor="ctr">
                     <a:lnL w="0" cap="flat" cmpd="sng" algn="ctr">
                       <a:noFill/>
                     </a:lnL>
@@ -3768,7 +3768,7 @@
                       </a:endParaRPr>
                     </a:p>
                   </a:txBody>
-                  <a:tcPr marL="5486400" marR="5486400" marT="0" marB="0" anchor="ctr">
+                  <a:tcPr marL="73152" marR="73152" marT="0" marB="0" anchor="ctr">
                     <a:lnL w="0" cap="flat" cmpd="sng" algn="ctr">
                       <a:noFill/>
                     </a:lnL>
@@ -3814,7 +3814,7 @@
                       </a:endParaRPr>
                     </a:p>
                   </a:txBody>
-                  <a:tcPr marL="5486400" marR="5486400" marT="0" marB="0" anchor="ctr">
+                  <a:tcPr marL="73152" marR="73152" marT="0" marB="0" anchor="ctr">
                     <a:lnL w="0" cap="flat" cmpd="sng" algn="ctr">
                       <a:noFill/>
                     </a:lnL>
@@ -3858,7 +3858,7 @@
                       </a:endParaRPr>
                     </a:p>
                   </a:txBody>
-                  <a:tcPr marL="5486400" marR="5486400" marT="0" marB="0" anchor="ctr">
+                  <a:tcPr marL="73152" marR="73152" marT="0" marB="0" anchor="ctr">
                     <a:lnL w="0" cap="flat" cmpd="sng" algn="ctr">
                       <a:noFill/>
                     </a:lnL>
@@ -3902,7 +3902,7 @@
                       </a:endParaRPr>
                     </a:p>
                   </a:txBody>
-                  <a:tcPr marL="5486400" marR="5486400" marT="0" marB="0" anchor="ctr">
+                  <a:tcPr marL="73152" marR="73152" marT="0" marB="0" anchor="ctr">
                     <a:lnL w="0" cap="flat" cmpd="sng" algn="ctr">
                       <a:noFill/>
                     </a:lnL>
@@ -3946,7 +3946,7 @@
                       </a:endParaRPr>
                     </a:p>
                   </a:txBody>
-                  <a:tcPr marL="5486400" marR="5486400" marT="0" marB="0" anchor="ctr">
+                  <a:tcPr marL="73152" marR="73152" marT="0" marB="0" anchor="ctr">
                     <a:lnL w="0" cap="flat" cmpd="sng" algn="ctr">
                       <a:noFill/>
                     </a:lnL>
@@ -3992,7 +3992,7 @@
                       </a:endParaRPr>
                     </a:p>
                   </a:txBody>
-                  <a:tcPr marL="5486400" marR="5486400" marT="0" marB="0" anchor="ctr">
+                  <a:tcPr marL="73152" marR="73152" marT="0" marB="0" anchor="ctr">
                     <a:lnL w="0" cap="flat" cmpd="sng" algn="ctr">
                       <a:noFill/>
                     </a:lnL>
@@ -4036,7 +4036,7 @@
                       </a:endParaRPr>
                     </a:p>
                   </a:txBody>
-                  <a:tcPr marL="5486400" marR="5486400" marT="0" marB="0" anchor="ctr">
+                  <a:tcPr marL="73152" marR="73152" marT="0" marB="0" anchor="ctr">
                     <a:lnL w="0" cap="flat" cmpd="sng" algn="ctr">
                       <a:noFill/>
                     </a:lnL>
@@ -4080,7 +4080,7 @@
                       </a:endParaRPr>
                     </a:p>
                   </a:txBody>
-                  <a:tcPr marL="5486400" marR="5486400" marT="0" marB="0" anchor="ctr">
+                  <a:tcPr marL="73152" marR="73152" marT="0" marB="0" anchor="ctr">
                     <a:lnL w="0" cap="flat" cmpd="sng" algn="ctr">
                       <a:noFill/>
                     </a:lnL>
@@ -4124,7 +4124,7 @@
                       </a:endParaRPr>
                     </a:p>
                   </a:txBody>
-                  <a:tcPr marL="5486400" marR="5486400" marT="0" marB="0" anchor="ctr">
+                  <a:tcPr marL="73152" marR="73152" marT="0" marB="0" anchor="ctr">
                     <a:lnL w="0" cap="flat" cmpd="sng" algn="ctr">
                       <a:noFill/>
                     </a:lnL>
@@ -4170,7 +4170,7 @@
                       </a:endParaRPr>
                     </a:p>
                   </a:txBody>
-                  <a:tcPr marL="5486400" marR="5486400" marT="0" marB="0" anchor="ctr">
+                  <a:tcPr marL="73152" marR="73152" marT="0" marB="0" anchor="ctr">
                     <a:lnL w="0" cap="flat" cmpd="sng" algn="ctr">
                       <a:noFill/>
                     </a:lnL>
@@ -4214,7 +4214,7 @@
                       </a:endParaRPr>
                     </a:p>
                   </a:txBody>
-                  <a:tcPr marL="5486400" marR="5486400" marT="0" marB="0" anchor="ctr">
+                  <a:tcPr marL="73152" marR="73152" marT="0" marB="0" anchor="ctr">
                     <a:lnL w="0" cap="flat" cmpd="sng" algn="ctr">
                       <a:noFill/>
                     </a:lnL>
@@ -4258,7 +4258,7 @@
                       </a:endParaRPr>
                     </a:p>
                   </a:txBody>
-                  <a:tcPr marL="5486400" marR="5486400" marT="0" marB="0" anchor="ctr">
+                  <a:tcPr marL="73152" marR="73152" marT="0" marB="0" anchor="ctr">
                     <a:lnL w="0" cap="flat" cmpd="sng" algn="ctr">
                       <a:noFill/>
                     </a:lnL>
@@ -4302,7 +4302,7 @@
                       </a:endParaRPr>
                     </a:p>
                   </a:txBody>
-                  <a:tcPr marL="5486400" marR="5486400" marT="0" marB="0" anchor="ctr">
+                  <a:tcPr marL="73152" marR="73152" marT="0" marB="0" anchor="ctr">
                     <a:lnL w="0" cap="flat" cmpd="sng" algn="ctr">
                       <a:noFill/>
                     </a:lnL>
@@ -4348,7 +4348,7 @@
                       </a:endParaRPr>
                     </a:p>
                   </a:txBody>
-                  <a:tcPr marL="5486400" marR="5486400" marT="0" marB="0" anchor="ctr">
+                  <a:tcPr marL="73152" marR="73152" marT="0" marB="0" anchor="ctr">
                     <a:lnL w="0" cap="flat" cmpd="sng" algn="ctr">
                       <a:noFill/>
                     </a:lnL>
@@ -4392,7 +4392,7 @@
                       </a:endParaRPr>
                     </a:p>
                   </a:txBody>
-                  <a:tcPr marL="5486400" marR="5486400" marT="0" marB="0" anchor="ctr">
+                  <a:tcPr marL="73152" marR="73152" marT="0" marB="0" anchor="ctr">
                     <a:lnL w="0" cap="flat" cmpd="sng" algn="ctr">
                       <a:noFill/>
                     </a:lnL>
@@ -4436,7 +4436,7 @@
                       </a:endParaRPr>
                     </a:p>
                   </a:txBody>
-                  <a:tcPr marL="5486400" marR="5486400" marT="0" marB="0" anchor="ctr">
+                  <a:tcPr marL="73152" marR="73152" marT="0" marB="0" anchor="ctr">
                     <a:lnL w="0" cap="flat" cmpd="sng" algn="ctr">
                       <a:noFill/>
                     </a:lnL>
@@ -4480,7 +4480,7 @@
                       </a:endParaRPr>
                     </a:p>
                   </a:txBody>
-                  <a:tcPr marL="5486400" marR="5486400" marT="0" marB="0" anchor="ctr">
+                  <a:tcPr marL="73152" marR="73152" marT="0" marB="0" anchor="ctr">
                     <a:lnL w="0" cap="flat" cmpd="sng" algn="ctr">
                       <a:noFill/>
                     </a:lnL>
@@ -4526,7 +4526,7 @@
                       </a:endParaRPr>
                     </a:p>
                   </a:txBody>
-                  <a:tcPr marL="5486400" marR="5486400" marT="0" marB="0" anchor="ctr">
+                  <a:tcPr marL="73152" marR="73152" marT="0" marB="0" anchor="ctr">
                     <a:lnL w="0" cap="flat" cmpd="sng" algn="ctr">
                       <a:noFill/>
                     </a:lnL>
@@ -4570,7 +4570,7 @@
                       </a:endParaRPr>
                     </a:p>
                   </a:txBody>
-                  <a:tcPr marL="5486400" marR="5486400" marT="0" marB="0" anchor="ctr">
+                  <a:tcPr marL="73152" marR="73152" marT="0" marB="0" anchor="ctr">
                     <a:lnL w="0" cap="flat" cmpd="sng" algn="ctr">
                       <a:noFill/>
                     </a:lnL>
@@ -4614,7 +4614,7 @@
                       </a:endParaRPr>
                     </a:p>
                   </a:txBody>
-                  <a:tcPr marL="5486400" marR="5486400" marT="0" marB="0" anchor="ctr">
+                  <a:tcPr marL="73152" marR="73152" marT="0" marB="0" anchor="ctr">
                     <a:lnL w="0" cap="flat" cmpd="sng" algn="ctr">
                       <a:noFill/>
                     </a:lnL>
@@ -4658,7 +4658,7 @@
                       </a:endParaRPr>
                     </a:p>
                   </a:txBody>
-                  <a:tcPr marL="5486400" marR="5486400" marT="0" marB="0" anchor="ctr">
+                  <a:tcPr marL="73152" marR="73152" marT="0" marB="0" anchor="ctr">
                     <a:lnL w="0" cap="flat" cmpd="sng" algn="ctr">
                       <a:noFill/>
                     </a:lnL>
@@ -4704,7 +4704,7 @@
                       </a:endParaRPr>
                     </a:p>
                   </a:txBody>
-                  <a:tcPr marL="5486400" marR="5486400" marT="0" marB="0" anchor="ctr">
+                  <a:tcPr marL="73152" marR="73152" marT="0" marB="0" anchor="ctr">
                     <a:lnL w="0" cap="flat" cmpd="sng" algn="ctr">
                       <a:noFill/>
                     </a:lnL>
@@ -4748,7 +4748,7 @@
                       </a:endParaRPr>
                     </a:p>
                   </a:txBody>
-                  <a:tcPr marL="5486400" marR="5486400" marT="0" marB="0" anchor="ctr">
+                  <a:tcPr marL="73152" marR="73152" marT="0" marB="0" anchor="ctr">
                     <a:lnL w="0" cap="flat" cmpd="sng" algn="ctr">
                       <a:noFill/>
                     </a:lnL>
@@ -4792,7 +4792,7 @@
                       </a:endParaRPr>
                     </a:p>
                   </a:txBody>
-                  <a:tcPr marL="5486400" marR="5486400" marT="0" marB="0" anchor="ctr">
+                  <a:tcPr marL="73152" marR="73152" marT="0" marB="0" anchor="ctr">
                     <a:lnL w="0" cap="flat" cmpd="sng" algn="ctr">
                       <a:noFill/>
                     </a:lnL>
@@ -4836,7 +4836,7 @@
                       </a:endParaRPr>
                     </a:p>
                   </a:txBody>
-                  <a:tcPr marL="5486400" marR="5486400" marT="0" marB="0" anchor="ctr">
+                  <a:tcPr marL="73152" marR="73152" marT="0" marB="0" anchor="ctr">
                     <a:lnL w="0" cap="flat" cmpd="sng" algn="ctr">
                       <a:noFill/>
                     </a:lnL>
@@ -4882,7 +4882,7 @@
                       </a:endParaRPr>
                     </a:p>
                   </a:txBody>
-                  <a:tcPr marL="5486400" marR="5486400" marT="0" marB="0" anchor="ctr">
+                  <a:tcPr marL="73152" marR="73152" marT="0" marB="0" anchor="ctr">
                     <a:lnL w="0" cap="flat" cmpd="sng" algn="ctr">
                       <a:noFill/>
                     </a:lnL>
@@ -4926,7 +4926,7 @@
                       </a:endParaRPr>
                     </a:p>
                   </a:txBody>
-                  <a:tcPr marL="5486400" marR="5486400" marT="0" marB="0" anchor="ctr">
+                  <a:tcPr marL="73152" marR="73152" marT="0" marB="0" anchor="ctr">
                     <a:lnL w="0" cap="flat" cmpd="sng" algn="ctr">
                       <a:noFill/>
                     </a:lnL>
@@ -4970,7 +4970,7 @@
                       </a:endParaRPr>
                     </a:p>
                   </a:txBody>
-                  <a:tcPr marL="5486400" marR="5486400" marT="0" marB="0" anchor="ctr">
+                  <a:tcPr marL="73152" marR="73152" marT="0" marB="0" anchor="ctr">
                     <a:lnL w="0" cap="flat" cmpd="sng" algn="ctr">
                       <a:noFill/>
                     </a:lnL>
@@ -5014,7 +5014,7 @@
                       </a:endParaRPr>
                     </a:p>
                   </a:txBody>
-                  <a:tcPr marL="5486400" marR="5486400" marT="0" marB="0" anchor="ctr">
+                  <a:tcPr marL="73152" marR="73152" marT="0" marB="0" anchor="ctr">
                     <a:lnL w="0" cap="flat" cmpd="sng" algn="ctr">
                       <a:noFill/>
                     </a:lnL>
